--- a/Ecommerce-Admin-DevOps-Capstone.pptx
+++ b/Ecommerce-Admin-DevOps-Capstone.pptx
@@ -18,9 +18,11 @@
     <p:sldId id="266" r:id="rId12"/>
     <p:sldId id="267" r:id="rId13"/>
     <p:sldId id="268" r:id="rId14"/>
+    <p:sldId id="269" r:id="rId15"/>
+    <p:sldId id="270" r:id="rId16"/>
   </p:sldIdLst>
   <p:notesMasterIdLst>
-    <p:notesMasterId r:id="rId15"/>
+    <p:notesMasterId r:id="rId17"/>
   </p:notesMasterIdLst>
   <p:sldSz cx="9144000" cy="5143500"/>
   <p:notesSz cx="5143500" cy="9144000"/>
@@ -119,33 +121,35 @@
   <p:extLst>
     <p:ext uri="{521415D9-36F7-43E2-AB2F-B90AF26B5E84}">
       <p14:sectionLst xmlns:p14="http://schemas.microsoft.com/office/powerpoint/2010/main">
-        <p14:section name="Intro" id="{241457fe-90cd-78de-0587-3b85ddbede67}">
+        <p14:section name="Intro" id="{0790e517-6526-489f-a790-0f22a03efdd7}">
           <p14:sldIdLst>
             <p14:sldId id="256"/>
             <p14:sldId id="257"/>
             <p14:sldId id="258"/>
+            <p14:sldId id="259"/>
           </p14:sldIdLst>
         </p14:section>
-        <p14:section name="How we built it" id="{8019c0c8-6f48-1950-72d6-ffd72a9c985d}">
+        <p14:section name="How we built it" id="{3f88bcd3-ca6b-6933-6474-32949cad6a3f}">
           <p14:sldIdLst>
-            <p14:sldId id="259"/>
             <p14:sldId id="260"/>
+            <p14:sldId id="261"/>
           </p14:sldIdLst>
         </p14:section>
-        <p14:section name="Proof" id="{9680adfa-bcab-76f0-20aa-aad522bd17be}">
+        <p14:section name="Proof" id="{fc2c5265-4521-54b6-e525-50a3be227e29}">
           <p14:sldIdLst>
-            <p14:sldId id="261"/>
             <p14:sldId id="262"/>
             <p14:sldId id="263"/>
             <p14:sldId id="264"/>
             <p14:sldId id="265"/>
             <p14:sldId id="266"/>
+            <p14:sldId id="267"/>
+            <p14:sldId id="268"/>
           </p14:sldIdLst>
         </p14:section>
-        <p14:section name="Wrap-up" id="{0099575a-7689-2a4a-9d69-44cd9112d7c7}">
+        <p14:section name="Wrap-up" id="{db931d9d-305b-41f4-777b-445439918970}">
           <p14:sldIdLst>
-            <p14:sldId id="267"/>
-            <p14:sldId id="268"/>
+            <p14:sldId id="269"/>
+            <p14:sldId id="270"/>
           </p14:sldIdLst>
         </p14:section>
       </p14:sectionLst>
@@ -552,7 +556,7 @@
           <a:p>
             <a:r>
               <a:rPr lang="en-US" dirty="0"/>
-              <a:t>Hi, this is Ecommerce Admin. It is a small web app a shop owner can use to manage products, customers and orders. The interesting part is not just the app, but everything around it: how it is tested, packaged, secured, deployed and watched.</a:t>
+              <a:t>Hi, this is Ecommerce Admin. It is a small web app a shop owner uses to manage products, customers and orders. The interesting part is everything around the app: how it is tested, packaged, secured, deployed and watched.</a:t>
             </a:r>
             <a:endParaRPr lang="en-US" dirty="0"/>
           </a:p>
@@ -640,7 +644,7 @@
           <a:p>
             <a:r>
               <a:rPr lang="en-US" dirty="0"/>
-              <a:t>On a single machine, one command, docker compose up, starts the database, the backend and the frontend. The database sits on a private network that the frontend cannot reach.</a:t>
+              <a:t>The same app, opened through the cluster's front door, called an Ingress. Requests for the page go to the frontend, and requests starting with slash api go to the backend.</a:t>
             </a:r>
             <a:endParaRPr lang="en-US" dirty="0"/>
           </a:p>
@@ -728,7 +732,7 @@
           <a:p>
             <a:r>
               <a:rPr lang="en-US" dirty="0"/>
-              <a:t>Prometheus collects numbers from the backend every few seconds and Grafana draws them. This dashboard shows traffic, errors, speed and memory, so we can see problems as they start.</a:t>
+              <a:t>On one machine, a single command, docker compose up, starts the database, backend and frontend. The database sits on a private network that the frontend cannot reach.</a:t>
             </a:r>
             <a:endParaRPr lang="en-US" dirty="0"/>
           </a:p>
@@ -816,7 +820,7 @@
           <a:p>
             <a:r>
               <a:rPr lang="en-US" dirty="0"/>
-              <a:t>Three safety nets. Thirty-one automatic tests gate every change. The security scanner found 88 serious issues across the two images and we fixed them all. And Kubernetes keeps two copies of the frontend and backend so a single crash does not take the app down.</a:t>
+              <a:t>Terraform describes the AWS setup as code: a private network with two public subnets and a Kubernetes cluster called EKS. One command created all fifteen resources, and the same code can remove them again, so nothing is left running up a bill.</a:t>
             </a:r>
             <a:endParaRPr lang="en-US" dirty="0"/>
           </a:p>
@@ -904,7 +908,7 @@
           <a:p>
             <a:r>
               <a:rPr lang="en-US" dirty="0"/>
-              <a:t>To recap: a developer pushes code, the pipeline tests and scans it, publishes images, Kubernetes runs them, and Grafana shows how it is doing. Next steps would be auto-scaling, a permanent database volume and a staging environment. Thank you.</a:t>
+              <a:t>Prometheus collects numbers from the backend every few seconds and Grafana draws them. This dashboard shows traffic, errors, speed and memory, so we can spot problems as they start.</a:t>
             </a:r>
             <a:endParaRPr lang="en-US" dirty="0"/>
           </a:p>
@@ -928,6 +932,182 @@
             <a:fld id="{F7021451-1387-4CA6-816F-3879F97B5CBC}" type="slidenum">
               <a:rPr lang="en-US"/>
               <a:t>13</a:t>
+            </a:fld>
+            <a:endParaRPr lang="en-US"/>
+          </a:p>
+        </p:txBody>
+      </p:sp>
+    </p:spTree>
+    <p:extLst>
+      <p:ext uri="{BB962C8B-B14F-4D97-AF65-F5344CB8AC3E}">
+        <p14:creationId xmlns:p14="http://schemas.microsoft.com/office/powerpoint/2010/main" val="1024086991"/>
+      </p:ext>
+    </p:extLst>
+  </p:cSld>
+  <p:clrMapOvr>
+    <a:masterClrMapping/>
+  </p:clrMapOvr>
+</p:notes>
+</file>
+
+<file path=ppt/notesSlides/notesSlide14.xml><?xml version="1.0" encoding="utf-8"?>
+<p:notes xmlns:a="http://schemas.openxmlformats.org/drawingml/2006/main" xmlns:r="http://schemas.openxmlformats.org/officeDocument/2006/relationships" xmlns:p="http://schemas.openxmlformats.org/presentationml/2006/main">
+  <p:cSld>
+    <p:spTree>
+      <p:nvGrpSpPr>
+        <p:cNvPr id="1" name=""/>
+        <p:cNvGrpSpPr/>
+        <p:nvPr/>
+      </p:nvGrpSpPr>
+      <p:grpSpPr>
+        <a:xfrm>
+          <a:off x="0" y="0"/>
+          <a:ext cx="0" cy="0"/>
+          <a:chOff x="0" y="0"/>
+          <a:chExt cx="0" cy="0"/>
+        </a:xfrm>
+      </p:grpSpPr>
+      <p:sp>
+        <p:nvSpPr>
+          <p:cNvPr id="2" name="Slide Image Placeholder 1"/>
+          <p:cNvSpPr>
+            <a:spLocks noGrp="1" noRot="1" noChangeAspect="1"/>
+          </p:cNvSpPr>
+          <p:nvPr>
+            <p:ph type="sldImg"/>
+          </p:nvPr>
+        </p:nvSpPr>
+        <p:spPr/>
+      </p:sp>
+      <p:sp>
+        <p:nvSpPr>
+          <p:cNvPr id="3" name="Notes Placeholder 2"/>
+          <p:cNvSpPr>
+            <a:spLocks noGrp="1"/>
+          </p:cNvSpPr>
+          <p:nvPr>
+            <p:ph type="body" idx="1"/>
+          </p:nvPr>
+        </p:nvSpPr>
+        <p:spPr/>
+        <p:txBody>
+          <a:bodyPr/>
+          <a:lstStyle/>
+          <a:p>
+            <a:r>
+              <a:rPr lang="en-US" dirty="0"/>
+              <a:t>Three safety nets. Thirty-one automatic tests gate every change. The security scanner found 88 serious issues across the two images, and we fixed them all. And Kubernetes keeps two copies of the frontend and backend, so one crash does not take the app down.</a:t>
+            </a:r>
+            <a:endParaRPr lang="en-US" dirty="0"/>
+          </a:p>
+        </p:txBody>
+      </p:sp>
+      <p:sp>
+        <p:nvSpPr>
+          <p:cNvPr id="4" name="Slide Number Placeholder 3"/>
+          <p:cNvSpPr>
+            <a:spLocks noGrp="1"/>
+          </p:cNvSpPr>
+          <p:nvPr>
+            <p:ph type="sldNum" sz="quarter" idx="10"/>
+          </p:nvPr>
+        </p:nvSpPr>
+        <p:spPr/>
+        <p:txBody>
+          <a:bodyPr/>
+          <a:lstStyle/>
+          <a:p>
+            <a:fld id="{F7021451-1387-4CA6-816F-3879F97B5CBC}" type="slidenum">
+              <a:rPr lang="en-US"/>
+              <a:t>14</a:t>
+            </a:fld>
+            <a:endParaRPr lang="en-US"/>
+          </a:p>
+        </p:txBody>
+      </p:sp>
+    </p:spTree>
+    <p:extLst>
+      <p:ext uri="{BB962C8B-B14F-4D97-AF65-F5344CB8AC3E}">
+        <p14:creationId xmlns:p14="http://schemas.microsoft.com/office/powerpoint/2010/main" val="1024086991"/>
+      </p:ext>
+    </p:extLst>
+  </p:cSld>
+  <p:clrMapOvr>
+    <a:masterClrMapping/>
+  </p:clrMapOvr>
+</p:notes>
+</file>
+
+<file path=ppt/notesSlides/notesSlide15.xml><?xml version="1.0" encoding="utf-8"?>
+<p:notes xmlns:a="http://schemas.openxmlformats.org/drawingml/2006/main" xmlns:r="http://schemas.openxmlformats.org/officeDocument/2006/relationships" xmlns:p="http://schemas.openxmlformats.org/presentationml/2006/main">
+  <p:cSld>
+    <p:spTree>
+      <p:nvGrpSpPr>
+        <p:cNvPr id="1" name=""/>
+        <p:cNvGrpSpPr/>
+        <p:nvPr/>
+      </p:nvGrpSpPr>
+      <p:grpSpPr>
+        <a:xfrm>
+          <a:off x="0" y="0"/>
+          <a:ext cx="0" cy="0"/>
+          <a:chOff x="0" y="0"/>
+          <a:chExt cx="0" cy="0"/>
+        </a:xfrm>
+      </p:grpSpPr>
+      <p:sp>
+        <p:nvSpPr>
+          <p:cNvPr id="2" name="Slide Image Placeholder 1"/>
+          <p:cNvSpPr>
+            <a:spLocks noGrp="1" noRot="1" noChangeAspect="1"/>
+          </p:cNvSpPr>
+          <p:nvPr>
+            <p:ph type="sldImg"/>
+          </p:nvPr>
+        </p:nvSpPr>
+        <p:spPr/>
+      </p:sp>
+      <p:sp>
+        <p:nvSpPr>
+          <p:cNvPr id="3" name="Notes Placeholder 2"/>
+          <p:cNvSpPr>
+            <a:spLocks noGrp="1"/>
+          </p:cNvSpPr>
+          <p:nvPr>
+            <p:ph type="body" idx="1"/>
+          </p:nvPr>
+        </p:nvSpPr>
+        <p:spPr/>
+        <p:txBody>
+          <a:bodyPr/>
+          <a:lstStyle/>
+          <a:p>
+            <a:r>
+              <a:rPr lang="en-US" dirty="0"/>
+              <a:t>To recap: a developer pushes code, the pipeline tests and scans it and publishes images, we deploy them to Kubernetes, and Grafana shows how it is doing. Next steps would be automatic deploys and a staging environment. Thank you.</a:t>
+            </a:r>
+            <a:endParaRPr lang="en-US" dirty="0"/>
+          </a:p>
+        </p:txBody>
+      </p:sp>
+      <p:sp>
+        <p:nvSpPr>
+          <p:cNvPr id="4" name="Slide Number Placeholder 3"/>
+          <p:cNvSpPr>
+            <a:spLocks noGrp="1"/>
+          </p:cNvSpPr>
+          <p:nvPr>
+            <p:ph type="sldNum" sz="quarter" idx="10"/>
+          </p:nvPr>
+        </p:nvSpPr>
+        <p:spPr/>
+        <p:txBody>
+          <a:bodyPr/>
+          <a:lstStyle/>
+          <a:p>
+            <a:fld id="{F7021451-1387-4CA6-816F-3879F97B5CBC}" type="slidenum">
+              <a:rPr lang="en-US"/>
+              <a:t>15</a:t>
             </a:fld>
             <a:endParaRPr lang="en-US"/>
           </a:p>
@@ -992,7 +1172,7 @@
           <a:p>
             <a:r>
               <a:rPr lang="en-US" dirty="0"/>
-              <a:t>A shop owner needs three things: to know what they sell and how much is left, to know who their customers are and what they ordered, and to see how the business is doing. This app puts those on one screen, and the layout also works on a phone.</a:t>
+              <a:t>A shop owner needs to know what they sell and how much is left, who their customers are and what they ordered, and how the business is doing. The app puts all three on one screen, and it works on a phone too. Why build it? Because spreadsheets get messy fast.</a:t>
             </a:r>
             <a:endParaRPr lang="en-US" dirty="0"/>
           </a:p>
@@ -1080,7 +1260,7 @@
           <a:p>
             <a:r>
               <a:rPr lang="en-US" dirty="0"/>
-              <a:t>Think of a restaurant. The web page is the menu you read. Nginx is the doorman who greets you and passes your order on. FastAPI is the kitchen that applies the rules. PostgreSQL is the pantry book that remembers everything. Each one runs in its own container.</a:t>
+              <a:t>The app itself uses React for the screen, FastAPI for the logic, PostgreSQL for storage and Nginx to serve the page. Around it: Docker packages it, GitHub Actions automates it, Trivy scans for security problems, Terraform describes the cloud setup, Kubernetes and Helm run it, and Prometheus and Grafana watch it.</a:t>
             </a:r>
             <a:endParaRPr lang="en-US" dirty="0"/>
           </a:p>
@@ -1168,7 +1348,7 @@
           <a:p>
             <a:r>
               <a:rPr lang="en-US" dirty="0"/>
-              <a:t>We built it in this order. First the app, then tests so we can trust it, then Git so every change is recorded. Containers make it run the same everywhere. A pipeline then tests and builds on every push, and a security scanner checks the images. Terraform describes the cloud setup, Kubernetes runs it, and Prometheus with Grafana lets us watch it.</a:t>
+              <a:t>Think of a restaurant. The web page is the menu you read. Nginx is the doorman who passes your order on. FastAPI is the kitchen that applies the rules. PostgreSQL is the pantry book that remembers everything. Each one runs in its own container, so any one can be changed without touching the others.</a:t>
             </a:r>
             <a:endParaRPr lang="en-US" dirty="0"/>
           </a:p>
@@ -1256,7 +1436,7 @@
           <a:p>
             <a:r>
               <a:rPr lang="en-US" dirty="0"/>
-              <a:t>These were the main decisions. Splitting the screen and the brain lets each change independently. Compose is fine on one laptop, but Kubernetes keeps copies running and restarts failures. GitHub Actions needs no extra server. And switching to slim Alpine images removed dozens of security findings.</a:t>
+              <a:t>We built it in this order. First the app, then tests so we can trust it, then Git so every change is recorded. Containers make it run the same everywhere. A pipeline tests and builds on every push, and a scanner checks for security problems. Terraform describes the cloud setup, Kubernetes runs it, and Prometheus with Grafana lets us watch it.</a:t>
             </a:r>
             <a:endParaRPr lang="en-US" dirty="0"/>
           </a:p>
@@ -1344,7 +1524,7 @@
           <a:p>
             <a:r>
               <a:rPr lang="en-US" dirty="0"/>
-              <a:t>This is GitHub Actions after a push to main. Tests and the frontend build run first. Only if they pass do the Docker images get built and published, each tagged with the commit it came from.</a:t>
+              <a:t>These were the main decisions and what we passed on. Splitting the screen and the brain lets each change independently. Compose is fine on one laptop, but Kubernetes restarts failures and scales. GitHub Actions needs no extra server. And slim Alpine images removed dozens of security findings.</a:t>
             </a:r>
             <a:endParaRPr lang="en-US" dirty="0"/>
           </a:p>
@@ -1432,7 +1612,7 @@
           <a:p>
             <a:r>
               <a:rPr lang="en-US" dirty="0"/>
-              <a:t>Everything is in one public GitHub repository: the frontend, the backend, the pipeline definition and the deployment files. Each milestone is a separate commit, so the history shows how the project grew.</a:t>
+              <a:t>This is GitHub Actions after a push to main. Tests and the frontend build run first. Only if they pass do the Docker images get built and published, each tagged with the commit it came from.</a:t>
             </a:r>
             <a:endParaRPr lang="en-US" dirty="0"/>
           </a:p>
@@ -1520,7 +1700,7 @@
           <a:p>
             <a:r>
               <a:rPr lang="en-US" dirty="0"/>
-              <a:t>Here the app is running on a local Kubernetes cluster, installed with one Helm command. There are five pods, all Running. The frontend and backend each have two copies, so if one fails the other keeps serving.</a:t>
+              <a:t>Everything is in one public GitHub repository: the frontend, the backend, the pipeline and the deployment files. Each milestone is its own commit, so the history shows how the project grew.</a:t>
             </a:r>
             <a:endParaRPr lang="en-US" dirty="0"/>
           </a:p>
@@ -1608,7 +1788,7 @@
           <a:p>
             <a:r>
               <a:rPr lang="en-US" dirty="0"/>
-              <a:t>This is the same app, opened through the cluster's front door, called an Ingress. Requests for the page go to the frontend and requests starting with slash api go to the backend.</a:t>
+              <a:t>Here the app runs on a local Kubernetes cluster, installed with one Helm command. Five pods, all Running. The frontend and backend each have two copies, so if one fails the other keeps serving.</a:t>
             </a:r>
             <a:endParaRPr lang="en-US" dirty="0"/>
           </a:p>
@@ -2501,7 +2681,7 @@
                   <a:schemeClr val="tx2"/>
                 </a:solidFill>
               </a:rPr>
-              <a:t>Proof 4: Docker Compose</a:t>
+              <a:t>The app, served by Kubernetes</a:t>
             </a:r>
             <a:endParaRPr lang="en-US" sz="3400" dirty="0"/>
           </a:p>
@@ -2509,14 +2689,14 @@
       </p:sp>
       <p:sp>
         <p:nvSpPr>
-          <p:cNvPr id="3" name="compose screenshot frame"/>
+          <p:cNvPr id="3" name="app via ingress screenshot frame"/>
           <p:cNvSpPr/>
           <p:nvPr/>
         </p:nvSpPr>
         <p:spPr>
           <a:xfrm>
             <a:off x="420624" y="1243584"/>
-            <a:ext cx="4828032" cy="3330960"/>
+            <a:ext cx="5559552" cy="3321627"/>
           </a:xfrm>
           <a:prstGeom prst="rect">
             <a:avLst/>
@@ -2541,7 +2721,7 @@
       </p:sp>
       <p:pic>
         <p:nvPicPr>
-          <p:cNvPr id="4" name="compose screenshot" descr="Terminal output of docker compose up --build starting the database, backend and frontend">    </p:cNvPr>
+          <p:cNvPr id="4" name="app via ingress screenshot" descr="The Products page of the app opened through the Kubernetes ingress">    </p:cNvPr>
           <p:cNvPicPr>
             <a:picLocks noChangeAspect="1"/>
           </p:cNvPicPr>
@@ -2556,7 +2736,7 @@
         <p:spPr>
           <a:xfrm>
             <a:off x="457200" y="1280160"/>
-            <a:ext cx="4754880" cy="3257808"/>
+            <a:ext cx="5486400" cy="3248475"/>
           </a:xfrm>
           <a:prstGeom prst="rect">
             <a:avLst/>
@@ -2565,26 +2745,26 @@
       </p:pic>
       <p:sp>
         <p:nvSpPr>
-          <p:cNvPr id="5" name="ps card"/>
+          <p:cNvPr id="5" name="ingress card"/>
           <p:cNvSpPr/>
           <p:nvPr/>
         </p:nvSpPr>
         <p:spPr>
           <a:xfrm>
-            <a:off x="5532120" y="1280160"/>
-            <a:ext cx="3154680" cy="3291840"/>
+            <a:off x="6263640" y="1280160"/>
+            <a:ext cx="2423160" cy="3291840"/>
           </a:xfrm>
           <a:prstGeom prst="roundRect">
             <a:avLst>
-              <a:gd name="adj" fmla="val 3478"/>
+              <a:gd name="adj" fmla="val 4528"/>
             </a:avLst>
           </a:prstGeom>
           <a:solidFill>
-            <a:schemeClr val="tx2"/>
+            <a:schemeClr val="bg2"/>
           </a:solidFill>
           <a:ln w="12700">
             <a:solidFill>
-              <a:schemeClr val="tx2"/>
+              <a:schemeClr val="bg2"/>
             </a:solidFill>
             <a:prstDash val="solid"/>
           </a:ln>
@@ -2592,14 +2772,63 @@
       </p:sp>
       <p:sp>
         <p:nvSpPr>
-          <p:cNvPr id="6" name="ps heading"/>
+          <p:cNvPr id="6" name="ingress circle"/>
+          <p:cNvSpPr/>
+          <p:nvPr/>
+        </p:nvSpPr>
+        <p:spPr>
+          <a:xfrm>
+            <a:off x="6446520" y="1463040"/>
+            <a:ext cx="457200" cy="457200"/>
+          </a:xfrm>
+          <a:prstGeom prst="ellipse">
+            <a:avLst/>
+          </a:prstGeom>
+          <a:solidFill>
+            <a:schemeClr val="accent1"/>
+          </a:solidFill>
+          <a:ln w="12700">
+            <a:solidFill>
+              <a:schemeClr val="accent1"/>
+            </a:solidFill>
+            <a:prstDash val="solid"/>
+          </a:ln>
+        </p:spPr>
+      </p:sp>
+      <p:pic>
+        <p:nvPicPr>
+          <p:cNvPr id="7" name="ingress icon" descr="ingress">    </p:cNvPr>
+          <p:cNvPicPr>
+            <a:picLocks noChangeAspect="1"/>
+          </p:cNvPicPr>
+          <p:nvPr/>
+        </p:nvPicPr>
+        <p:blipFill>
+          <a:blip r:embed="rId2"/>
+          <a:stretch>
+            <a:fillRect/>
+          </a:stretch>
+        </p:blipFill>
+        <p:spPr>
+          <a:xfrm>
+            <a:off x="6569964" y="1586484"/>
+            <a:ext cx="210312" cy="210312"/>
+          </a:xfrm>
+          <a:prstGeom prst="rect">
+            <a:avLst/>
+          </a:prstGeom>
+        </p:spPr>
+      </p:pic>
+      <p:sp>
+        <p:nvSpPr>
+          <p:cNvPr id="8" name="ingress heading"/>
           <p:cNvSpPr txBox="1"/>
           <p:nvPr/>
         </p:nvSpPr>
         <p:spPr>
           <a:xfrm>
-            <a:off x="5715000" y="1417320"/>
-            <a:ext cx="2834640" cy="365760"/>
+            <a:off x="7013448" y="1463040"/>
+            <a:ext cx="1508760" cy="457200"/>
           </a:xfrm>
           <a:prstGeom prst="rect">
             <a:avLst/>
@@ -2615,100 +2844,27 @@
               <a:buNone/>
             </a:pPr>
             <a:r>
-              <a:rPr lang="en-US" sz="1400" b="1" dirty="0">
-                <a:solidFill>
-                  <a:schemeClr val="bg2"/>
+              <a:rPr lang="en-US" sz="1600" b="1" dirty="0">
+                <a:solidFill>
+                  <a:schemeClr val="tx2"/>
                 </a:solidFill>
               </a:rPr>
-              <a:t>docker compose ps</a:t>
-            </a:r>
-            <a:endParaRPr lang="en-US" sz="1400" dirty="0"/>
-          </a:p>
-        </p:txBody>
-      </p:sp>
-      <p:sp>
-        <p:nvSpPr>
-          <p:cNvPr id="7" name="ps output"/>
+              <a:t>The front door</a:t>
+            </a:r>
+            <a:endParaRPr lang="en-US" sz="1600" dirty="0"/>
+          </a:p>
+        </p:txBody>
+      </p:sp>
+      <p:sp>
+        <p:nvSpPr>
+          <p:cNvPr id="9" name="ingress points"/>
           <p:cNvSpPr txBox="1"/>
           <p:nvPr/>
         </p:nvSpPr>
         <p:spPr>
           <a:xfrm>
-            <a:off x="5715000" y="1874520"/>
-            <a:ext cx="2834640" cy="914400"/>
-          </a:xfrm>
-          <a:prstGeom prst="rect">
-            <a:avLst/>
-          </a:prstGeom>
-          <a:noFill/>
-          <a:ln/>
-        </p:spPr>
-        <p:txBody>
-          <a:bodyPr wrap="square" lIns="0" tIns="0" rIns="0" bIns="0" rtlCol="0" anchor="t"/>
-          <a:lstStyle/>
-          <a:p>
-            <a:pPr indent="0" marL="0">
-              <a:buNone/>
-            </a:pPr>
-            <a:r>
-              <a:rPr lang="en-US" sz="1100" dirty="0">
-                <a:solidFill>
-                  <a:schemeClr val="accent2"/>
-                </a:solidFill>
-                <a:latin typeface="Courier New" pitchFamily="34" charset="0"/>
-                <a:ea typeface="Courier New" pitchFamily="34" charset="-122"/>
-                <a:cs typeface="Courier New" pitchFamily="34" charset="-120"/>
-              </a:rPr>
-              <a:t>backend    Up           port 8000</a:t>
-            </a:r>
-            <a:endParaRPr lang="en-US" sz="1100" dirty="0"/>
-          </a:p>
-          <a:p>
-            <a:pPr indent="0" marL="0">
-              <a:buNone/>
-            </a:pPr>
-            <a:r>
-              <a:rPr lang="en-US" sz="1100" dirty="0">
-                <a:solidFill>
-                  <a:schemeClr val="accent2"/>
-                </a:solidFill>
-                <a:latin typeface="Courier New" pitchFamily="34" charset="0"/>
-                <a:ea typeface="Courier New" pitchFamily="34" charset="-122"/>
-                <a:cs typeface="Courier New" pitchFamily="34" charset="-120"/>
-              </a:rPr>
-              <a:t>db         Up (healthy) private</a:t>
-            </a:r>
-            <a:endParaRPr lang="en-US" sz="1100" dirty="0"/>
-          </a:p>
-          <a:p>
-            <a:pPr indent="0" marL="0">
-              <a:buNone/>
-            </a:pPr>
-            <a:r>
-              <a:rPr lang="en-US" sz="1100" dirty="0">
-                <a:solidFill>
-                  <a:schemeClr val="accent2"/>
-                </a:solidFill>
-                <a:latin typeface="Courier New" pitchFamily="34" charset="0"/>
-                <a:ea typeface="Courier New" pitchFamily="34" charset="-122"/>
-                <a:cs typeface="Courier New" pitchFamily="34" charset="-120"/>
-              </a:rPr>
-              <a:t>frontend   Up           port 3000</a:t>
-            </a:r>
-            <a:endParaRPr lang="en-US" sz="1100" dirty="0"/>
-          </a:p>
-        </p:txBody>
-      </p:sp>
-      <p:sp>
-        <p:nvSpPr>
-          <p:cNvPr id="8" name="compose points"/>
-          <p:cNvSpPr txBox="1"/>
-          <p:nvPr/>
-        </p:nvSpPr>
-        <p:spPr>
-          <a:xfrm>
-            <a:off x="5715000" y="2926080"/>
-            <a:ext cx="2834640" cy="1554480"/>
+            <a:off x="6446520" y="2103120"/>
+            <a:ext cx="2057400" cy="2331720"/>
           </a:xfrm>
           <a:prstGeom prst="rect">
             <a:avLst/>
@@ -2730,10 +2886,10 @@
             <a:r>
               <a:rPr lang="en-US" sz="1400" dirty="0">
                 <a:solidFill>
-                  <a:schemeClr val="bg1"/>
+                  <a:schemeClr val="tx1"/>
                 </a:solidFill>
               </a:rPr>
-              <a:t>One command starts all three</a:t>
+              <a:t>Opened through the cluster's Ingress</a:t>
             </a:r>
             <a:endParaRPr lang="en-US" sz="1400" dirty="0"/>
           </a:p>
@@ -2748,10 +2904,10 @@
             <a:r>
               <a:rPr lang="en-US" sz="1400" dirty="0">
                 <a:solidFill>
-                  <a:schemeClr val="bg1"/>
+                  <a:schemeClr val="tx1"/>
                 </a:solidFill>
               </a:rPr>
-              <a:t>The database is kept private from the frontend</a:t>
+              <a:t>Same app, now run by Kubernetes</a:t>
             </a:r>
             <a:endParaRPr lang="en-US" sz="1400" dirty="0"/>
           </a:p>
@@ -2859,7 +3015,7 @@
                   <a:schemeClr val="tx2"/>
                 </a:solidFill>
               </a:rPr>
-              <a:t>Watching it live</a:t>
+              <a:t>Proof 4: Docker Compose</a:t>
             </a:r>
             <a:endParaRPr lang="en-US" sz="3400" dirty="0"/>
           </a:p>
@@ -2867,14 +3023,14 @@
       </p:sp>
       <p:sp>
         <p:nvSpPr>
-          <p:cNvPr id="3" name="grafana screenshot frame"/>
+          <p:cNvPr id="3" name="compose screenshot frame"/>
           <p:cNvSpPr/>
           <p:nvPr/>
         </p:nvSpPr>
         <p:spPr>
           <a:xfrm>
             <a:off x="420624" y="1243584"/>
-            <a:ext cx="5559552" cy="3324782"/>
+            <a:ext cx="4828032" cy="3330960"/>
           </a:xfrm>
           <a:prstGeom prst="rect">
             <a:avLst/>
@@ -2899,7 +3055,7 @@
       </p:sp>
       <p:pic>
         <p:nvPicPr>
-          <p:cNvPr id="4" name="grafana screenshot" descr="Grafana dashboard with requests per second, error rate, latency and memory panels">    </p:cNvPr>
+          <p:cNvPr id="4" name="compose screenshot" descr="Terminal output of docker compose up --build starting the database, backend and frontend">    </p:cNvPr>
           <p:cNvPicPr>
             <a:picLocks noChangeAspect="1"/>
           </p:cNvPicPr>
@@ -2914,7 +3070,7 @@
         <p:spPr>
           <a:xfrm>
             <a:off x="457200" y="1280160"/>
-            <a:ext cx="5486400" cy="3251630"/>
+            <a:ext cx="4754880" cy="3257808"/>
           </a:xfrm>
           <a:prstGeom prst="rect">
             <a:avLst/>
@@ -2923,26 +3079,26 @@
       </p:pic>
       <p:sp>
         <p:nvSpPr>
-          <p:cNvPr id="5" name="grafana card"/>
+          <p:cNvPr id="5" name="ps card"/>
           <p:cNvSpPr/>
           <p:nvPr/>
         </p:nvSpPr>
         <p:spPr>
           <a:xfrm>
-            <a:off x="6263640" y="1280160"/>
-            <a:ext cx="2423160" cy="3291840"/>
+            <a:off x="5532120" y="1280160"/>
+            <a:ext cx="3154680" cy="3291840"/>
           </a:xfrm>
           <a:prstGeom prst="roundRect">
             <a:avLst>
-              <a:gd name="adj" fmla="val 4528"/>
+              <a:gd name="adj" fmla="val 3478"/>
             </a:avLst>
           </a:prstGeom>
           <a:solidFill>
-            <a:schemeClr val="bg2"/>
+            <a:schemeClr val="tx2"/>
           </a:solidFill>
           <a:ln w="12700">
             <a:solidFill>
-              <a:schemeClr val="bg2"/>
+              <a:schemeClr val="tx2"/>
             </a:solidFill>
             <a:prstDash val="solid"/>
           </a:ln>
@@ -2950,63 +3106,14 @@
       </p:sp>
       <p:sp>
         <p:nvSpPr>
-          <p:cNvPr id="6" name="grafana circle"/>
-          <p:cNvSpPr/>
-          <p:nvPr/>
-        </p:nvSpPr>
-        <p:spPr>
-          <a:xfrm>
-            <a:off x="6446520" y="1463040"/>
-            <a:ext cx="457200" cy="457200"/>
-          </a:xfrm>
-          <a:prstGeom prst="ellipse">
-            <a:avLst/>
-          </a:prstGeom>
-          <a:solidFill>
-            <a:schemeClr val="accent1"/>
-          </a:solidFill>
-          <a:ln w="12700">
-            <a:solidFill>
-              <a:schemeClr val="accent1"/>
-            </a:solidFill>
-            <a:prstDash val="solid"/>
-          </a:ln>
-        </p:spPr>
-      </p:sp>
-      <p:pic>
-        <p:nvPicPr>
-          <p:cNvPr id="7" name="grafana icon" descr="grafana">    </p:cNvPr>
-          <p:cNvPicPr>
-            <a:picLocks noChangeAspect="1"/>
-          </p:cNvPicPr>
-          <p:nvPr/>
-        </p:nvPicPr>
-        <p:blipFill>
-          <a:blip r:embed="rId2"/>
-          <a:stretch>
-            <a:fillRect/>
-          </a:stretch>
-        </p:blipFill>
-        <p:spPr>
-          <a:xfrm>
-            <a:off x="6569964" y="1586484"/>
-            <a:ext cx="210312" cy="210312"/>
-          </a:xfrm>
-          <a:prstGeom prst="rect">
-            <a:avLst/>
-          </a:prstGeom>
-        </p:spPr>
-      </p:pic>
-      <p:sp>
-        <p:nvSpPr>
-          <p:cNvPr id="8" name="grafana heading"/>
+          <p:cNvPr id="6" name="ps heading"/>
           <p:cNvSpPr txBox="1"/>
           <p:nvPr/>
         </p:nvSpPr>
         <p:spPr>
           <a:xfrm>
-            <a:off x="7013448" y="1463040"/>
-            <a:ext cx="1508760" cy="457200"/>
+            <a:off x="5715000" y="1417320"/>
+            <a:ext cx="2834640" cy="365760"/>
           </a:xfrm>
           <a:prstGeom prst="rect">
             <a:avLst/>
@@ -3022,27 +3129,100 @@
               <a:buNone/>
             </a:pPr>
             <a:r>
-              <a:rPr lang="en-US" sz="1600" b="1" dirty="0">
-                <a:solidFill>
-                  <a:schemeClr val="tx2"/>
+              <a:rPr lang="en-US" sz="1400" b="1" dirty="0">
+                <a:solidFill>
+                  <a:schemeClr val="bg2"/>
                 </a:solidFill>
               </a:rPr>
-              <a:t>Four live graphs</a:t>
-            </a:r>
-            <a:endParaRPr lang="en-US" sz="1600" dirty="0"/>
-          </a:p>
-        </p:txBody>
-      </p:sp>
-      <p:sp>
-        <p:nvSpPr>
-          <p:cNvPr id="9" name="grafana points"/>
+              <a:t>docker compose ps</a:t>
+            </a:r>
+            <a:endParaRPr lang="en-US" sz="1400" dirty="0"/>
+          </a:p>
+        </p:txBody>
+      </p:sp>
+      <p:sp>
+        <p:nvSpPr>
+          <p:cNvPr id="7" name="ps output"/>
           <p:cNvSpPr txBox="1"/>
           <p:nvPr/>
         </p:nvSpPr>
         <p:spPr>
           <a:xfrm>
-            <a:off x="6446520" y="2103120"/>
-            <a:ext cx="2057400" cy="2331720"/>
+            <a:off x="5715000" y="1874520"/>
+            <a:ext cx="2834640" cy="914400"/>
+          </a:xfrm>
+          <a:prstGeom prst="rect">
+            <a:avLst/>
+          </a:prstGeom>
+          <a:noFill/>
+          <a:ln/>
+        </p:spPr>
+        <p:txBody>
+          <a:bodyPr wrap="square" lIns="0" tIns="0" rIns="0" bIns="0" rtlCol="0" anchor="t"/>
+          <a:lstStyle/>
+          <a:p>
+            <a:pPr indent="0" marL="0">
+              <a:buNone/>
+            </a:pPr>
+            <a:r>
+              <a:rPr lang="en-US" sz="1100" dirty="0">
+                <a:solidFill>
+                  <a:schemeClr val="accent2"/>
+                </a:solidFill>
+                <a:latin typeface="Courier New" pitchFamily="34" charset="0"/>
+                <a:ea typeface="Courier New" pitchFamily="34" charset="-122"/>
+                <a:cs typeface="Courier New" pitchFamily="34" charset="-120"/>
+              </a:rPr>
+              <a:t>backend    Up           port 8000</a:t>
+            </a:r>
+            <a:endParaRPr lang="en-US" sz="1100" dirty="0"/>
+          </a:p>
+          <a:p>
+            <a:pPr indent="0" marL="0">
+              <a:buNone/>
+            </a:pPr>
+            <a:r>
+              <a:rPr lang="en-US" sz="1100" dirty="0">
+                <a:solidFill>
+                  <a:schemeClr val="accent2"/>
+                </a:solidFill>
+                <a:latin typeface="Courier New" pitchFamily="34" charset="0"/>
+                <a:ea typeface="Courier New" pitchFamily="34" charset="-122"/>
+                <a:cs typeface="Courier New" pitchFamily="34" charset="-120"/>
+              </a:rPr>
+              <a:t>db         Up (healthy) private</a:t>
+            </a:r>
+            <a:endParaRPr lang="en-US" sz="1100" dirty="0"/>
+          </a:p>
+          <a:p>
+            <a:pPr indent="0" marL="0">
+              <a:buNone/>
+            </a:pPr>
+            <a:r>
+              <a:rPr lang="en-US" sz="1100" dirty="0">
+                <a:solidFill>
+                  <a:schemeClr val="accent2"/>
+                </a:solidFill>
+                <a:latin typeface="Courier New" pitchFamily="34" charset="0"/>
+                <a:ea typeface="Courier New" pitchFamily="34" charset="-122"/>
+                <a:cs typeface="Courier New" pitchFamily="34" charset="-120"/>
+              </a:rPr>
+              <a:t>frontend   Up           port 3000</a:t>
+            </a:r>
+            <a:endParaRPr lang="en-US" sz="1100" dirty="0"/>
+          </a:p>
+        </p:txBody>
+      </p:sp>
+      <p:sp>
+        <p:nvSpPr>
+          <p:cNvPr id="8" name="compose points"/>
+          <p:cNvSpPr txBox="1"/>
+          <p:nvPr/>
+        </p:nvSpPr>
+        <p:spPr>
+          <a:xfrm>
+            <a:off x="5715000" y="3017520"/>
+            <a:ext cx="2834640" cy="1371600"/>
           </a:xfrm>
           <a:prstGeom prst="rect">
             <a:avLst/>
@@ -3064,10 +3244,10 @@
             <a:r>
               <a:rPr lang="en-US" sz="1400" dirty="0">
                 <a:solidFill>
-                  <a:schemeClr val="tx1"/>
+                  <a:schemeClr val="bg1"/>
                 </a:solidFill>
               </a:rPr>
-              <a:t>How many requests, and to where</a:t>
+              <a:t>One command starts all three</a:t>
             </a:r>
             <a:endParaRPr lang="en-US" sz="1400" dirty="0"/>
           </a:p>
@@ -3082,46 +3262,10 @@
             <a:r>
               <a:rPr lang="en-US" sz="1400" dirty="0">
                 <a:solidFill>
-                  <a:schemeClr val="tx1"/>
+                  <a:schemeClr val="bg1"/>
                 </a:solidFill>
               </a:rPr>
-              <a:t>How many fail</a:t>
-            </a:r>
-            <a:endParaRPr lang="en-US" sz="1400" dirty="0"/>
-          </a:p>
-          <a:p>
-            <a:pPr marL="342900" indent="-342900">
-              <a:spcAft>
-                <a:spcPts val="800"/>
-              </a:spcAft>
-              <a:buSzPct val="100000"/>
-              <a:buChar char="•"/>
-            </a:pPr>
-            <a:r>
-              <a:rPr lang="en-US" sz="1400" dirty="0">
-                <a:solidFill>
-                  <a:schemeClr val="tx1"/>
-                </a:solidFill>
-              </a:rPr>
-              <a:t>How fast it answers</a:t>
-            </a:r>
-            <a:endParaRPr lang="en-US" sz="1400" dirty="0"/>
-          </a:p>
-          <a:p>
-            <a:pPr marL="342900" indent="-342900">
-              <a:spcAft>
-                <a:spcPts val="800"/>
-              </a:spcAft>
-              <a:buSzPct val="100000"/>
-              <a:buChar char="•"/>
-            </a:pPr>
-            <a:r>
-              <a:rPr lang="en-US" sz="1400" dirty="0">
-                <a:solidFill>
-                  <a:schemeClr val="tx1"/>
-                </a:solidFill>
-              </a:rPr>
-              <a:t>How much memory it uses</a:t>
+              <a:t>The database stays private</a:t>
             </a:r>
             <a:endParaRPr lang="en-US" sz="1400" dirty="0"/>
           </a:p>
@@ -3229,7 +3373,7 @@
                   <a:schemeClr val="tx2"/>
                 </a:solidFill>
               </a:rPr>
-              <a:t>Safety nets built in</a:t>
+              <a:t>The cloud, described as code</a:t>
             </a:r>
             <a:endParaRPr lang="en-US" sz="3400" dirty="0"/>
           </a:p>
@@ -3237,26 +3381,24 @@
       </p:sp>
       <p:sp>
         <p:nvSpPr>
-          <p:cNvPr id="3" name="net 1 card"/>
+          <p:cNvPr id="3" name="terraform screenshot frame"/>
           <p:cNvSpPr/>
           <p:nvPr/>
         </p:nvSpPr>
         <p:spPr>
           <a:xfrm>
-            <a:off x="457200" y="1371600"/>
-            <a:ext cx="2560320" cy="2697480"/>
-          </a:xfrm>
-          <a:prstGeom prst="roundRect">
-            <a:avLst>
-              <a:gd name="adj" fmla="val 4286"/>
-            </a:avLst>
+            <a:off x="420624" y="1243584"/>
+            <a:ext cx="8056009" cy="2359152"/>
+          </a:xfrm>
+          <a:prstGeom prst="rect">
+            <a:avLst/>
           </a:prstGeom>
           <a:solidFill>
-            <a:schemeClr val="bg2"/>
+            <a:schemeClr val="bg1"/>
           </a:solidFill>
-          <a:ln w="12700">
+          <a:ln w="9525">
             <a:solidFill>
-              <a:schemeClr val="bg2"/>
+              <a:srgbClr val="D1D5DB"/>
             </a:solidFill>
             <a:prstDash val="solid"/>
           </a:ln>
@@ -3269,16 +3411,40 @@
           </a:effectLst>
         </p:spPr>
       </p:sp>
-      <p:sp>
-        <p:nvSpPr>
-          <p:cNvPr id="4" name="net 1 number"/>
+      <p:pic>
+        <p:nvPicPr>
+          <p:cNvPr id="4" name="terraform screenshot" descr="Terminal output of terraform apply: 15 resources added, with the EKS cluster name and subnet ids">    </p:cNvPr>
+          <p:cNvPicPr>
+            <a:picLocks noChangeAspect="1"/>
+          </p:cNvPicPr>
+          <p:nvPr/>
+        </p:nvPicPr>
+        <p:blipFill>
+          <a:blip r:embed="rId1"/>
+          <a:stretch>
+            <a:fillRect/>
+          </a:stretch>
+        </p:blipFill>
+        <p:spPr>
+          <a:xfrm>
+            <a:off x="457200" y="1280160"/>
+            <a:ext cx="7982857" cy="2286000"/>
+          </a:xfrm>
+          <a:prstGeom prst="rect">
+            <a:avLst/>
+          </a:prstGeom>
+        </p:spPr>
+      </p:pic>
+      <p:sp>
+        <p:nvSpPr>
+          <p:cNvPr id="5" name="tf stat 1"/>
           <p:cNvSpPr txBox="1"/>
           <p:nvPr/>
         </p:nvSpPr>
         <p:spPr>
           <a:xfrm>
-            <a:off x="594360" y="1508760"/>
-            <a:ext cx="2286000" cy="914400"/>
+            <a:off x="457200" y="3749040"/>
+            <a:ext cx="1097280" cy="822960"/>
           </a:xfrm>
           <a:prstGeom prst="rect">
             <a:avLst/>
@@ -3290,31 +3456,31 @@
           <a:bodyPr wrap="square" lIns="0" tIns="0" rIns="0" bIns="0" rtlCol="0" anchor="ctr"/>
           <a:lstStyle/>
           <a:p>
-            <a:pPr algn="l" indent="0" marL="0">
+            <a:pPr indent="0" marL="0">
               <a:buNone/>
             </a:pPr>
             <a:r>
-              <a:rPr lang="en-US" sz="4400" b="1" dirty="0">
+              <a:rPr lang="en-US" sz="5400" b="1" dirty="0">
                 <a:solidFill>
                   <a:schemeClr val="accent1"/>
                 </a:solidFill>
               </a:rPr>
-              <a:t>31</a:t>
-            </a:r>
-            <a:endParaRPr lang="en-US" sz="4400" dirty="0"/>
-          </a:p>
-        </p:txBody>
-      </p:sp>
-      <p:sp>
-        <p:nvSpPr>
-          <p:cNvPr id="5" name="net 1 title"/>
+              <a:t>15</a:t>
+            </a:r>
+            <a:endParaRPr lang="en-US" sz="5400" dirty="0"/>
+          </a:p>
+        </p:txBody>
+      </p:sp>
+      <p:sp>
+        <p:nvSpPr>
+          <p:cNvPr id="6" name="tf stat 1 label"/>
           <p:cNvSpPr txBox="1"/>
           <p:nvPr/>
         </p:nvSpPr>
         <p:spPr>
           <a:xfrm>
-            <a:off x="594360" y="2468880"/>
-            <a:ext cx="2286000" cy="548640"/>
+            <a:off x="1600200" y="3749040"/>
+            <a:ext cx="1554480" cy="822960"/>
           </a:xfrm>
           <a:prstGeom prst="rect">
             <a:avLst/>
@@ -3323,34 +3489,34 @@
           <a:ln/>
         </p:spPr>
         <p:txBody>
-          <a:bodyPr wrap="square" lIns="0" tIns="0" rIns="0" bIns="0" rtlCol="0" anchor="t"/>
+          <a:bodyPr wrap="square" lIns="0" tIns="0" rIns="0" bIns="0" rtlCol="0" anchor="ctr"/>
           <a:lstStyle/>
           <a:p>
             <a:pPr indent="0" marL="0">
               <a:buNone/>
             </a:pPr>
             <a:r>
-              <a:rPr lang="en-US" sz="1800" b="1" dirty="0">
-                <a:solidFill>
-                  <a:schemeClr val="tx2"/>
+              <a:rPr lang="en-US" sz="1400" dirty="0">
+                <a:solidFill>
+                  <a:schemeClr val="tx1"/>
                 </a:solidFill>
               </a:rPr>
-              <a:t>automatic tests</a:t>
-            </a:r>
-            <a:endParaRPr lang="en-US" sz="1800" dirty="0"/>
-          </a:p>
-        </p:txBody>
-      </p:sp>
-      <p:sp>
-        <p:nvSpPr>
-          <p:cNvPr id="6" name="net 1 text"/>
+              <a:t>cloud resources created</a:t>
+            </a:r>
+            <a:endParaRPr lang="en-US" sz="1400" dirty="0"/>
+          </a:p>
+        </p:txBody>
+      </p:sp>
+      <p:sp>
+        <p:nvSpPr>
+          <p:cNvPr id="7" name="tf stat 2"/>
           <p:cNvSpPr txBox="1"/>
           <p:nvPr/>
         </p:nvSpPr>
         <p:spPr>
           <a:xfrm>
-            <a:off x="594360" y="3108960"/>
-            <a:ext cx="2286000" cy="822960"/>
+            <a:off x="3291840" y="3749040"/>
+            <a:ext cx="1097280" cy="822960"/>
           </a:xfrm>
           <a:prstGeom prst="rect">
             <a:avLst/>
@@ -3359,68 +3525,34 @@
           <a:ln/>
         </p:spPr>
         <p:txBody>
-          <a:bodyPr wrap="square" lIns="0" tIns="0" rIns="0" bIns="0" rtlCol="0" anchor="t"/>
+          <a:bodyPr wrap="square" lIns="0" tIns="0" rIns="0" bIns="0" rtlCol="0" anchor="ctr"/>
           <a:lstStyle/>
           <a:p>
             <a:pPr indent="0" marL="0">
               <a:buNone/>
             </a:pPr>
             <a:r>
-              <a:rPr lang="en-US" sz="1400" dirty="0">
-                <a:solidFill>
-                  <a:schemeClr val="tx1"/>
+              <a:rPr lang="en-US" sz="5400" b="1" dirty="0">
+                <a:solidFill>
+                  <a:schemeClr val="accent1"/>
                 </a:solidFill>
               </a:rPr>
-              <a:t>Must pass before anything is built</a:t>
-            </a:r>
-            <a:endParaRPr lang="en-US" sz="1400" dirty="0"/>
-          </a:p>
-        </p:txBody>
-      </p:sp>
-      <p:sp>
-        <p:nvSpPr>
-          <p:cNvPr id="7" name="net 2 card"/>
-          <p:cNvSpPr/>
-          <p:nvPr/>
-        </p:nvSpPr>
-        <p:spPr>
-          <a:xfrm>
-            <a:off x="3291840" y="1371600"/>
-            <a:ext cx="2560320" cy="2697480"/>
-          </a:xfrm>
-          <a:prstGeom prst="roundRect">
-            <a:avLst>
-              <a:gd name="adj" fmla="val 4286"/>
-            </a:avLst>
-          </a:prstGeom>
-          <a:solidFill>
-            <a:schemeClr val="bg2"/>
-          </a:solidFill>
-          <a:ln w="12700">
-            <a:solidFill>
-              <a:schemeClr val="bg2"/>
-            </a:solidFill>
-            <a:prstDash val="solid"/>
-          </a:ln>
-          <a:effectLst>
-            <a:outerShdw sx="100000" sy="100000" kx="0" ky="0" algn="bl" rotWithShape="0" blurRad="76200" dist="25400" dir="5400000">
-              <a:srgbClr val="000000">
-                <a:alpha val="12000"/>
-              </a:srgbClr>
-            </a:outerShdw>
-          </a:effectLst>
-        </p:spPr>
-      </p:sp>
-      <p:sp>
-        <p:nvSpPr>
-          <p:cNvPr id="8" name="net 2 number"/>
+              <a:t>2</a:t>
+            </a:r>
+            <a:endParaRPr lang="en-US" sz="5400" dirty="0"/>
+          </a:p>
+        </p:txBody>
+      </p:sp>
+      <p:sp>
+        <p:nvSpPr>
+          <p:cNvPr id="8" name="tf stat 2 label"/>
           <p:cNvSpPr txBox="1"/>
           <p:nvPr/>
         </p:nvSpPr>
         <p:spPr>
           <a:xfrm>
-            <a:off x="3429000" y="1508760"/>
-            <a:ext cx="2286000" cy="914400"/>
+            <a:off x="4434840" y="3749040"/>
+            <a:ext cx="1554480" cy="822960"/>
           </a:xfrm>
           <a:prstGeom prst="rect">
             <a:avLst/>
@@ -3432,31 +3564,31 @@
           <a:bodyPr wrap="square" lIns="0" tIns="0" rIns="0" bIns="0" rtlCol="0" anchor="ctr"/>
           <a:lstStyle/>
           <a:p>
-            <a:pPr algn="l" indent="0" marL="0">
+            <a:pPr indent="0" marL="0">
               <a:buNone/>
             </a:pPr>
             <a:r>
-              <a:rPr lang="en-US" sz="4400" b="1" dirty="0">
-                <a:solidFill>
-                  <a:schemeClr val="accent1"/>
+              <a:rPr lang="en-US" sz="1400" dirty="0">
+                <a:solidFill>
+                  <a:schemeClr val="tx1"/>
                 </a:solidFill>
               </a:rPr>
-              <a:t>88 to 0</a:t>
-            </a:r>
-            <a:endParaRPr lang="en-US" sz="4400" dirty="0"/>
-          </a:p>
-        </p:txBody>
-      </p:sp>
-      <p:sp>
-        <p:nvSpPr>
-          <p:cNvPr id="9" name="net 2 title"/>
+              <a:t>public subnets in the network</a:t>
+            </a:r>
+            <a:endParaRPr lang="en-US" sz="1400" dirty="0"/>
+          </a:p>
+        </p:txBody>
+      </p:sp>
+      <p:sp>
+        <p:nvSpPr>
+          <p:cNvPr id="9" name="tf stat 3"/>
           <p:cNvSpPr txBox="1"/>
           <p:nvPr/>
         </p:nvSpPr>
         <p:spPr>
           <a:xfrm>
-            <a:off x="3429000" y="2468880"/>
-            <a:ext cx="2286000" cy="548640"/>
+            <a:off x="6126480" y="3749040"/>
+            <a:ext cx="1097280" cy="822960"/>
           </a:xfrm>
           <a:prstGeom prst="rect">
             <a:avLst/>
@@ -3465,34 +3597,34 @@
           <a:ln/>
         </p:spPr>
         <p:txBody>
-          <a:bodyPr wrap="square" lIns="0" tIns="0" rIns="0" bIns="0" rtlCol="0" anchor="t"/>
+          <a:bodyPr wrap="square" lIns="0" tIns="0" rIns="0" bIns="0" rtlCol="0" anchor="ctr"/>
           <a:lstStyle/>
           <a:p>
             <a:pPr indent="0" marL="0">
               <a:buNone/>
             </a:pPr>
             <a:r>
-              <a:rPr lang="en-US" sz="1800" b="1" dirty="0">
-                <a:solidFill>
-                  <a:schemeClr val="tx2"/>
+              <a:rPr lang="en-US" sz="5400" b="1" dirty="0">
+                <a:solidFill>
+                  <a:schemeClr val="accent1"/>
                 </a:solidFill>
               </a:rPr>
-              <a:t>serious security findings</a:t>
-            </a:r>
-            <a:endParaRPr lang="en-US" sz="1800" dirty="0"/>
-          </a:p>
-        </p:txBody>
-      </p:sp>
-      <p:sp>
-        <p:nvSpPr>
-          <p:cNvPr id="10" name="net 2 text"/>
+              <a:t>1</a:t>
+            </a:r>
+            <a:endParaRPr lang="en-US" sz="5400" dirty="0"/>
+          </a:p>
+        </p:txBody>
+      </p:sp>
+      <p:sp>
+        <p:nvSpPr>
+          <p:cNvPr id="10" name="tf stat 3 label"/>
           <p:cNvSpPr txBox="1"/>
           <p:nvPr/>
         </p:nvSpPr>
         <p:spPr>
           <a:xfrm>
-            <a:off x="3429000" y="3108960"/>
-            <a:ext cx="2286000" cy="822960"/>
+            <a:off x="7269480" y="3749040"/>
+            <a:ext cx="1554480" cy="822960"/>
           </a:xfrm>
           <a:prstGeom prst="rect">
             <a:avLst/>
@@ -3501,7 +3633,7 @@
           <a:ln/>
         </p:spPr>
         <p:txBody>
-          <a:bodyPr wrap="square" lIns="0" tIns="0" rIns="0" bIns="0" rtlCol="0" anchor="t"/>
+          <a:bodyPr wrap="square" lIns="0" tIns="0" rIns="0" bIns="0" rtlCol="0" anchor="ctr"/>
           <a:lstStyle/>
           <a:p>
             <a:pPr indent="0" marL="0">
@@ -3513,149 +3645,7 @@
                   <a:schemeClr val="tx1"/>
                 </a:solidFill>
               </a:rPr>
-              <a:t>Found by Trivy, then fixed in both images</a:t>
-            </a:r>
-            <a:endParaRPr lang="en-US" sz="1400" dirty="0"/>
-          </a:p>
-        </p:txBody>
-      </p:sp>
-      <p:sp>
-        <p:nvSpPr>
-          <p:cNvPr id="11" name="net 3 card"/>
-          <p:cNvSpPr/>
-          <p:nvPr/>
-        </p:nvSpPr>
-        <p:spPr>
-          <a:xfrm>
-            <a:off x="6126480" y="1371600"/>
-            <a:ext cx="2560320" cy="2697480"/>
-          </a:xfrm>
-          <a:prstGeom prst="roundRect">
-            <a:avLst>
-              <a:gd name="adj" fmla="val 4286"/>
-            </a:avLst>
-          </a:prstGeom>
-          <a:solidFill>
-            <a:schemeClr val="bg2"/>
-          </a:solidFill>
-          <a:ln w="12700">
-            <a:solidFill>
-              <a:schemeClr val="bg2"/>
-            </a:solidFill>
-            <a:prstDash val="solid"/>
-          </a:ln>
-          <a:effectLst>
-            <a:outerShdw sx="100000" sy="100000" kx="0" ky="0" algn="bl" rotWithShape="0" blurRad="76200" dist="25400" dir="5400000">
-              <a:srgbClr val="000000">
-                <a:alpha val="12000"/>
-              </a:srgbClr>
-            </a:outerShdw>
-          </a:effectLst>
-        </p:spPr>
-      </p:sp>
-      <p:sp>
-        <p:nvSpPr>
-          <p:cNvPr id="12" name="net 3 number"/>
-          <p:cNvSpPr txBox="1"/>
-          <p:nvPr/>
-        </p:nvSpPr>
-        <p:spPr>
-          <a:xfrm>
-            <a:off x="6263640" y="1508760"/>
-            <a:ext cx="2286000" cy="914400"/>
-          </a:xfrm>
-          <a:prstGeom prst="rect">
-            <a:avLst/>
-          </a:prstGeom>
-          <a:noFill/>
-          <a:ln/>
-        </p:spPr>
-        <p:txBody>
-          <a:bodyPr wrap="square" lIns="0" tIns="0" rIns="0" bIns="0" rtlCol="0" anchor="ctr"/>
-          <a:lstStyle/>
-          <a:p>
-            <a:pPr algn="l" indent="0" marL="0">
-              <a:buNone/>
-            </a:pPr>
-            <a:r>
-              <a:rPr lang="en-US" sz="4400" b="1" dirty="0">
-                <a:solidFill>
-                  <a:schemeClr val="accent1"/>
-                </a:solidFill>
-              </a:rPr>
-              <a:t>2</a:t>
-            </a:r>
-            <a:endParaRPr lang="en-US" sz="4400" dirty="0"/>
-          </a:p>
-        </p:txBody>
-      </p:sp>
-      <p:sp>
-        <p:nvSpPr>
-          <p:cNvPr id="13" name="net 3 title"/>
-          <p:cNvSpPr txBox="1"/>
-          <p:nvPr/>
-        </p:nvSpPr>
-        <p:spPr>
-          <a:xfrm>
-            <a:off x="6263640" y="2468880"/>
-            <a:ext cx="2286000" cy="548640"/>
-          </a:xfrm>
-          <a:prstGeom prst="rect">
-            <a:avLst/>
-          </a:prstGeom>
-          <a:noFill/>
-          <a:ln/>
-        </p:spPr>
-        <p:txBody>
-          <a:bodyPr wrap="square" lIns="0" tIns="0" rIns="0" bIns="0" rtlCol="0" anchor="t"/>
-          <a:lstStyle/>
-          <a:p>
-            <a:pPr indent="0" marL="0">
-              <a:buNone/>
-            </a:pPr>
-            <a:r>
-              <a:rPr lang="en-US" sz="1800" b="1" dirty="0">
-                <a:solidFill>
-                  <a:schemeClr val="tx2"/>
-                </a:solidFill>
-              </a:rPr>
-              <a:t>copies of the app running</a:t>
-            </a:r>
-            <a:endParaRPr lang="en-US" sz="1800" dirty="0"/>
-          </a:p>
-        </p:txBody>
-      </p:sp>
-      <p:sp>
-        <p:nvSpPr>
-          <p:cNvPr id="14" name="net 3 text"/>
-          <p:cNvSpPr txBox="1"/>
-          <p:nvPr/>
-        </p:nvSpPr>
-        <p:spPr>
-          <a:xfrm>
-            <a:off x="6263640" y="3108960"/>
-            <a:ext cx="2286000" cy="822960"/>
-          </a:xfrm>
-          <a:prstGeom prst="rect">
-            <a:avLst/>
-          </a:prstGeom>
-          <a:noFill/>
-          <a:ln/>
-        </p:spPr>
-        <p:txBody>
-          <a:bodyPr wrap="square" lIns="0" tIns="0" rIns="0" bIns="0" rtlCol="0" anchor="t"/>
-          <a:lstStyle/>
-          <a:p>
-            <a:pPr indent="0" marL="0">
-              <a:buNone/>
-            </a:pPr>
-            <a:r>
-              <a:rPr lang="en-US" sz="1400" dirty="0">
-                <a:solidFill>
-                  <a:schemeClr val="tx1"/>
-                </a:solidFill>
-              </a:rPr>
-              <a:t>If one crashes, the other keeps serving</a:t>
+              <a:t>Kubernetes cluster on AWS</a:t>
             </a:r>
             <a:endParaRPr lang="en-US" sz="1400" dirty="0"/>
           </a:p>
@@ -3733,6 +3723,874 @@
       </p:grpSpPr>
       <p:sp>
         <p:nvSpPr>
+          <p:cNvPr id="2" name="Text 1"/>
+          <p:cNvSpPr/>
+          <p:nvPr>
+            <p:ph idx="101" type="title" hasCustomPrompt="1"/>
+          </p:nvPr>
+        </p:nvSpPr>
+        <p:spPr>
+          <a:xfrm>
+            <a:off x="457200" y="320040"/>
+            <a:ext cx="8229600" cy="731520"/>
+          </a:xfrm>
+          <a:prstGeom prst="rect">
+            <a:avLst/>
+          </a:prstGeom>
+          <a:noFill/>
+          <a:ln/>
+        </p:spPr>
+        <p:txBody>
+          <a:bodyPr wrap="square" lIns="0" tIns="0" rIns="0" bIns="0" rtlCol="0" anchor="ctr"/>
+          <a:lstStyle/>
+          <a:p>
+            <a:pPr algn="l" indent="0" marL="0">
+              <a:buNone/>
+            </a:pPr>
+            <a:r>
+              <a:rPr lang="en-US" sz="3400" b="1" dirty="0">
+                <a:solidFill>
+                  <a:schemeClr val="tx2"/>
+                </a:solidFill>
+              </a:rPr>
+              <a:t>Watching it live</a:t>
+            </a:r>
+            <a:endParaRPr lang="en-US" sz="3400" dirty="0"/>
+          </a:p>
+        </p:txBody>
+      </p:sp>
+      <p:sp>
+        <p:nvSpPr>
+          <p:cNvPr id="3" name="grafana screenshot frame"/>
+          <p:cNvSpPr/>
+          <p:nvPr/>
+        </p:nvSpPr>
+        <p:spPr>
+          <a:xfrm>
+            <a:off x="420624" y="1243584"/>
+            <a:ext cx="5559552" cy="3324782"/>
+          </a:xfrm>
+          <a:prstGeom prst="rect">
+            <a:avLst/>
+          </a:prstGeom>
+          <a:solidFill>
+            <a:schemeClr val="bg1"/>
+          </a:solidFill>
+          <a:ln w="9525">
+            <a:solidFill>
+              <a:srgbClr val="D1D5DB"/>
+            </a:solidFill>
+            <a:prstDash val="solid"/>
+          </a:ln>
+          <a:effectLst>
+            <a:outerShdw sx="100000" sy="100000" kx="0" ky="0" algn="bl" rotWithShape="0" blurRad="76200" dist="25400" dir="5400000">
+              <a:srgbClr val="000000">
+                <a:alpha val="12000"/>
+              </a:srgbClr>
+            </a:outerShdw>
+          </a:effectLst>
+        </p:spPr>
+      </p:sp>
+      <p:pic>
+        <p:nvPicPr>
+          <p:cNvPr id="4" name="grafana screenshot" descr="Grafana dashboard with requests per second, error rate, latency and memory panels">    </p:cNvPr>
+          <p:cNvPicPr>
+            <a:picLocks noChangeAspect="1"/>
+          </p:cNvPicPr>
+          <p:nvPr/>
+        </p:nvPicPr>
+        <p:blipFill>
+          <a:blip r:embed="rId1"/>
+          <a:stretch>
+            <a:fillRect/>
+          </a:stretch>
+        </p:blipFill>
+        <p:spPr>
+          <a:xfrm>
+            <a:off x="457200" y="1280160"/>
+            <a:ext cx="5486400" cy="3251630"/>
+          </a:xfrm>
+          <a:prstGeom prst="rect">
+            <a:avLst/>
+          </a:prstGeom>
+        </p:spPr>
+      </p:pic>
+      <p:sp>
+        <p:nvSpPr>
+          <p:cNvPr id="5" name="grafana card"/>
+          <p:cNvSpPr/>
+          <p:nvPr/>
+        </p:nvSpPr>
+        <p:spPr>
+          <a:xfrm>
+            <a:off x="6263640" y="1280160"/>
+            <a:ext cx="2423160" cy="3291840"/>
+          </a:xfrm>
+          <a:prstGeom prst="roundRect">
+            <a:avLst>
+              <a:gd name="adj" fmla="val 4528"/>
+            </a:avLst>
+          </a:prstGeom>
+          <a:solidFill>
+            <a:schemeClr val="bg2"/>
+          </a:solidFill>
+          <a:ln w="12700">
+            <a:solidFill>
+              <a:schemeClr val="bg2"/>
+            </a:solidFill>
+            <a:prstDash val="solid"/>
+          </a:ln>
+        </p:spPr>
+      </p:sp>
+      <p:sp>
+        <p:nvSpPr>
+          <p:cNvPr id="6" name="grafana circle"/>
+          <p:cNvSpPr/>
+          <p:nvPr/>
+        </p:nvSpPr>
+        <p:spPr>
+          <a:xfrm>
+            <a:off x="6446520" y="1463040"/>
+            <a:ext cx="457200" cy="457200"/>
+          </a:xfrm>
+          <a:prstGeom prst="ellipse">
+            <a:avLst/>
+          </a:prstGeom>
+          <a:solidFill>
+            <a:schemeClr val="accent1"/>
+          </a:solidFill>
+          <a:ln w="12700">
+            <a:solidFill>
+              <a:schemeClr val="accent1"/>
+            </a:solidFill>
+            <a:prstDash val="solid"/>
+          </a:ln>
+        </p:spPr>
+      </p:sp>
+      <p:pic>
+        <p:nvPicPr>
+          <p:cNvPr id="7" name="grafana icon" descr="grafana">    </p:cNvPr>
+          <p:cNvPicPr>
+            <a:picLocks noChangeAspect="1"/>
+          </p:cNvPicPr>
+          <p:nvPr/>
+        </p:nvPicPr>
+        <p:blipFill>
+          <a:blip r:embed="rId2"/>
+          <a:stretch>
+            <a:fillRect/>
+          </a:stretch>
+        </p:blipFill>
+        <p:spPr>
+          <a:xfrm>
+            <a:off x="6569964" y="1586484"/>
+            <a:ext cx="210312" cy="210312"/>
+          </a:xfrm>
+          <a:prstGeom prst="rect">
+            <a:avLst/>
+          </a:prstGeom>
+        </p:spPr>
+      </p:pic>
+      <p:sp>
+        <p:nvSpPr>
+          <p:cNvPr id="8" name="grafana heading"/>
+          <p:cNvSpPr txBox="1"/>
+          <p:nvPr/>
+        </p:nvSpPr>
+        <p:spPr>
+          <a:xfrm>
+            <a:off x="7013448" y="1463040"/>
+            <a:ext cx="1508760" cy="457200"/>
+          </a:xfrm>
+          <a:prstGeom prst="rect">
+            <a:avLst/>
+          </a:prstGeom>
+          <a:noFill/>
+          <a:ln/>
+        </p:spPr>
+        <p:txBody>
+          <a:bodyPr wrap="square" lIns="0" tIns="0" rIns="0" bIns="0" rtlCol="0" anchor="ctr"/>
+          <a:lstStyle/>
+          <a:p>
+            <a:pPr indent="0" marL="0">
+              <a:buNone/>
+            </a:pPr>
+            <a:r>
+              <a:rPr lang="en-US" sz="1600" b="1" dirty="0">
+                <a:solidFill>
+                  <a:schemeClr val="tx2"/>
+                </a:solidFill>
+              </a:rPr>
+              <a:t>Live graphs</a:t>
+            </a:r>
+            <a:endParaRPr lang="en-US" sz="1600" dirty="0"/>
+          </a:p>
+        </p:txBody>
+      </p:sp>
+      <p:sp>
+        <p:nvSpPr>
+          <p:cNvPr id="9" name="grafana points"/>
+          <p:cNvSpPr txBox="1"/>
+          <p:nvPr/>
+        </p:nvSpPr>
+        <p:spPr>
+          <a:xfrm>
+            <a:off x="6446520" y="2103120"/>
+            <a:ext cx="2057400" cy="2331720"/>
+          </a:xfrm>
+          <a:prstGeom prst="rect">
+            <a:avLst/>
+          </a:prstGeom>
+          <a:noFill/>
+          <a:ln/>
+        </p:spPr>
+        <p:txBody>
+          <a:bodyPr wrap="square" lIns="0" tIns="0" rIns="0" bIns="0" rtlCol="0" anchor="t"/>
+          <a:lstStyle/>
+          <a:p>
+            <a:pPr marL="342900" indent="-342900">
+              <a:spcAft>
+                <a:spcPts val="800"/>
+              </a:spcAft>
+              <a:buSzPct val="100000"/>
+              <a:buChar char="•"/>
+            </a:pPr>
+            <a:r>
+              <a:rPr lang="en-US" sz="1400" dirty="0">
+                <a:solidFill>
+                  <a:schemeClr val="tx1"/>
+                </a:solidFill>
+              </a:rPr>
+              <a:t>Requests, errors, speed, memory</a:t>
+            </a:r>
+            <a:endParaRPr lang="en-US" sz="1400" dirty="0"/>
+          </a:p>
+          <a:p>
+            <a:pPr marL="342900" indent="-342900">
+              <a:spcAft>
+                <a:spcPts val="800"/>
+              </a:spcAft>
+              <a:buSzPct val="100000"/>
+              <a:buChar char="•"/>
+            </a:pPr>
+            <a:r>
+              <a:rPr lang="en-US" sz="1400" dirty="0">
+                <a:solidFill>
+                  <a:schemeClr val="tx1"/>
+                </a:solidFill>
+              </a:rPr>
+              <a:t>Refreshes every 10 seconds</a:t>
+            </a:r>
+            <a:endParaRPr lang="en-US" sz="1400" dirty="0"/>
+          </a:p>
+        </p:txBody>
+      </p:sp>
+      <p:sp>
+        <p:nvSpPr>
+          <p:cNvPr id="25" name="Slide Number Placeholder 0"/>
+          <p:cNvSpPr>
+            <a:spLocks noGrp="1"/>
+          </p:cNvSpPr>
+          <p:nvPr>
+            <p:ph type="sldNum" sz="quarter" idx="4294967295"/>
+          </p:nvPr>
+        </p:nvSpPr>
+        <p:spPr>
+          <a:xfrm>
+            <a:off x="8229600" y="4773168"/>
+            <a:ext cx="457200" cy="274320"/>
+          </a:xfrm>
+          <a:prstGeom prst="rect">
+            <a:avLst/>
+          </a:prstGeom>
+          <a:extLst>
+            <a:ext uri="{C572A759-6A51-4108-AA02-DFA0A04FC94B}">
+              <ma14:wrappingTextBoxFlag xmlns:ma14="http://schemas.microsoft.com/office/mac/drawingml/2011/main" val="0"/>
+            </a:ext>
+          </a:extLst>
+        </p:spPr>
+        <p:txBody>
+          <a:bodyPr/>
+          <a:lstStyle>
+            <a:lvl1pPr>
+              <a:defRPr sz="1000">
+                <a:solidFill>
+                  <a:schemeClr val="accent6"/>
+                </a:solidFill>
+              </a:defRPr>
+            </a:lvl1pPr>
+          </a:lstStyle>
+          <a:p>
+            <a:pPr algn="l"/>
+            <a:fld id="{F7021451-1387-4CA6-816F-3879F97B5CBC}" type="slidenum">
+              <a:rPr b="0" lang="en-US"/>
+              <a:t>13</a:t>
+            </a:fld>
+            <a:endParaRPr lang="en-US"/>
+          </a:p>
+        </p:txBody>
+      </p:sp>
+    </p:spTree>
+  </p:cSld>
+  <p:clrMapOvr>
+    <a:masterClrMapping/>
+  </p:clrMapOvr>
+</p:sld>
+</file>
+
+<file path=ppt/slides/slide14.xml><?xml version="1.0" encoding="utf-8"?>
+<p:sld xmlns:a="http://schemas.openxmlformats.org/drawingml/2006/main" xmlns:r="http://schemas.openxmlformats.org/officeDocument/2006/relationships" xmlns:p="http://schemas.openxmlformats.org/presentationml/2006/main">
+  <p:cSld name="Slide 14">
+    <p:spTree>
+      <p:nvGrpSpPr>
+        <p:cNvPr id="1" name=""/>
+        <p:cNvGrpSpPr/>
+        <p:nvPr/>
+      </p:nvGrpSpPr>
+      <p:grpSpPr>
+        <a:xfrm>
+          <a:off x="0" y="0"/>
+          <a:ext cx="0" cy="0"/>
+          <a:chOff x="0" y="0"/>
+          <a:chExt cx="0" cy="0"/>
+        </a:xfrm>
+      </p:grpSpPr>
+      <p:sp>
+        <p:nvSpPr>
+          <p:cNvPr id="2" name="Text 1"/>
+          <p:cNvSpPr/>
+          <p:nvPr>
+            <p:ph idx="101" type="title" hasCustomPrompt="1"/>
+          </p:nvPr>
+        </p:nvSpPr>
+        <p:spPr>
+          <a:xfrm>
+            <a:off x="457200" y="320040"/>
+            <a:ext cx="8229600" cy="731520"/>
+          </a:xfrm>
+          <a:prstGeom prst="rect">
+            <a:avLst/>
+          </a:prstGeom>
+          <a:noFill/>
+          <a:ln/>
+        </p:spPr>
+        <p:txBody>
+          <a:bodyPr wrap="square" lIns="0" tIns="0" rIns="0" bIns="0" rtlCol="0" anchor="ctr"/>
+          <a:lstStyle/>
+          <a:p>
+            <a:pPr algn="l" indent="0" marL="0">
+              <a:buNone/>
+            </a:pPr>
+            <a:r>
+              <a:rPr lang="en-US" sz="3400" b="1" dirty="0">
+                <a:solidFill>
+                  <a:schemeClr val="tx2"/>
+                </a:solidFill>
+              </a:rPr>
+              <a:t>Safety nets built in</a:t>
+            </a:r>
+            <a:endParaRPr lang="en-US" sz="3400" dirty="0"/>
+          </a:p>
+        </p:txBody>
+      </p:sp>
+      <p:sp>
+        <p:nvSpPr>
+          <p:cNvPr id="3" name="net 1 card"/>
+          <p:cNvSpPr/>
+          <p:nvPr/>
+        </p:nvSpPr>
+        <p:spPr>
+          <a:xfrm>
+            <a:off x="457200" y="1371600"/>
+            <a:ext cx="2560320" cy="2697480"/>
+          </a:xfrm>
+          <a:prstGeom prst="roundRect">
+            <a:avLst>
+              <a:gd name="adj" fmla="val 4286"/>
+            </a:avLst>
+          </a:prstGeom>
+          <a:solidFill>
+            <a:schemeClr val="bg2"/>
+          </a:solidFill>
+          <a:ln w="12700">
+            <a:solidFill>
+              <a:schemeClr val="bg2"/>
+            </a:solidFill>
+            <a:prstDash val="solid"/>
+          </a:ln>
+          <a:effectLst>
+            <a:outerShdw sx="100000" sy="100000" kx="0" ky="0" algn="bl" rotWithShape="0" blurRad="76200" dist="25400" dir="5400000">
+              <a:srgbClr val="000000">
+                <a:alpha val="12000"/>
+              </a:srgbClr>
+            </a:outerShdw>
+          </a:effectLst>
+        </p:spPr>
+      </p:sp>
+      <p:sp>
+        <p:nvSpPr>
+          <p:cNvPr id="4" name="net 1 number"/>
+          <p:cNvSpPr txBox="1"/>
+          <p:nvPr/>
+        </p:nvSpPr>
+        <p:spPr>
+          <a:xfrm>
+            <a:off x="594360" y="1508760"/>
+            <a:ext cx="2286000" cy="914400"/>
+          </a:xfrm>
+          <a:prstGeom prst="rect">
+            <a:avLst/>
+          </a:prstGeom>
+          <a:noFill/>
+          <a:ln/>
+        </p:spPr>
+        <p:txBody>
+          <a:bodyPr wrap="square" lIns="0" tIns="0" rIns="0" bIns="0" rtlCol="0" anchor="ctr"/>
+          <a:lstStyle/>
+          <a:p>
+            <a:pPr algn="l" indent="0" marL="0">
+              <a:buNone/>
+            </a:pPr>
+            <a:r>
+              <a:rPr lang="en-US" sz="4400" b="1" dirty="0">
+                <a:solidFill>
+                  <a:schemeClr val="accent1"/>
+                </a:solidFill>
+              </a:rPr>
+              <a:t>31</a:t>
+            </a:r>
+            <a:endParaRPr lang="en-US" sz="4400" dirty="0"/>
+          </a:p>
+        </p:txBody>
+      </p:sp>
+      <p:sp>
+        <p:nvSpPr>
+          <p:cNvPr id="5" name="net 1 title"/>
+          <p:cNvSpPr txBox="1"/>
+          <p:nvPr/>
+        </p:nvSpPr>
+        <p:spPr>
+          <a:xfrm>
+            <a:off x="594360" y="2468880"/>
+            <a:ext cx="2286000" cy="548640"/>
+          </a:xfrm>
+          <a:prstGeom prst="rect">
+            <a:avLst/>
+          </a:prstGeom>
+          <a:noFill/>
+          <a:ln/>
+        </p:spPr>
+        <p:txBody>
+          <a:bodyPr wrap="square" lIns="0" tIns="0" rIns="0" bIns="0" rtlCol="0" anchor="t"/>
+          <a:lstStyle/>
+          <a:p>
+            <a:pPr indent="0" marL="0">
+              <a:buNone/>
+            </a:pPr>
+            <a:r>
+              <a:rPr lang="en-US" sz="1800" b="1" dirty="0">
+                <a:solidFill>
+                  <a:schemeClr val="tx2"/>
+                </a:solidFill>
+              </a:rPr>
+              <a:t>automatic tests</a:t>
+            </a:r>
+            <a:endParaRPr lang="en-US" sz="1800" dirty="0"/>
+          </a:p>
+        </p:txBody>
+      </p:sp>
+      <p:sp>
+        <p:nvSpPr>
+          <p:cNvPr id="6" name="net 1 text"/>
+          <p:cNvSpPr txBox="1"/>
+          <p:nvPr/>
+        </p:nvSpPr>
+        <p:spPr>
+          <a:xfrm>
+            <a:off x="594360" y="3108960"/>
+            <a:ext cx="2286000" cy="822960"/>
+          </a:xfrm>
+          <a:prstGeom prst="rect">
+            <a:avLst/>
+          </a:prstGeom>
+          <a:noFill/>
+          <a:ln/>
+        </p:spPr>
+        <p:txBody>
+          <a:bodyPr wrap="square" lIns="0" tIns="0" rIns="0" bIns="0" rtlCol="0" anchor="t"/>
+          <a:lstStyle/>
+          <a:p>
+            <a:pPr indent="0" marL="0">
+              <a:buNone/>
+            </a:pPr>
+            <a:r>
+              <a:rPr lang="en-US" sz="1400" dirty="0">
+                <a:solidFill>
+                  <a:schemeClr val="tx1"/>
+                </a:solidFill>
+              </a:rPr>
+              <a:t>Must pass before anything is built</a:t>
+            </a:r>
+            <a:endParaRPr lang="en-US" sz="1400" dirty="0"/>
+          </a:p>
+        </p:txBody>
+      </p:sp>
+      <p:sp>
+        <p:nvSpPr>
+          <p:cNvPr id="7" name="net 2 card"/>
+          <p:cNvSpPr/>
+          <p:nvPr/>
+        </p:nvSpPr>
+        <p:spPr>
+          <a:xfrm>
+            <a:off x="3291840" y="1371600"/>
+            <a:ext cx="2560320" cy="2697480"/>
+          </a:xfrm>
+          <a:prstGeom prst="roundRect">
+            <a:avLst>
+              <a:gd name="adj" fmla="val 4286"/>
+            </a:avLst>
+          </a:prstGeom>
+          <a:solidFill>
+            <a:schemeClr val="bg2"/>
+          </a:solidFill>
+          <a:ln w="12700">
+            <a:solidFill>
+              <a:schemeClr val="bg2"/>
+            </a:solidFill>
+            <a:prstDash val="solid"/>
+          </a:ln>
+          <a:effectLst>
+            <a:outerShdw sx="100000" sy="100000" kx="0" ky="0" algn="bl" rotWithShape="0" blurRad="76200" dist="25400" dir="5400000">
+              <a:srgbClr val="000000">
+                <a:alpha val="12000"/>
+              </a:srgbClr>
+            </a:outerShdw>
+          </a:effectLst>
+        </p:spPr>
+      </p:sp>
+      <p:sp>
+        <p:nvSpPr>
+          <p:cNvPr id="8" name="net 2 number"/>
+          <p:cNvSpPr txBox="1"/>
+          <p:nvPr/>
+        </p:nvSpPr>
+        <p:spPr>
+          <a:xfrm>
+            <a:off x="3429000" y="1508760"/>
+            <a:ext cx="2286000" cy="914400"/>
+          </a:xfrm>
+          <a:prstGeom prst="rect">
+            <a:avLst/>
+          </a:prstGeom>
+          <a:noFill/>
+          <a:ln/>
+        </p:spPr>
+        <p:txBody>
+          <a:bodyPr wrap="square" lIns="0" tIns="0" rIns="0" bIns="0" rtlCol="0" anchor="ctr"/>
+          <a:lstStyle/>
+          <a:p>
+            <a:pPr algn="l" indent="0" marL="0">
+              <a:buNone/>
+            </a:pPr>
+            <a:r>
+              <a:rPr lang="en-US" sz="4400" b="1" dirty="0">
+                <a:solidFill>
+                  <a:schemeClr val="accent1"/>
+                </a:solidFill>
+              </a:rPr>
+              <a:t>88 to 0</a:t>
+            </a:r>
+            <a:endParaRPr lang="en-US" sz="4400" dirty="0"/>
+          </a:p>
+        </p:txBody>
+      </p:sp>
+      <p:sp>
+        <p:nvSpPr>
+          <p:cNvPr id="9" name="net 2 title"/>
+          <p:cNvSpPr txBox="1"/>
+          <p:nvPr/>
+        </p:nvSpPr>
+        <p:spPr>
+          <a:xfrm>
+            <a:off x="3429000" y="2468880"/>
+            <a:ext cx="2286000" cy="548640"/>
+          </a:xfrm>
+          <a:prstGeom prst="rect">
+            <a:avLst/>
+          </a:prstGeom>
+          <a:noFill/>
+          <a:ln/>
+        </p:spPr>
+        <p:txBody>
+          <a:bodyPr wrap="square" lIns="0" tIns="0" rIns="0" bIns="0" rtlCol="0" anchor="t"/>
+          <a:lstStyle/>
+          <a:p>
+            <a:pPr indent="0" marL="0">
+              <a:buNone/>
+            </a:pPr>
+            <a:r>
+              <a:rPr lang="en-US" sz="1800" b="1" dirty="0">
+                <a:solidFill>
+                  <a:schemeClr val="tx2"/>
+                </a:solidFill>
+              </a:rPr>
+              <a:t>serious security findings</a:t>
+            </a:r>
+            <a:endParaRPr lang="en-US" sz="1800" dirty="0"/>
+          </a:p>
+        </p:txBody>
+      </p:sp>
+      <p:sp>
+        <p:nvSpPr>
+          <p:cNvPr id="10" name="net 2 text"/>
+          <p:cNvSpPr txBox="1"/>
+          <p:nvPr/>
+        </p:nvSpPr>
+        <p:spPr>
+          <a:xfrm>
+            <a:off x="3429000" y="3108960"/>
+            <a:ext cx="2286000" cy="822960"/>
+          </a:xfrm>
+          <a:prstGeom prst="rect">
+            <a:avLst/>
+          </a:prstGeom>
+          <a:noFill/>
+          <a:ln/>
+        </p:spPr>
+        <p:txBody>
+          <a:bodyPr wrap="square" lIns="0" tIns="0" rIns="0" bIns="0" rtlCol="0" anchor="t"/>
+          <a:lstStyle/>
+          <a:p>
+            <a:pPr indent="0" marL="0">
+              <a:buNone/>
+            </a:pPr>
+            <a:r>
+              <a:rPr lang="en-US" sz="1400" dirty="0">
+                <a:solidFill>
+                  <a:schemeClr val="tx1"/>
+                </a:solidFill>
+              </a:rPr>
+              <a:t>Found by Trivy, then fixed</a:t>
+            </a:r>
+            <a:endParaRPr lang="en-US" sz="1400" dirty="0"/>
+          </a:p>
+        </p:txBody>
+      </p:sp>
+      <p:sp>
+        <p:nvSpPr>
+          <p:cNvPr id="11" name="net 3 card"/>
+          <p:cNvSpPr/>
+          <p:nvPr/>
+        </p:nvSpPr>
+        <p:spPr>
+          <a:xfrm>
+            <a:off x="6126480" y="1371600"/>
+            <a:ext cx="2560320" cy="2697480"/>
+          </a:xfrm>
+          <a:prstGeom prst="roundRect">
+            <a:avLst>
+              <a:gd name="adj" fmla="val 4286"/>
+            </a:avLst>
+          </a:prstGeom>
+          <a:solidFill>
+            <a:schemeClr val="bg2"/>
+          </a:solidFill>
+          <a:ln w="12700">
+            <a:solidFill>
+              <a:schemeClr val="bg2"/>
+            </a:solidFill>
+            <a:prstDash val="solid"/>
+          </a:ln>
+          <a:effectLst>
+            <a:outerShdw sx="100000" sy="100000" kx="0" ky="0" algn="bl" rotWithShape="0" blurRad="76200" dist="25400" dir="5400000">
+              <a:srgbClr val="000000">
+                <a:alpha val="12000"/>
+              </a:srgbClr>
+            </a:outerShdw>
+          </a:effectLst>
+        </p:spPr>
+      </p:sp>
+      <p:sp>
+        <p:nvSpPr>
+          <p:cNvPr id="12" name="net 3 number"/>
+          <p:cNvSpPr txBox="1"/>
+          <p:nvPr/>
+        </p:nvSpPr>
+        <p:spPr>
+          <a:xfrm>
+            <a:off x="6263640" y="1508760"/>
+            <a:ext cx="2286000" cy="914400"/>
+          </a:xfrm>
+          <a:prstGeom prst="rect">
+            <a:avLst/>
+          </a:prstGeom>
+          <a:noFill/>
+          <a:ln/>
+        </p:spPr>
+        <p:txBody>
+          <a:bodyPr wrap="square" lIns="0" tIns="0" rIns="0" bIns="0" rtlCol="0" anchor="ctr"/>
+          <a:lstStyle/>
+          <a:p>
+            <a:pPr algn="l" indent="0" marL="0">
+              <a:buNone/>
+            </a:pPr>
+            <a:r>
+              <a:rPr lang="en-US" sz="4400" b="1" dirty="0">
+                <a:solidFill>
+                  <a:schemeClr val="accent1"/>
+                </a:solidFill>
+              </a:rPr>
+              <a:t>2</a:t>
+            </a:r>
+            <a:endParaRPr lang="en-US" sz="4400" dirty="0"/>
+          </a:p>
+        </p:txBody>
+      </p:sp>
+      <p:sp>
+        <p:nvSpPr>
+          <p:cNvPr id="13" name="net 3 title"/>
+          <p:cNvSpPr txBox="1"/>
+          <p:nvPr/>
+        </p:nvSpPr>
+        <p:spPr>
+          <a:xfrm>
+            <a:off x="6263640" y="2468880"/>
+            <a:ext cx="2286000" cy="548640"/>
+          </a:xfrm>
+          <a:prstGeom prst="rect">
+            <a:avLst/>
+          </a:prstGeom>
+          <a:noFill/>
+          <a:ln/>
+        </p:spPr>
+        <p:txBody>
+          <a:bodyPr wrap="square" lIns="0" tIns="0" rIns="0" bIns="0" rtlCol="0" anchor="t"/>
+          <a:lstStyle/>
+          <a:p>
+            <a:pPr indent="0" marL="0">
+              <a:buNone/>
+            </a:pPr>
+            <a:r>
+              <a:rPr lang="en-US" sz="1800" b="1" dirty="0">
+                <a:solidFill>
+                  <a:schemeClr val="tx2"/>
+                </a:solidFill>
+              </a:rPr>
+              <a:t>copies of the app</a:t>
+            </a:r>
+            <a:endParaRPr lang="en-US" sz="1800" dirty="0"/>
+          </a:p>
+        </p:txBody>
+      </p:sp>
+      <p:sp>
+        <p:nvSpPr>
+          <p:cNvPr id="14" name="net 3 text"/>
+          <p:cNvSpPr txBox="1"/>
+          <p:nvPr/>
+        </p:nvSpPr>
+        <p:spPr>
+          <a:xfrm>
+            <a:off x="6263640" y="3108960"/>
+            <a:ext cx="2286000" cy="822960"/>
+          </a:xfrm>
+          <a:prstGeom prst="rect">
+            <a:avLst/>
+          </a:prstGeom>
+          <a:noFill/>
+          <a:ln/>
+        </p:spPr>
+        <p:txBody>
+          <a:bodyPr wrap="square" lIns="0" tIns="0" rIns="0" bIns="0" rtlCol="0" anchor="t"/>
+          <a:lstStyle/>
+          <a:p>
+            <a:pPr indent="0" marL="0">
+              <a:buNone/>
+            </a:pPr>
+            <a:r>
+              <a:rPr lang="en-US" sz="1400" dirty="0">
+                <a:solidFill>
+                  <a:schemeClr val="tx1"/>
+                </a:solidFill>
+              </a:rPr>
+              <a:t>If one crashes, the other serves</a:t>
+            </a:r>
+            <a:endParaRPr lang="en-US" sz="1400" dirty="0"/>
+          </a:p>
+        </p:txBody>
+      </p:sp>
+      <p:sp>
+        <p:nvSpPr>
+          <p:cNvPr id="25" name="Slide Number Placeholder 0"/>
+          <p:cNvSpPr>
+            <a:spLocks noGrp="1"/>
+          </p:cNvSpPr>
+          <p:nvPr>
+            <p:ph type="sldNum" sz="quarter" idx="4294967295"/>
+          </p:nvPr>
+        </p:nvSpPr>
+        <p:spPr>
+          <a:xfrm>
+            <a:off x="8229600" y="4773168"/>
+            <a:ext cx="457200" cy="274320"/>
+          </a:xfrm>
+          <a:prstGeom prst="rect">
+            <a:avLst/>
+          </a:prstGeom>
+          <a:extLst>
+            <a:ext uri="{C572A759-6A51-4108-AA02-DFA0A04FC94B}">
+              <ma14:wrappingTextBoxFlag xmlns:ma14="http://schemas.microsoft.com/office/mac/drawingml/2011/main" val="0"/>
+            </a:ext>
+          </a:extLst>
+        </p:spPr>
+        <p:txBody>
+          <a:bodyPr/>
+          <a:lstStyle>
+            <a:lvl1pPr>
+              <a:defRPr sz="1000">
+                <a:solidFill>
+                  <a:schemeClr val="accent6"/>
+                </a:solidFill>
+              </a:defRPr>
+            </a:lvl1pPr>
+          </a:lstStyle>
+          <a:p>
+            <a:pPr algn="l"/>
+            <a:fld id="{F7021451-1387-4CA6-816F-3879F97B5CBC}" type="slidenum">
+              <a:rPr b="0" lang="en-US"/>
+              <a:t>14</a:t>
+            </a:fld>
+            <a:endParaRPr lang="en-US"/>
+          </a:p>
+        </p:txBody>
+      </p:sp>
+    </p:spTree>
+  </p:cSld>
+  <p:clrMapOvr>
+    <a:masterClrMapping/>
+  </p:clrMapOvr>
+</p:sld>
+</file>
+
+<file path=ppt/slides/slide15.xml><?xml version="1.0" encoding="utf-8"?>
+<p:sld xmlns:a="http://schemas.openxmlformats.org/drawingml/2006/main" xmlns:r="http://schemas.openxmlformats.org/officeDocument/2006/relationships" xmlns:p="http://schemas.openxmlformats.org/presentationml/2006/main">
+  <p:cSld name="Slide 15">
+    <p:spTree>
+      <p:nvGrpSpPr>
+        <p:cNvPr id="1" name=""/>
+        <p:cNvGrpSpPr/>
+        <p:nvPr/>
+      </p:nvGrpSpPr>
+      <p:grpSpPr>
+        <a:xfrm>
+          <a:off x="0" y="0"/>
+          <a:ext cx="0" cy="0"/>
+          <a:chOff x="0" y="0"/>
+          <a:chExt cx="0" cy="0"/>
+        </a:xfrm>
+      </p:grpSpPr>
+      <p:sp>
+        <p:nvSpPr>
           <p:cNvPr id="2" name="Text 0"/>
           <p:cNvSpPr/>
           <p:nvPr>
@@ -3801,7 +4659,7 @@
                   <a:schemeClr val="bg2"/>
                 </a:solidFill>
               </a:rPr>
-              <a:t>Push code, and it is tested, scanned, published, deployed and watched.</a:t>
+              <a:t>Push code: it is tested, scanned and published. Then it is deployed and watched.</a:t>
             </a:r>
             <a:endParaRPr lang="en-US" sz="2000" dirty="0"/>
           </a:p>
@@ -3815,7 +4673,7 @@
                   <a:schemeClr val="bg2"/>
                 </a:solidFill>
               </a:rPr>
-              <a:t>Next: auto-scaling, a permanent database volume and a staging environment.</a:t>
+              <a:t>Next: automatic deploys and a staging environment.</a:t>
             </a:r>
             <a:endParaRPr lang="en-US" sz="2000" dirty="0"/>
           </a:p>
@@ -3829,7 +4687,7 @@
         </p:nvSpPr>
         <p:spPr>
           <a:xfrm>
-            <a:off x="640080" y="4343400"/>
+            <a:off x="640080" y="4114800"/>
             <a:ext cx="4572000" cy="457200"/>
           </a:xfrm>
           <a:prstGeom prst="rect">
@@ -3928,7 +4786,7 @@
         </p:nvSpPr>
         <p:spPr>
           <a:xfrm>
-            <a:off x="457200" y="1325880"/>
+            <a:off x="457200" y="1371600"/>
             <a:ext cx="640080" cy="640080"/>
           </a:xfrm>
           <a:prstGeom prst="ellipse">
@@ -3961,7 +4819,7 @@
         </p:blipFill>
         <p:spPr>
           <a:xfrm>
-            <a:off x="630022" y="1498702"/>
+            <a:off x="630022" y="1544422"/>
             <a:ext cx="294437" cy="294437"/>
           </a:xfrm>
           <a:prstGeom prst="rect">
@@ -3977,7 +4835,7 @@
         </p:nvSpPr>
         <p:spPr>
           <a:xfrm>
-            <a:off x="1325880" y="1325880"/>
+            <a:off x="1325880" y="1371600"/>
             <a:ext cx="7223760" cy="320040"/>
           </a:xfrm>
           <a:prstGeom prst="rect">
@@ -4013,7 +4871,7 @@
         </p:nvSpPr>
         <p:spPr>
           <a:xfrm>
-            <a:off x="1325880" y="1664208"/>
+            <a:off x="1325880" y="1709928"/>
             <a:ext cx="7223760" cy="365760"/>
           </a:xfrm>
           <a:prstGeom prst="rect">
@@ -4035,7 +4893,7 @@
                   <a:schemeClr val="tx1"/>
                 </a:solidFill>
               </a:rPr>
-              <a:t>Add items, set prices, and see what is running low.</a:t>
+              <a:t>Prices, items, what is running low</a:t>
             </a:r>
             <a:endParaRPr lang="en-US" sz="1600" dirty="0"/>
           </a:p>
@@ -4049,7 +4907,7 @@
         </p:nvSpPr>
         <p:spPr>
           <a:xfrm>
-            <a:off x="457200" y="2240280"/>
+            <a:off x="457200" y="2286000"/>
             <a:ext cx="640080" cy="640080"/>
           </a:xfrm>
           <a:prstGeom prst="ellipse">
@@ -4082,7 +4940,7 @@
         </p:blipFill>
         <p:spPr>
           <a:xfrm>
-            <a:off x="630022" y="2413102"/>
+            <a:off x="630022" y="2458822"/>
             <a:ext cx="294437" cy="294437"/>
           </a:xfrm>
           <a:prstGeom prst="rect">
@@ -4098,7 +4956,7 @@
         </p:nvSpPr>
         <p:spPr>
           <a:xfrm>
-            <a:off x="1325880" y="2240280"/>
+            <a:off x="1325880" y="2286000"/>
             <a:ext cx="7223760" cy="320040"/>
           </a:xfrm>
           <a:prstGeom prst="rect">
@@ -4134,7 +4992,7 @@
         </p:nvSpPr>
         <p:spPr>
           <a:xfrm>
-            <a:off x="1325880" y="2578608"/>
+            <a:off x="1325880" y="2624328"/>
             <a:ext cx="7223760" cy="365760"/>
           </a:xfrm>
           <a:prstGeom prst="rect">
@@ -4156,7 +5014,7 @@
                   <a:schemeClr val="tx1"/>
                 </a:solidFill>
               </a:rPr>
-              <a:t>Take an order and stock updates itself. Cancel it and the stock comes back.</a:t>
+              <a:t>Orders update stock automatically</a:t>
             </a:r>
             <a:endParaRPr lang="en-US" sz="1600" dirty="0"/>
           </a:p>
@@ -4170,7 +5028,7 @@
         </p:nvSpPr>
         <p:spPr>
           <a:xfrm>
-            <a:off x="457200" y="3154680"/>
+            <a:off x="457200" y="3200400"/>
             <a:ext cx="640080" cy="640080"/>
           </a:xfrm>
           <a:prstGeom prst="ellipse">
@@ -4203,7 +5061,7 @@
         </p:blipFill>
         <p:spPr>
           <a:xfrm>
-            <a:off x="630022" y="3327502"/>
+            <a:off x="630022" y="3373222"/>
             <a:ext cx="294437" cy="294437"/>
           </a:xfrm>
           <a:prstGeom prst="rect">
@@ -4219,7 +5077,7 @@
         </p:nvSpPr>
         <p:spPr>
           <a:xfrm>
-            <a:off x="1325880" y="3154680"/>
+            <a:off x="1325880" y="3200400"/>
             <a:ext cx="7223760" cy="320040"/>
           </a:xfrm>
           <a:prstGeom prst="rect">
@@ -4255,7 +5113,7 @@
         </p:nvSpPr>
         <p:spPr>
           <a:xfrm>
-            <a:off x="1325880" y="3493008"/>
+            <a:off x="1325880" y="3538728"/>
             <a:ext cx="7223760" cy="365760"/>
           </a:xfrm>
           <a:prstGeom prst="rect">
@@ -4277,7 +5135,7 @@
                   <a:schemeClr val="tx1"/>
                 </a:solidFill>
               </a:rPr>
-              <a:t>Revenue, best sellers and recent orders at a glance.</a:t>
+              <a:t>Revenue and best sellers at a glance</a:t>
             </a:r>
             <a:endParaRPr lang="en-US" sz="1600" dirty="0"/>
           </a:p>
@@ -4285,41 +5143,14 @@
       </p:sp>
       <p:sp>
         <p:nvSpPr>
-          <p:cNvPr id="15" name="why box"/>
-          <p:cNvSpPr/>
-          <p:nvPr/>
-        </p:nvSpPr>
-        <p:spPr>
-          <a:xfrm>
-            <a:off x="457200" y="3977640"/>
-            <a:ext cx="8229600" cy="685800"/>
-          </a:xfrm>
-          <a:prstGeom prst="roundRect">
-            <a:avLst>
-              <a:gd name="adj" fmla="val 13333"/>
-            </a:avLst>
-          </a:prstGeom>
-          <a:solidFill>
-            <a:schemeClr val="bg2"/>
-          </a:solidFill>
-          <a:ln w="12700">
-            <a:solidFill>
-              <a:schemeClr val="bg2"/>
-            </a:solidFill>
-            <a:prstDash val="solid"/>
-          </a:ln>
-        </p:spPr>
-      </p:sp>
-      <p:sp>
-        <p:nvSpPr>
-          <p:cNvPr id="16" name="why text"/>
+          <p:cNvPr id="15" name="why text"/>
           <p:cNvSpPr txBox="1"/>
           <p:nvPr/>
         </p:nvSpPr>
         <p:spPr>
           <a:xfrm>
-            <a:off x="640080" y="3977640"/>
-            <a:ext cx="7863840" cy="685800"/>
+            <a:off x="457200" y="4206240"/>
+            <a:ext cx="8229600" cy="411480"/>
           </a:xfrm>
           <a:prstGeom prst="rect">
             <a:avLst/>
@@ -4335,7 +5166,7 @@
               <a:buNone/>
             </a:pPr>
             <a:r>
-              <a:rPr lang="en-US" sz="1400" b="1" dirty="0">
+              <a:rPr lang="en-US" sz="1800" b="1" dirty="0">
                 <a:solidFill>
                   <a:schemeClr val="accent1"/>
                 </a:solidFill>
@@ -4346,14 +5177,14 @@
               <a:buNone/>
             </a:pPr>
             <a:r>
-              <a:rPr lang="en-US" sz="1400" dirty="0">
+              <a:rPr lang="en-US" sz="1800" dirty="0">
                 <a:solidFill>
                   <a:schemeClr val="tx1"/>
                 </a:solidFill>
               </a:rPr>
-              <a:t>small shops juggle spreadsheets. This puts it all on one screen that also works on a phone.</a:t>
-            </a:r>
-            <a:endParaRPr lang="en-US" sz="1400" dirty="0"/>
+              <a:t>one simple screen instead of spreadsheets</a:t>
+            </a:r>
+            <a:endParaRPr lang="en-US" sz="1800" dirty="0"/>
           </a:p>
         </p:txBody>
       </p:sp>
@@ -4459,7 +5290,7 @@
                   <a:schemeClr val="tx2"/>
                 </a:solidFill>
               </a:rPr>
-              <a:t>How the pieces fit together</a:t>
+              <a:t>The tech stack</a:t>
             </a:r>
             <a:endParaRPr lang="en-US" sz="3400" dirty="0"/>
           </a:p>
@@ -4467,18 +5298,90 @@
       </p:sp>
       <p:sp>
         <p:nvSpPr>
-          <p:cNvPr id="3" name="part 1 card"/>
+          <p:cNvPr id="3" name="The app label"/>
+          <p:cNvSpPr txBox="1"/>
+          <p:nvPr/>
+        </p:nvSpPr>
+        <p:spPr>
+          <a:xfrm>
+            <a:off x="457200" y="1280160"/>
+            <a:ext cx="2743200" cy="320040"/>
+          </a:xfrm>
+          <a:prstGeom prst="rect">
+            <a:avLst/>
+          </a:prstGeom>
+          <a:noFill/>
+          <a:ln/>
+        </p:spPr>
+        <p:txBody>
+          <a:bodyPr wrap="square" lIns="0" tIns="0" rIns="0" bIns="0" rtlCol="0" anchor="ctr"/>
+          <a:lstStyle/>
+          <a:p>
+            <a:pPr indent="0" marL="0">
+              <a:buNone/>
+            </a:pPr>
+            <a:r>
+              <a:rPr lang="en-US" sz="1800" b="1" dirty="0">
+                <a:solidFill>
+                  <a:schemeClr val="tx2"/>
+                </a:solidFill>
+              </a:rPr>
+              <a:t>The app</a:t>
+            </a:r>
+            <a:endParaRPr lang="en-US" sz="1800" dirty="0"/>
+          </a:p>
+        </p:txBody>
+      </p:sp>
+      <p:sp>
+        <p:nvSpPr>
+          <p:cNvPr id="4" name="The app sub"/>
+          <p:cNvSpPr txBox="1"/>
+          <p:nvPr/>
+        </p:nvSpPr>
+        <p:spPr>
+          <a:xfrm>
+            <a:off x="2011680" y="1280160"/>
+            <a:ext cx="5486400" cy="320040"/>
+          </a:xfrm>
+          <a:prstGeom prst="rect">
+            <a:avLst/>
+          </a:prstGeom>
+          <a:noFill/>
+          <a:ln/>
+        </p:spPr>
+        <p:txBody>
+          <a:bodyPr wrap="square" lIns="0" tIns="0" rIns="0" bIns="0" rtlCol="0" anchor="ctr"/>
+          <a:lstStyle/>
+          <a:p>
+            <a:pPr indent="0" marL="0">
+              <a:buNone/>
+            </a:pPr>
+            <a:r>
+              <a:rPr lang="en-US" sz="1400" dirty="0">
+                <a:solidFill>
+                  <a:schemeClr val="accent6"/>
+                </a:solidFill>
+              </a:rPr>
+              <a:t>What the shop owner uses</a:t>
+            </a:r>
+            <a:endParaRPr lang="en-US" sz="1400" dirty="0"/>
+          </a:p>
+        </p:txBody>
+      </p:sp>
+      <p:sp>
+        <p:nvSpPr>
+          <p:cNvPr id="5" name="React chip"/>
           <p:cNvSpPr/>
           <p:nvPr/>
         </p:nvSpPr>
         <p:spPr>
           <a:xfrm>
-            <a:off x="457200" y="1371600"/>
-            <a:ext cx="1783080" cy="2331720"/>
+            <a:off x="457200" y="1737360"/>
+            <a:ext cx="1920240" cy="502920"/>
           </a:xfrm>
           <a:prstGeom prst="roundRect">
             <a:avLst>
-              <a:gd name="adj" fmla="val 6154"/>
+              <a:gd name="adj" fmla="val 18182"/>
             </a:avLst>
           </a:prstGeom>
           <a:solidFill>
@@ -4490,25 +5393,18 @@
             </a:solidFill>
             <a:prstDash val="solid"/>
           </a:ln>
-          <a:effectLst>
-            <a:outerShdw sx="100000" sy="100000" kx="0" ky="0" algn="bl" rotWithShape="0" blurRad="76200" dist="25400" dir="5400000">
-              <a:srgbClr val="000000">
-                <a:alpha val="12000"/>
-              </a:srgbClr>
-            </a:outerShdw>
-          </a:effectLst>
-        </p:spPr>
-      </p:sp>
-      <p:sp>
-        <p:nvSpPr>
-          <p:cNvPr id="4" name="part 1 circle"/>
+        </p:spPr>
+      </p:sp>
+      <p:sp>
+        <p:nvSpPr>
+          <p:cNvPr id="6" name="React circle"/>
           <p:cNvSpPr/>
           <p:nvPr/>
         </p:nvSpPr>
         <p:spPr>
           <a:xfrm>
-            <a:off x="1028700" y="1554480"/>
-            <a:ext cx="640080" cy="640080"/>
+            <a:off x="548640" y="1810512"/>
+            <a:ext cx="356616" cy="356616"/>
           </a:xfrm>
           <a:prstGeom prst="ellipse">
             <a:avLst/>
@@ -4526,7 +5422,7 @@
       </p:sp>
       <p:pic>
         <p:nvPicPr>
-          <p:cNvPr id="5" name="part 1 icon" descr="part 1">    </p:cNvPr>
+          <p:cNvPr id="7" name="React icon" descr="React">    </p:cNvPr>
           <p:cNvPicPr>
             <a:picLocks noChangeAspect="1"/>
           </p:cNvPicPr>
@@ -4540,8 +5436,8 @@
         </p:blipFill>
         <p:spPr>
           <a:xfrm>
-            <a:off x="1201522" y="1727302"/>
-            <a:ext cx="294437" cy="294437"/>
+            <a:off x="644926" y="1906798"/>
+            <a:ext cx="164043" cy="164043"/>
           </a:xfrm>
           <a:prstGeom prst="rect">
             <a:avLst/>
@@ -4550,14 +5446,14 @@
       </p:pic>
       <p:sp>
         <p:nvSpPr>
-          <p:cNvPr id="6" name="part 1 name"/>
+          <p:cNvPr id="8" name="React name"/>
           <p:cNvSpPr txBox="1"/>
           <p:nvPr/>
         </p:nvSpPr>
         <p:spPr>
           <a:xfrm>
-            <a:off x="548640" y="2286000"/>
-            <a:ext cx="1600200" cy="365760"/>
+            <a:off x="987552" y="1737360"/>
+            <a:ext cx="1325880" cy="502920"/>
           </a:xfrm>
           <a:prstGeom prst="rect">
             <a:avLst/>
@@ -4569,132 +5465,35 @@
           <a:bodyPr wrap="square" lIns="0" tIns="0" rIns="0" bIns="0" rtlCol="0" anchor="ctr"/>
           <a:lstStyle/>
           <a:p>
-            <a:pPr algn="ctr" indent="0" marL="0">
+            <a:pPr indent="0" marL="0">
               <a:buNone/>
             </a:pPr>
             <a:r>
-              <a:rPr lang="en-US" sz="1800" b="1" dirty="0">
+              <a:rPr lang="en-US" sz="1400" b="1" dirty="0">
                 <a:solidFill>
                   <a:schemeClr val="tx2"/>
-                </a:solidFill>
-              </a:rPr>
-              <a:t>What you see</a:t>
-            </a:r>
-            <a:endParaRPr lang="en-US" sz="1800" dirty="0"/>
-          </a:p>
-        </p:txBody>
-      </p:sp>
-      <p:sp>
-        <p:nvSpPr>
-          <p:cNvPr id="7" name="part 1 role"/>
-          <p:cNvSpPr txBox="1"/>
-          <p:nvPr/>
-        </p:nvSpPr>
-        <p:spPr>
-          <a:xfrm>
-            <a:off x="594360" y="2670048"/>
-            <a:ext cx="1508760" cy="640080"/>
-          </a:xfrm>
-          <a:prstGeom prst="rect">
-            <a:avLst/>
-          </a:prstGeom>
-          <a:noFill/>
-          <a:ln/>
-        </p:spPr>
-        <p:txBody>
-          <a:bodyPr wrap="square" lIns="0" tIns="0" rIns="0" bIns="0" rtlCol="0" anchor="t"/>
-          <a:lstStyle/>
-          <a:p>
-            <a:pPr algn="ctr" indent="0" marL="0">
-              <a:buNone/>
-            </a:pPr>
-            <a:r>
-              <a:rPr lang="en-US" sz="1400" dirty="0">
-                <a:solidFill>
-                  <a:schemeClr val="tx1"/>
-                </a:solidFill>
-              </a:rPr>
-              <a:t>The web page</a:t>
-            </a:r>
-            <a:endParaRPr lang="en-US" sz="1400" dirty="0"/>
-          </a:p>
-        </p:txBody>
-      </p:sp>
-      <p:sp>
-        <p:nvSpPr>
-          <p:cNvPr id="8" name="part 1 tech"/>
-          <p:cNvSpPr txBox="1"/>
-          <p:nvPr/>
-        </p:nvSpPr>
-        <p:spPr>
-          <a:xfrm>
-            <a:off x="548640" y="3337560"/>
-            <a:ext cx="1600200" cy="274320"/>
-          </a:xfrm>
-          <a:prstGeom prst="rect">
-            <a:avLst/>
-          </a:prstGeom>
-          <a:noFill/>
-          <a:ln/>
-        </p:spPr>
-        <p:txBody>
-          <a:bodyPr wrap="square" lIns="0" tIns="0" rIns="0" bIns="0" rtlCol="0" anchor="ctr"/>
-          <a:lstStyle/>
-          <a:p>
-            <a:pPr algn="ctr" indent="0" marL="0">
-              <a:buNone/>
-            </a:pPr>
-            <a:r>
-              <a:rPr lang="en-US" sz="1200" b="1" dirty="0">
-                <a:solidFill>
-                  <a:schemeClr val="accent1"/>
                 </a:solidFill>
               </a:rPr>
               <a:t>React</a:t>
             </a:r>
-            <a:endParaRPr lang="en-US" sz="1200" dirty="0"/>
-          </a:p>
-        </p:txBody>
-      </p:sp>
-      <p:sp>
-        <p:nvSpPr>
-          <p:cNvPr id="9" name="arrow 1"/>
+            <a:endParaRPr lang="en-US" sz="1400" dirty="0"/>
+          </a:p>
+        </p:txBody>
+      </p:sp>
+      <p:sp>
+        <p:nvSpPr>
+          <p:cNvPr id="9" name="FastAPI chip"/>
           <p:cNvSpPr/>
           <p:nvPr/>
         </p:nvSpPr>
         <p:spPr>
           <a:xfrm>
-            <a:off x="2304288" y="2395728"/>
-            <a:ext cx="237744" cy="274320"/>
-          </a:xfrm>
-          <a:prstGeom prst="rightArrow">
-            <a:avLst/>
-          </a:prstGeom>
-          <a:solidFill>
-            <a:schemeClr val="accent6"/>
-          </a:solidFill>
-          <a:ln w="12700">
-            <a:solidFill>
-              <a:schemeClr val="accent6"/>
-            </a:solidFill>
-            <a:prstDash val="solid"/>
-          </a:ln>
-        </p:spPr>
-      </p:sp>
-      <p:sp>
-        <p:nvSpPr>
-          <p:cNvPr id="10" name="part 2 card"/>
-          <p:cNvSpPr/>
-          <p:nvPr/>
-        </p:nvSpPr>
-        <p:spPr>
-          <a:xfrm>
-            <a:off x="2606040" y="1371600"/>
-            <a:ext cx="1783080" cy="2331720"/>
+            <a:off x="2560320" y="1737360"/>
+            <a:ext cx="1920240" cy="502920"/>
           </a:xfrm>
           <a:prstGeom prst="roundRect">
             <a:avLst>
-              <a:gd name="adj" fmla="val 6154"/>
+              <a:gd name="adj" fmla="val 18182"/>
             </a:avLst>
           </a:prstGeom>
           <a:solidFill>
@@ -4706,25 +5505,18 @@
             </a:solidFill>
             <a:prstDash val="solid"/>
           </a:ln>
-          <a:effectLst>
-            <a:outerShdw sx="100000" sy="100000" kx="0" ky="0" algn="bl" rotWithShape="0" blurRad="76200" dist="25400" dir="5400000">
-              <a:srgbClr val="000000">
-                <a:alpha val="12000"/>
-              </a:srgbClr>
-            </a:outerShdw>
-          </a:effectLst>
-        </p:spPr>
-      </p:sp>
-      <p:sp>
-        <p:nvSpPr>
-          <p:cNvPr id="11" name="part 2 circle"/>
+        </p:spPr>
+      </p:sp>
+      <p:sp>
+        <p:nvSpPr>
+          <p:cNvPr id="10" name="FastAPI circle"/>
           <p:cNvSpPr/>
           <p:nvPr/>
         </p:nvSpPr>
         <p:spPr>
           <a:xfrm>
-            <a:off x="3177540" y="1554480"/>
-            <a:ext cx="640080" cy="640080"/>
+            <a:off x="2651760" y="1810512"/>
+            <a:ext cx="356616" cy="356616"/>
           </a:xfrm>
           <a:prstGeom prst="ellipse">
             <a:avLst/>
@@ -4742,7 +5534,7 @@
       </p:sp>
       <p:pic>
         <p:nvPicPr>
-          <p:cNvPr id="12" name="part 2 icon" descr="part 2">    </p:cNvPr>
+          <p:cNvPr id="11" name="FastAPI icon" descr="FastAPI">    </p:cNvPr>
           <p:cNvPicPr>
             <a:picLocks noChangeAspect="1"/>
           </p:cNvPicPr>
@@ -4756,8 +5548,8 @@
         </p:blipFill>
         <p:spPr>
           <a:xfrm>
-            <a:off x="3350362" y="1727302"/>
-            <a:ext cx="294437" cy="294437"/>
+            <a:off x="2748046" y="1906798"/>
+            <a:ext cx="164043" cy="164043"/>
           </a:xfrm>
           <a:prstGeom prst="rect">
             <a:avLst/>
@@ -4766,14 +5558,14 @@
       </p:pic>
       <p:sp>
         <p:nvSpPr>
-          <p:cNvPr id="13" name="part 2 name"/>
+          <p:cNvPr id="12" name="FastAPI name"/>
           <p:cNvSpPr txBox="1"/>
           <p:nvPr/>
         </p:nvSpPr>
         <p:spPr>
           <a:xfrm>
-            <a:off x="2697480" y="2286000"/>
-            <a:ext cx="1600200" cy="365760"/>
+            <a:off x="3090672" y="1737360"/>
+            <a:ext cx="1325880" cy="502920"/>
           </a:xfrm>
           <a:prstGeom prst="rect">
             <a:avLst/>
@@ -4785,52 +5577,16 @@
           <a:bodyPr wrap="square" lIns="0" tIns="0" rIns="0" bIns="0" rtlCol="0" anchor="ctr"/>
           <a:lstStyle/>
           <a:p>
-            <a:pPr algn="ctr" indent="0" marL="0">
+            <a:pPr indent="0" marL="0">
               <a:buNone/>
             </a:pPr>
             <a:r>
-              <a:rPr lang="en-US" sz="1800" b="1" dirty="0">
+              <a:rPr lang="en-US" sz="1400" b="1" dirty="0">
                 <a:solidFill>
                   <a:schemeClr val="tx2"/>
                 </a:solidFill>
               </a:rPr>
-              <a:t>The doorman</a:t>
-            </a:r>
-            <a:endParaRPr lang="en-US" sz="1800" dirty="0"/>
-          </a:p>
-        </p:txBody>
-      </p:sp>
-      <p:sp>
-        <p:nvSpPr>
-          <p:cNvPr id="14" name="part 2 role"/>
-          <p:cNvSpPr txBox="1"/>
-          <p:nvPr/>
-        </p:nvSpPr>
-        <p:spPr>
-          <a:xfrm>
-            <a:off x="2743200" y="2670048"/>
-            <a:ext cx="1508760" cy="640080"/>
-          </a:xfrm>
-          <a:prstGeom prst="rect">
-            <a:avLst/>
-          </a:prstGeom>
-          <a:noFill/>
-          <a:ln/>
-        </p:spPr>
-        <p:txBody>
-          <a:bodyPr wrap="square" lIns="0" tIns="0" rIns="0" bIns="0" rtlCol="0" anchor="t"/>
-          <a:lstStyle/>
-          <a:p>
-            <a:pPr algn="ctr" indent="0" marL="0">
-              <a:buNone/>
-            </a:pPr>
-            <a:r>
-              <a:rPr lang="en-US" sz="1400" dirty="0">
-                <a:solidFill>
-                  <a:schemeClr val="tx1"/>
-                </a:solidFill>
-              </a:rPr>
-              <a:t>Hands out the page, passes requests on</a:t>
+              <a:t>FastAPI</a:t>
             </a:r>
             <a:endParaRPr lang="en-US" sz="1400" dirty="0"/>
           </a:p>
@@ -4838,79 +5594,18 @@
       </p:sp>
       <p:sp>
         <p:nvSpPr>
-          <p:cNvPr id="15" name="part 2 tech"/>
-          <p:cNvSpPr txBox="1"/>
-          <p:nvPr/>
-        </p:nvSpPr>
-        <p:spPr>
-          <a:xfrm>
-            <a:off x="2697480" y="3337560"/>
-            <a:ext cx="1600200" cy="274320"/>
-          </a:xfrm>
-          <a:prstGeom prst="rect">
-            <a:avLst/>
-          </a:prstGeom>
-          <a:noFill/>
-          <a:ln/>
-        </p:spPr>
-        <p:txBody>
-          <a:bodyPr wrap="square" lIns="0" tIns="0" rIns="0" bIns="0" rtlCol="0" anchor="ctr"/>
-          <a:lstStyle/>
-          <a:p>
-            <a:pPr algn="ctr" indent="0" marL="0">
-              <a:buNone/>
-            </a:pPr>
-            <a:r>
-              <a:rPr lang="en-US" sz="1200" b="1" dirty="0">
-                <a:solidFill>
-                  <a:schemeClr val="accent1"/>
-                </a:solidFill>
-              </a:rPr>
-              <a:t>Nginx</a:t>
-            </a:r>
-            <a:endParaRPr lang="en-US" sz="1200" dirty="0"/>
-          </a:p>
-        </p:txBody>
-      </p:sp>
-      <p:sp>
-        <p:nvSpPr>
-          <p:cNvPr id="16" name="arrow 2"/>
+          <p:cNvPr id="13" name="PostgreSQL chip"/>
           <p:cNvSpPr/>
           <p:nvPr/>
         </p:nvSpPr>
         <p:spPr>
           <a:xfrm>
-            <a:off x="4453128" y="2395728"/>
-            <a:ext cx="237744" cy="274320"/>
-          </a:xfrm>
-          <a:prstGeom prst="rightArrow">
-            <a:avLst/>
-          </a:prstGeom>
-          <a:solidFill>
-            <a:schemeClr val="accent6"/>
-          </a:solidFill>
-          <a:ln w="12700">
-            <a:solidFill>
-              <a:schemeClr val="accent6"/>
-            </a:solidFill>
-            <a:prstDash val="solid"/>
-          </a:ln>
-        </p:spPr>
-      </p:sp>
-      <p:sp>
-        <p:nvSpPr>
-          <p:cNvPr id="17" name="part 3 card"/>
-          <p:cNvSpPr/>
-          <p:nvPr/>
-        </p:nvSpPr>
-        <p:spPr>
-          <a:xfrm>
-            <a:off x="4754880" y="1371600"/>
-            <a:ext cx="1783080" cy="2331720"/>
+            <a:off x="4663440" y="1737360"/>
+            <a:ext cx="1920240" cy="502920"/>
           </a:xfrm>
           <a:prstGeom prst="roundRect">
             <a:avLst>
-              <a:gd name="adj" fmla="val 6154"/>
+              <a:gd name="adj" fmla="val 18182"/>
             </a:avLst>
           </a:prstGeom>
           <a:solidFill>
@@ -4922,25 +5617,18 @@
             </a:solidFill>
             <a:prstDash val="solid"/>
           </a:ln>
-          <a:effectLst>
-            <a:outerShdw sx="100000" sy="100000" kx="0" ky="0" algn="bl" rotWithShape="0" blurRad="76200" dist="25400" dir="5400000">
-              <a:srgbClr val="000000">
-                <a:alpha val="12000"/>
-              </a:srgbClr>
-            </a:outerShdw>
-          </a:effectLst>
-        </p:spPr>
-      </p:sp>
-      <p:sp>
-        <p:nvSpPr>
-          <p:cNvPr id="18" name="part 3 circle"/>
+        </p:spPr>
+      </p:sp>
+      <p:sp>
+        <p:nvSpPr>
+          <p:cNvPr id="14" name="PostgreSQL circle"/>
           <p:cNvSpPr/>
           <p:nvPr/>
         </p:nvSpPr>
         <p:spPr>
           <a:xfrm>
-            <a:off x="5326380" y="1554480"/>
-            <a:ext cx="640080" cy="640080"/>
+            <a:off x="4754880" y="1810512"/>
+            <a:ext cx="356616" cy="356616"/>
           </a:xfrm>
           <a:prstGeom prst="ellipse">
             <a:avLst/>
@@ -4958,7 +5646,7 @@
       </p:sp>
       <p:pic>
         <p:nvPicPr>
-          <p:cNvPr id="19" name="part 3 icon" descr="part 3">    </p:cNvPr>
+          <p:cNvPr id="15" name="PostgreSQL icon" descr="PostgreSQL">    </p:cNvPr>
           <p:cNvPicPr>
             <a:picLocks noChangeAspect="1"/>
           </p:cNvPicPr>
@@ -4972,8 +5660,8 @@
         </p:blipFill>
         <p:spPr>
           <a:xfrm>
-            <a:off x="5499202" y="1727302"/>
-            <a:ext cx="294437" cy="294437"/>
+            <a:off x="4851166" y="1906798"/>
+            <a:ext cx="164043" cy="164043"/>
           </a:xfrm>
           <a:prstGeom prst="rect">
             <a:avLst/>
@@ -4982,14 +5670,14 @@
       </p:pic>
       <p:sp>
         <p:nvSpPr>
-          <p:cNvPr id="20" name="part 3 name"/>
+          <p:cNvPr id="16" name="PostgreSQL name"/>
           <p:cNvSpPr txBox="1"/>
           <p:nvPr/>
         </p:nvSpPr>
         <p:spPr>
           <a:xfrm>
-            <a:off x="4846320" y="2286000"/>
-            <a:ext cx="1600200" cy="365760"/>
+            <a:off x="5193792" y="1737360"/>
+            <a:ext cx="1325880" cy="502920"/>
           </a:xfrm>
           <a:prstGeom prst="rect">
             <a:avLst/>
@@ -5001,52 +5689,16 @@
           <a:bodyPr wrap="square" lIns="0" tIns="0" rIns="0" bIns="0" rtlCol="0" anchor="ctr"/>
           <a:lstStyle/>
           <a:p>
-            <a:pPr algn="ctr" indent="0" marL="0">
+            <a:pPr indent="0" marL="0">
               <a:buNone/>
             </a:pPr>
             <a:r>
-              <a:rPr lang="en-US" sz="1800" b="1" dirty="0">
+              <a:rPr lang="en-US" sz="1400" b="1" dirty="0">
                 <a:solidFill>
                   <a:schemeClr val="tx2"/>
                 </a:solidFill>
               </a:rPr>
-              <a:t>The brain</a:t>
-            </a:r>
-            <a:endParaRPr lang="en-US" sz="1800" dirty="0"/>
-          </a:p>
-        </p:txBody>
-      </p:sp>
-      <p:sp>
-        <p:nvSpPr>
-          <p:cNvPr id="21" name="part 3 role"/>
-          <p:cNvSpPr txBox="1"/>
-          <p:nvPr/>
-        </p:nvSpPr>
-        <p:spPr>
-          <a:xfrm>
-            <a:off x="4892040" y="2670048"/>
-            <a:ext cx="1508760" cy="640080"/>
-          </a:xfrm>
-          <a:prstGeom prst="rect">
-            <a:avLst/>
-          </a:prstGeom>
-          <a:noFill/>
-          <a:ln/>
-        </p:spPr>
-        <p:txBody>
-          <a:bodyPr wrap="square" lIns="0" tIns="0" rIns="0" bIns="0" rtlCol="0" anchor="t"/>
-          <a:lstStyle/>
-          <a:p>
-            <a:pPr algn="ctr" indent="0" marL="0">
-              <a:buNone/>
-            </a:pPr>
-            <a:r>
-              <a:rPr lang="en-US" sz="1400" dirty="0">
-                <a:solidFill>
-                  <a:schemeClr val="tx1"/>
-                </a:solidFill>
-              </a:rPr>
-              <a:t>Rules for stock, totals and orders</a:t>
+              <a:t>PostgreSQL</a:t>
             </a:r>
             <a:endParaRPr lang="en-US" sz="1400" dirty="0"/>
           </a:p>
@@ -5054,79 +5706,18 @@
       </p:sp>
       <p:sp>
         <p:nvSpPr>
-          <p:cNvPr id="22" name="part 3 tech"/>
-          <p:cNvSpPr txBox="1"/>
-          <p:nvPr/>
-        </p:nvSpPr>
-        <p:spPr>
-          <a:xfrm>
-            <a:off x="4846320" y="3337560"/>
-            <a:ext cx="1600200" cy="274320"/>
-          </a:xfrm>
-          <a:prstGeom prst="rect">
-            <a:avLst/>
-          </a:prstGeom>
-          <a:noFill/>
-          <a:ln/>
-        </p:spPr>
-        <p:txBody>
-          <a:bodyPr wrap="square" lIns="0" tIns="0" rIns="0" bIns="0" rtlCol="0" anchor="ctr"/>
-          <a:lstStyle/>
-          <a:p>
-            <a:pPr algn="ctr" indent="0" marL="0">
-              <a:buNone/>
-            </a:pPr>
-            <a:r>
-              <a:rPr lang="en-US" sz="1200" b="1" dirty="0">
-                <a:solidFill>
-                  <a:schemeClr val="accent1"/>
-                </a:solidFill>
-              </a:rPr>
-              <a:t>FastAPI</a:t>
-            </a:r>
-            <a:endParaRPr lang="en-US" sz="1200" dirty="0"/>
-          </a:p>
-        </p:txBody>
-      </p:sp>
-      <p:sp>
-        <p:nvSpPr>
-          <p:cNvPr id="23" name="arrow 3"/>
+          <p:cNvPr id="17" name="Nginx chip"/>
           <p:cNvSpPr/>
           <p:nvPr/>
         </p:nvSpPr>
         <p:spPr>
           <a:xfrm>
-            <a:off x="6601968" y="2395728"/>
-            <a:ext cx="237744" cy="274320"/>
-          </a:xfrm>
-          <a:prstGeom prst="rightArrow">
-            <a:avLst/>
-          </a:prstGeom>
-          <a:solidFill>
-            <a:schemeClr val="accent6"/>
-          </a:solidFill>
-          <a:ln w="12700">
-            <a:solidFill>
-              <a:schemeClr val="accent6"/>
-            </a:solidFill>
-            <a:prstDash val="solid"/>
-          </a:ln>
-        </p:spPr>
-      </p:sp>
-      <p:sp>
-        <p:nvSpPr>
-          <p:cNvPr id="24" name="part 4 card"/>
-          <p:cNvSpPr/>
-          <p:nvPr/>
-        </p:nvSpPr>
-        <p:spPr>
-          <a:xfrm>
-            <a:off x="6903720" y="1371600"/>
-            <a:ext cx="1783080" cy="2331720"/>
+            <a:off x="6766560" y="1737360"/>
+            <a:ext cx="1920240" cy="502920"/>
           </a:xfrm>
           <a:prstGeom prst="roundRect">
             <a:avLst>
-              <a:gd name="adj" fmla="val 6154"/>
+              <a:gd name="adj" fmla="val 18182"/>
             </a:avLst>
           </a:prstGeom>
           <a:solidFill>
@@ -5138,25 +5729,18 @@
             </a:solidFill>
             <a:prstDash val="solid"/>
           </a:ln>
-          <a:effectLst>
-            <a:outerShdw sx="100000" sy="100000" kx="0" ky="0" algn="bl" rotWithShape="0" blurRad="76200" dist="25400" dir="5400000">
-              <a:srgbClr val="000000">
-                <a:alpha val="12000"/>
-              </a:srgbClr>
-            </a:outerShdw>
-          </a:effectLst>
-        </p:spPr>
-      </p:sp>
-      <p:sp>
-        <p:nvSpPr>
-          <p:cNvPr id="25" name="part 4 circle"/>
+        </p:spPr>
+      </p:sp>
+      <p:sp>
+        <p:nvSpPr>
+          <p:cNvPr id="18" name="Nginx circle"/>
           <p:cNvSpPr/>
           <p:nvPr/>
         </p:nvSpPr>
         <p:spPr>
           <a:xfrm>
-            <a:off x="7475220" y="1554480"/>
-            <a:ext cx="640080" cy="640080"/>
+            <a:off x="6858000" y="1810512"/>
+            <a:ext cx="356616" cy="356616"/>
           </a:xfrm>
           <a:prstGeom prst="ellipse">
             <a:avLst/>
@@ -5174,7 +5758,7 @@
       </p:sp>
       <p:pic>
         <p:nvPicPr>
-          <p:cNvPr id="26" name="part 4 icon" descr="part 4">    </p:cNvPr>
+          <p:cNvPr id="19" name="Nginx icon" descr="Nginx">    </p:cNvPr>
           <p:cNvPicPr>
             <a:picLocks noChangeAspect="1"/>
           </p:cNvPicPr>
@@ -5188,8 +5772,8 @@
         </p:blipFill>
         <p:spPr>
           <a:xfrm>
-            <a:off x="7648042" y="1727302"/>
-            <a:ext cx="294437" cy="294437"/>
+            <a:off x="6954286" y="1906798"/>
+            <a:ext cx="164043" cy="164043"/>
           </a:xfrm>
           <a:prstGeom prst="rect">
             <a:avLst/>
@@ -5198,14 +5782,14 @@
       </p:pic>
       <p:sp>
         <p:nvSpPr>
-          <p:cNvPr id="27" name="part 4 name"/>
+          <p:cNvPr id="20" name="Nginx name"/>
           <p:cNvSpPr txBox="1"/>
           <p:nvPr/>
         </p:nvSpPr>
         <p:spPr>
           <a:xfrm>
-            <a:off x="6995160" y="2286000"/>
-            <a:ext cx="1600200" cy="365760"/>
+            <a:off x="7296912" y="1737360"/>
+            <a:ext cx="1325880" cy="502920"/>
           </a:xfrm>
           <a:prstGeom prst="rect">
             <a:avLst/>
@@ -5217,31 +5801,31 @@
           <a:bodyPr wrap="square" lIns="0" tIns="0" rIns="0" bIns="0" rtlCol="0" anchor="ctr"/>
           <a:lstStyle/>
           <a:p>
-            <a:pPr algn="ctr" indent="0" marL="0">
+            <a:pPr indent="0" marL="0">
               <a:buNone/>
             </a:pPr>
             <a:r>
-              <a:rPr lang="en-US" sz="1800" b="1" dirty="0">
+              <a:rPr lang="en-US" sz="1400" b="1" dirty="0">
                 <a:solidFill>
                   <a:schemeClr val="tx2"/>
                 </a:solidFill>
               </a:rPr>
-              <a:t>The memory</a:t>
-            </a:r>
-            <a:endParaRPr lang="en-US" sz="1800" dirty="0"/>
-          </a:p>
-        </p:txBody>
-      </p:sp>
-      <p:sp>
-        <p:nvSpPr>
-          <p:cNvPr id="28" name="part 4 role"/>
+              <a:t>Nginx</a:t>
+            </a:r>
+            <a:endParaRPr lang="en-US" sz="1400" dirty="0"/>
+          </a:p>
+        </p:txBody>
+      </p:sp>
+      <p:sp>
+        <p:nvSpPr>
+          <p:cNvPr id="21" name="Delivery label"/>
           <p:cNvSpPr txBox="1"/>
           <p:nvPr/>
         </p:nvSpPr>
         <p:spPr>
           <a:xfrm>
-            <a:off x="7040880" y="2670048"/>
-            <a:ext cx="1508760" cy="640080"/>
+            <a:off x="457200" y="2560320"/>
+            <a:ext cx="2743200" cy="320040"/>
           </a:xfrm>
           <a:prstGeom prst="rect">
             <a:avLst/>
@@ -5250,34 +5834,34 @@
           <a:ln/>
         </p:spPr>
         <p:txBody>
-          <a:bodyPr wrap="square" lIns="0" tIns="0" rIns="0" bIns="0" rtlCol="0" anchor="t"/>
-          <a:lstStyle/>
-          <a:p>
-            <a:pPr algn="ctr" indent="0" marL="0">
+          <a:bodyPr wrap="square" lIns="0" tIns="0" rIns="0" bIns="0" rtlCol="0" anchor="ctr"/>
+          <a:lstStyle/>
+          <a:p>
+            <a:pPr indent="0" marL="0">
               <a:buNone/>
             </a:pPr>
             <a:r>
-              <a:rPr lang="en-US" sz="1400" dirty="0">
-                <a:solidFill>
-                  <a:schemeClr val="tx1"/>
+              <a:rPr lang="en-US" sz="1800" b="1" dirty="0">
+                <a:solidFill>
+                  <a:schemeClr val="tx2"/>
                 </a:solidFill>
               </a:rPr>
-              <a:t>Stores everything safely</a:t>
-            </a:r>
-            <a:endParaRPr lang="en-US" sz="1400" dirty="0"/>
-          </a:p>
-        </p:txBody>
-      </p:sp>
-      <p:sp>
-        <p:nvSpPr>
-          <p:cNvPr id="29" name="part 4 tech"/>
+              <a:t>Delivery</a:t>
+            </a:r>
+            <a:endParaRPr lang="en-US" sz="1800" dirty="0"/>
+          </a:p>
+        </p:txBody>
+      </p:sp>
+      <p:sp>
+        <p:nvSpPr>
+          <p:cNvPr id="22" name="Delivery sub"/>
           <p:cNvSpPr txBox="1"/>
           <p:nvPr/>
         </p:nvSpPr>
         <p:spPr>
           <a:xfrm>
-            <a:off x="6995160" y="3337560"/>
-            <a:ext cx="1600200" cy="274320"/>
+            <a:off x="2011680" y="2560320"/>
+            <a:ext cx="5486400" cy="320040"/>
           </a:xfrm>
           <a:prstGeom prst="rect">
             <a:avLst/>
@@ -5289,31 +5873,107 @@
           <a:bodyPr wrap="square" lIns="0" tIns="0" rIns="0" bIns="0" rtlCol="0" anchor="ctr"/>
           <a:lstStyle/>
           <a:p>
-            <a:pPr algn="ctr" indent="0" marL="0">
+            <a:pPr indent="0" marL="0">
               <a:buNone/>
             </a:pPr>
             <a:r>
-              <a:rPr lang="en-US" sz="1200" b="1" dirty="0">
-                <a:solidFill>
-                  <a:schemeClr val="accent1"/>
+              <a:rPr lang="en-US" sz="1400" dirty="0">
+                <a:solidFill>
+                  <a:schemeClr val="accent6"/>
                 </a:solidFill>
               </a:rPr>
-              <a:t>PostgreSQL</a:t>
-            </a:r>
-            <a:endParaRPr lang="en-US" sz="1200" dirty="0"/>
-          </a:p>
-        </p:txBody>
-      </p:sp>
-      <p:sp>
-        <p:nvSpPr>
-          <p:cNvPr id="30" name="containers note"/>
+              <a:t>Getting it live and keeping it healthy</a:t>
+            </a:r>
+            <a:endParaRPr lang="en-US" sz="1400" dirty="0"/>
+          </a:p>
+        </p:txBody>
+      </p:sp>
+      <p:sp>
+        <p:nvSpPr>
+          <p:cNvPr id="23" name="Docker chip"/>
+          <p:cNvSpPr/>
+          <p:nvPr/>
+        </p:nvSpPr>
+        <p:spPr>
+          <a:xfrm>
+            <a:off x="457200" y="3017520"/>
+            <a:ext cx="1920240" cy="502920"/>
+          </a:xfrm>
+          <a:prstGeom prst="roundRect">
+            <a:avLst>
+              <a:gd name="adj" fmla="val 18182"/>
+            </a:avLst>
+          </a:prstGeom>
+          <a:solidFill>
+            <a:schemeClr val="bg2"/>
+          </a:solidFill>
+          <a:ln w="12700">
+            <a:solidFill>
+              <a:schemeClr val="bg2"/>
+            </a:solidFill>
+            <a:prstDash val="solid"/>
+          </a:ln>
+        </p:spPr>
+      </p:sp>
+      <p:sp>
+        <p:nvSpPr>
+          <p:cNvPr id="24" name="Docker circle"/>
+          <p:cNvSpPr/>
+          <p:nvPr/>
+        </p:nvSpPr>
+        <p:spPr>
+          <a:xfrm>
+            <a:off x="548640" y="3090672"/>
+            <a:ext cx="356616" cy="356616"/>
+          </a:xfrm>
+          <a:prstGeom prst="ellipse">
+            <a:avLst/>
+          </a:prstGeom>
+          <a:solidFill>
+            <a:schemeClr val="accent1"/>
+          </a:solidFill>
+          <a:ln w="12700">
+            <a:solidFill>
+              <a:schemeClr val="accent1"/>
+            </a:solidFill>
+            <a:prstDash val="solid"/>
+          </a:ln>
+        </p:spPr>
+      </p:sp>
+      <p:pic>
+        <p:nvPicPr>
+          <p:cNvPr id="25" name="Docker icon" descr="Docker">    </p:cNvPr>
+          <p:cNvPicPr>
+            <a:picLocks noChangeAspect="1"/>
+          </p:cNvPicPr>
+          <p:nvPr/>
+        </p:nvPicPr>
+        <p:blipFill>
+          <a:blip r:embed="rId5"/>
+          <a:stretch>
+            <a:fillRect/>
+          </a:stretch>
+        </p:blipFill>
+        <p:spPr>
+          <a:xfrm>
+            <a:off x="644926" y="3186958"/>
+            <a:ext cx="164043" cy="164043"/>
+          </a:xfrm>
+          <a:prstGeom prst="rect">
+            <a:avLst/>
+          </a:prstGeom>
+        </p:spPr>
+      </p:pic>
+      <p:sp>
+        <p:nvSpPr>
+          <p:cNvPr id="26" name="Docker name"/>
           <p:cNvSpPr txBox="1"/>
           <p:nvPr/>
         </p:nvSpPr>
         <p:spPr>
           <a:xfrm>
-            <a:off x="457200" y="3977640"/>
-            <a:ext cx="8229600" cy="548640"/>
+            <a:off x="987552" y="3017520"/>
+            <a:ext cx="1325880" cy="502920"/>
           </a:xfrm>
           <a:prstGeom prst="rect">
             <a:avLst/>
@@ -5329,14 +5989,798 @@
               <a:buNone/>
             </a:pPr>
             <a:r>
-              <a:rPr lang="en-US" sz="1600" dirty="0">
-                <a:solidFill>
-                  <a:schemeClr val="tx1"/>
+              <a:rPr lang="en-US" sz="1400" b="1" dirty="0">
+                <a:solidFill>
+                  <a:schemeClr val="tx2"/>
                 </a:solidFill>
               </a:rPr>
-              <a:t>Each part lives in its own container, so any one of them can be changed or replaced without touching the others.</a:t>
-            </a:r>
-            <a:endParaRPr lang="en-US" sz="1600" dirty="0"/>
+              <a:t>Docker</a:t>
+            </a:r>
+            <a:endParaRPr lang="en-US" sz="1400" dirty="0"/>
+          </a:p>
+        </p:txBody>
+      </p:sp>
+      <p:sp>
+        <p:nvSpPr>
+          <p:cNvPr id="27" name="GitHub Actions chip"/>
+          <p:cNvSpPr/>
+          <p:nvPr/>
+        </p:nvSpPr>
+        <p:spPr>
+          <a:xfrm>
+            <a:off x="2560320" y="3017520"/>
+            <a:ext cx="1920240" cy="502920"/>
+          </a:xfrm>
+          <a:prstGeom prst="roundRect">
+            <a:avLst>
+              <a:gd name="adj" fmla="val 18182"/>
+            </a:avLst>
+          </a:prstGeom>
+          <a:solidFill>
+            <a:schemeClr val="bg2"/>
+          </a:solidFill>
+          <a:ln w="12700">
+            <a:solidFill>
+              <a:schemeClr val="bg2"/>
+            </a:solidFill>
+            <a:prstDash val="solid"/>
+          </a:ln>
+        </p:spPr>
+      </p:sp>
+      <p:sp>
+        <p:nvSpPr>
+          <p:cNvPr id="28" name="GitHub Actions circle"/>
+          <p:cNvSpPr/>
+          <p:nvPr/>
+        </p:nvSpPr>
+        <p:spPr>
+          <a:xfrm>
+            <a:off x="2651760" y="3090672"/>
+            <a:ext cx="356616" cy="356616"/>
+          </a:xfrm>
+          <a:prstGeom prst="ellipse">
+            <a:avLst/>
+          </a:prstGeom>
+          <a:solidFill>
+            <a:schemeClr val="accent1"/>
+          </a:solidFill>
+          <a:ln w="12700">
+            <a:solidFill>
+              <a:schemeClr val="accent1"/>
+            </a:solidFill>
+            <a:prstDash val="solid"/>
+          </a:ln>
+        </p:spPr>
+      </p:sp>
+      <p:pic>
+        <p:nvPicPr>
+          <p:cNvPr id="29" name="GitHub Actions icon" descr="GitHub Actions">    </p:cNvPr>
+          <p:cNvPicPr>
+            <a:picLocks noChangeAspect="1"/>
+          </p:cNvPicPr>
+          <p:nvPr/>
+        </p:nvPicPr>
+        <p:blipFill>
+          <a:blip r:embed="rId6"/>
+          <a:stretch>
+            <a:fillRect/>
+          </a:stretch>
+        </p:blipFill>
+        <p:spPr>
+          <a:xfrm>
+            <a:off x="2748046" y="3186958"/>
+            <a:ext cx="164043" cy="164043"/>
+          </a:xfrm>
+          <a:prstGeom prst="rect">
+            <a:avLst/>
+          </a:prstGeom>
+        </p:spPr>
+      </p:pic>
+      <p:sp>
+        <p:nvSpPr>
+          <p:cNvPr id="30" name="GitHub Actions name"/>
+          <p:cNvSpPr txBox="1"/>
+          <p:nvPr/>
+        </p:nvSpPr>
+        <p:spPr>
+          <a:xfrm>
+            <a:off x="3090672" y="3017520"/>
+            <a:ext cx="1325880" cy="502920"/>
+          </a:xfrm>
+          <a:prstGeom prst="rect">
+            <a:avLst/>
+          </a:prstGeom>
+          <a:noFill/>
+          <a:ln/>
+        </p:spPr>
+        <p:txBody>
+          <a:bodyPr wrap="square" lIns="0" tIns="0" rIns="0" bIns="0" rtlCol="0" anchor="ctr"/>
+          <a:lstStyle/>
+          <a:p>
+            <a:pPr indent="0" marL="0">
+              <a:buNone/>
+            </a:pPr>
+            <a:r>
+              <a:rPr lang="en-US" sz="1400" b="1" dirty="0">
+                <a:solidFill>
+                  <a:schemeClr val="tx2"/>
+                </a:solidFill>
+              </a:rPr>
+              <a:t>GitHub Actions</a:t>
+            </a:r>
+            <a:endParaRPr lang="en-US" sz="1400" dirty="0"/>
+          </a:p>
+        </p:txBody>
+      </p:sp>
+      <p:sp>
+        <p:nvSpPr>
+          <p:cNvPr id="31" name="Trivy chip"/>
+          <p:cNvSpPr/>
+          <p:nvPr/>
+        </p:nvSpPr>
+        <p:spPr>
+          <a:xfrm>
+            <a:off x="4663440" y="3017520"/>
+            <a:ext cx="1920240" cy="502920"/>
+          </a:xfrm>
+          <a:prstGeom prst="roundRect">
+            <a:avLst>
+              <a:gd name="adj" fmla="val 18182"/>
+            </a:avLst>
+          </a:prstGeom>
+          <a:solidFill>
+            <a:schemeClr val="bg2"/>
+          </a:solidFill>
+          <a:ln w="12700">
+            <a:solidFill>
+              <a:schemeClr val="bg2"/>
+            </a:solidFill>
+            <a:prstDash val="solid"/>
+          </a:ln>
+        </p:spPr>
+      </p:sp>
+      <p:sp>
+        <p:nvSpPr>
+          <p:cNvPr id="32" name="Trivy circle"/>
+          <p:cNvSpPr/>
+          <p:nvPr/>
+        </p:nvSpPr>
+        <p:spPr>
+          <a:xfrm>
+            <a:off x="4754880" y="3090672"/>
+            <a:ext cx="356616" cy="356616"/>
+          </a:xfrm>
+          <a:prstGeom prst="ellipse">
+            <a:avLst/>
+          </a:prstGeom>
+          <a:solidFill>
+            <a:schemeClr val="accent1"/>
+          </a:solidFill>
+          <a:ln w="12700">
+            <a:solidFill>
+              <a:schemeClr val="accent1"/>
+            </a:solidFill>
+            <a:prstDash val="solid"/>
+          </a:ln>
+        </p:spPr>
+      </p:sp>
+      <p:pic>
+        <p:nvPicPr>
+          <p:cNvPr id="33" name="Trivy icon" descr="Trivy">    </p:cNvPr>
+          <p:cNvPicPr>
+            <a:picLocks noChangeAspect="1"/>
+          </p:cNvPicPr>
+          <p:nvPr/>
+        </p:nvPicPr>
+        <p:blipFill>
+          <a:blip r:embed="rId7"/>
+          <a:stretch>
+            <a:fillRect/>
+          </a:stretch>
+        </p:blipFill>
+        <p:spPr>
+          <a:xfrm>
+            <a:off x="4851166" y="3186958"/>
+            <a:ext cx="164043" cy="164043"/>
+          </a:xfrm>
+          <a:prstGeom prst="rect">
+            <a:avLst/>
+          </a:prstGeom>
+        </p:spPr>
+      </p:pic>
+      <p:sp>
+        <p:nvSpPr>
+          <p:cNvPr id="34" name="Trivy name"/>
+          <p:cNvSpPr txBox="1"/>
+          <p:nvPr/>
+        </p:nvSpPr>
+        <p:spPr>
+          <a:xfrm>
+            <a:off x="5193792" y="3017520"/>
+            <a:ext cx="1325880" cy="502920"/>
+          </a:xfrm>
+          <a:prstGeom prst="rect">
+            <a:avLst/>
+          </a:prstGeom>
+          <a:noFill/>
+          <a:ln/>
+        </p:spPr>
+        <p:txBody>
+          <a:bodyPr wrap="square" lIns="0" tIns="0" rIns="0" bIns="0" rtlCol="0" anchor="ctr"/>
+          <a:lstStyle/>
+          <a:p>
+            <a:pPr indent="0" marL="0">
+              <a:buNone/>
+            </a:pPr>
+            <a:r>
+              <a:rPr lang="en-US" sz="1400" b="1" dirty="0">
+                <a:solidFill>
+                  <a:schemeClr val="tx2"/>
+                </a:solidFill>
+              </a:rPr>
+              <a:t>Trivy</a:t>
+            </a:r>
+            <a:endParaRPr lang="en-US" sz="1400" dirty="0"/>
+          </a:p>
+        </p:txBody>
+      </p:sp>
+      <p:sp>
+        <p:nvSpPr>
+          <p:cNvPr id="35" name="Terraform chip"/>
+          <p:cNvSpPr/>
+          <p:nvPr/>
+        </p:nvSpPr>
+        <p:spPr>
+          <a:xfrm>
+            <a:off x="6766560" y="3017520"/>
+            <a:ext cx="1920240" cy="502920"/>
+          </a:xfrm>
+          <a:prstGeom prst="roundRect">
+            <a:avLst>
+              <a:gd name="adj" fmla="val 18182"/>
+            </a:avLst>
+          </a:prstGeom>
+          <a:solidFill>
+            <a:schemeClr val="bg2"/>
+          </a:solidFill>
+          <a:ln w="12700">
+            <a:solidFill>
+              <a:schemeClr val="bg2"/>
+            </a:solidFill>
+            <a:prstDash val="solid"/>
+          </a:ln>
+        </p:spPr>
+      </p:sp>
+      <p:sp>
+        <p:nvSpPr>
+          <p:cNvPr id="36" name="Terraform circle"/>
+          <p:cNvSpPr/>
+          <p:nvPr/>
+        </p:nvSpPr>
+        <p:spPr>
+          <a:xfrm>
+            <a:off x="6858000" y="3090672"/>
+            <a:ext cx="356616" cy="356616"/>
+          </a:xfrm>
+          <a:prstGeom prst="ellipse">
+            <a:avLst/>
+          </a:prstGeom>
+          <a:solidFill>
+            <a:schemeClr val="accent1"/>
+          </a:solidFill>
+          <a:ln w="12700">
+            <a:solidFill>
+              <a:schemeClr val="accent1"/>
+            </a:solidFill>
+            <a:prstDash val="solid"/>
+          </a:ln>
+        </p:spPr>
+      </p:sp>
+      <p:pic>
+        <p:nvPicPr>
+          <p:cNvPr id="37" name="Terraform icon" descr="Terraform">    </p:cNvPr>
+          <p:cNvPicPr>
+            <a:picLocks noChangeAspect="1"/>
+          </p:cNvPicPr>
+          <p:nvPr/>
+        </p:nvPicPr>
+        <p:blipFill>
+          <a:blip r:embed="rId8"/>
+          <a:stretch>
+            <a:fillRect/>
+          </a:stretch>
+        </p:blipFill>
+        <p:spPr>
+          <a:xfrm>
+            <a:off x="6954286" y="3186958"/>
+            <a:ext cx="164043" cy="164043"/>
+          </a:xfrm>
+          <a:prstGeom prst="rect">
+            <a:avLst/>
+          </a:prstGeom>
+        </p:spPr>
+      </p:pic>
+      <p:sp>
+        <p:nvSpPr>
+          <p:cNvPr id="38" name="Terraform name"/>
+          <p:cNvSpPr txBox="1"/>
+          <p:nvPr/>
+        </p:nvSpPr>
+        <p:spPr>
+          <a:xfrm>
+            <a:off x="7296912" y="3017520"/>
+            <a:ext cx="1325880" cy="502920"/>
+          </a:xfrm>
+          <a:prstGeom prst="rect">
+            <a:avLst/>
+          </a:prstGeom>
+          <a:noFill/>
+          <a:ln/>
+        </p:spPr>
+        <p:txBody>
+          <a:bodyPr wrap="square" lIns="0" tIns="0" rIns="0" bIns="0" rtlCol="0" anchor="ctr"/>
+          <a:lstStyle/>
+          <a:p>
+            <a:pPr indent="0" marL="0">
+              <a:buNone/>
+            </a:pPr>
+            <a:r>
+              <a:rPr lang="en-US" sz="1400" b="1" dirty="0">
+                <a:solidFill>
+                  <a:schemeClr val="tx2"/>
+                </a:solidFill>
+              </a:rPr>
+              <a:t>Terraform</a:t>
+            </a:r>
+            <a:endParaRPr lang="en-US" sz="1400" dirty="0"/>
+          </a:p>
+        </p:txBody>
+      </p:sp>
+      <p:sp>
+        <p:nvSpPr>
+          <p:cNvPr id="39" name="Kubernetes chip"/>
+          <p:cNvSpPr/>
+          <p:nvPr/>
+        </p:nvSpPr>
+        <p:spPr>
+          <a:xfrm>
+            <a:off x="457200" y="3657600"/>
+            <a:ext cx="1920240" cy="502920"/>
+          </a:xfrm>
+          <a:prstGeom prst="roundRect">
+            <a:avLst>
+              <a:gd name="adj" fmla="val 18182"/>
+            </a:avLst>
+          </a:prstGeom>
+          <a:solidFill>
+            <a:schemeClr val="bg2"/>
+          </a:solidFill>
+          <a:ln w="12700">
+            <a:solidFill>
+              <a:schemeClr val="bg2"/>
+            </a:solidFill>
+            <a:prstDash val="solid"/>
+          </a:ln>
+        </p:spPr>
+      </p:sp>
+      <p:sp>
+        <p:nvSpPr>
+          <p:cNvPr id="40" name="Kubernetes circle"/>
+          <p:cNvSpPr/>
+          <p:nvPr/>
+        </p:nvSpPr>
+        <p:spPr>
+          <a:xfrm>
+            <a:off x="548640" y="3730752"/>
+            <a:ext cx="356616" cy="356616"/>
+          </a:xfrm>
+          <a:prstGeom prst="ellipse">
+            <a:avLst/>
+          </a:prstGeom>
+          <a:solidFill>
+            <a:schemeClr val="accent1"/>
+          </a:solidFill>
+          <a:ln w="12700">
+            <a:solidFill>
+              <a:schemeClr val="accent1"/>
+            </a:solidFill>
+            <a:prstDash val="solid"/>
+          </a:ln>
+        </p:spPr>
+      </p:sp>
+      <p:pic>
+        <p:nvPicPr>
+          <p:cNvPr id="41" name="Kubernetes icon" descr="Kubernetes">    </p:cNvPr>
+          <p:cNvPicPr>
+            <a:picLocks noChangeAspect="1"/>
+          </p:cNvPicPr>
+          <p:nvPr/>
+        </p:nvPicPr>
+        <p:blipFill>
+          <a:blip r:embed="rId9"/>
+          <a:stretch>
+            <a:fillRect/>
+          </a:stretch>
+        </p:blipFill>
+        <p:spPr>
+          <a:xfrm>
+            <a:off x="644926" y="3827038"/>
+            <a:ext cx="164043" cy="164043"/>
+          </a:xfrm>
+          <a:prstGeom prst="rect">
+            <a:avLst/>
+          </a:prstGeom>
+        </p:spPr>
+      </p:pic>
+      <p:sp>
+        <p:nvSpPr>
+          <p:cNvPr id="42" name="Kubernetes name"/>
+          <p:cNvSpPr txBox="1"/>
+          <p:nvPr/>
+        </p:nvSpPr>
+        <p:spPr>
+          <a:xfrm>
+            <a:off x="987552" y="3657600"/>
+            <a:ext cx="1325880" cy="502920"/>
+          </a:xfrm>
+          <a:prstGeom prst="rect">
+            <a:avLst/>
+          </a:prstGeom>
+          <a:noFill/>
+          <a:ln/>
+        </p:spPr>
+        <p:txBody>
+          <a:bodyPr wrap="square" lIns="0" tIns="0" rIns="0" bIns="0" rtlCol="0" anchor="ctr"/>
+          <a:lstStyle/>
+          <a:p>
+            <a:pPr indent="0" marL="0">
+              <a:buNone/>
+            </a:pPr>
+            <a:r>
+              <a:rPr lang="en-US" sz="1400" b="1" dirty="0">
+                <a:solidFill>
+                  <a:schemeClr val="tx2"/>
+                </a:solidFill>
+              </a:rPr>
+              <a:t>Kubernetes</a:t>
+            </a:r>
+            <a:endParaRPr lang="en-US" sz="1400" dirty="0"/>
+          </a:p>
+        </p:txBody>
+      </p:sp>
+      <p:sp>
+        <p:nvSpPr>
+          <p:cNvPr id="43" name="Helm chip"/>
+          <p:cNvSpPr/>
+          <p:nvPr/>
+        </p:nvSpPr>
+        <p:spPr>
+          <a:xfrm>
+            <a:off x="2560320" y="3657600"/>
+            <a:ext cx="1920240" cy="502920"/>
+          </a:xfrm>
+          <a:prstGeom prst="roundRect">
+            <a:avLst>
+              <a:gd name="adj" fmla="val 18182"/>
+            </a:avLst>
+          </a:prstGeom>
+          <a:solidFill>
+            <a:schemeClr val="bg2"/>
+          </a:solidFill>
+          <a:ln w="12700">
+            <a:solidFill>
+              <a:schemeClr val="bg2"/>
+            </a:solidFill>
+            <a:prstDash val="solid"/>
+          </a:ln>
+        </p:spPr>
+      </p:sp>
+      <p:sp>
+        <p:nvSpPr>
+          <p:cNvPr id="44" name="Helm circle"/>
+          <p:cNvSpPr/>
+          <p:nvPr/>
+        </p:nvSpPr>
+        <p:spPr>
+          <a:xfrm>
+            <a:off x="2651760" y="3730752"/>
+            <a:ext cx="356616" cy="356616"/>
+          </a:xfrm>
+          <a:prstGeom prst="ellipse">
+            <a:avLst/>
+          </a:prstGeom>
+          <a:solidFill>
+            <a:schemeClr val="accent1"/>
+          </a:solidFill>
+          <a:ln w="12700">
+            <a:solidFill>
+              <a:schemeClr val="accent1"/>
+            </a:solidFill>
+            <a:prstDash val="solid"/>
+          </a:ln>
+        </p:spPr>
+      </p:sp>
+      <p:pic>
+        <p:nvPicPr>
+          <p:cNvPr id="45" name="Helm icon" descr="Helm">    </p:cNvPr>
+          <p:cNvPicPr>
+            <a:picLocks noChangeAspect="1"/>
+          </p:cNvPicPr>
+          <p:nvPr/>
+        </p:nvPicPr>
+        <p:blipFill>
+          <a:blip r:embed="rId10"/>
+          <a:stretch>
+            <a:fillRect/>
+          </a:stretch>
+        </p:blipFill>
+        <p:spPr>
+          <a:xfrm>
+            <a:off x="2748046" y="3827038"/>
+            <a:ext cx="164043" cy="164043"/>
+          </a:xfrm>
+          <a:prstGeom prst="rect">
+            <a:avLst/>
+          </a:prstGeom>
+        </p:spPr>
+      </p:pic>
+      <p:sp>
+        <p:nvSpPr>
+          <p:cNvPr id="46" name="Helm name"/>
+          <p:cNvSpPr txBox="1"/>
+          <p:nvPr/>
+        </p:nvSpPr>
+        <p:spPr>
+          <a:xfrm>
+            <a:off x="3090672" y="3657600"/>
+            <a:ext cx="1325880" cy="502920"/>
+          </a:xfrm>
+          <a:prstGeom prst="rect">
+            <a:avLst/>
+          </a:prstGeom>
+          <a:noFill/>
+          <a:ln/>
+        </p:spPr>
+        <p:txBody>
+          <a:bodyPr wrap="square" lIns="0" tIns="0" rIns="0" bIns="0" rtlCol="0" anchor="ctr"/>
+          <a:lstStyle/>
+          <a:p>
+            <a:pPr indent="0" marL="0">
+              <a:buNone/>
+            </a:pPr>
+            <a:r>
+              <a:rPr lang="en-US" sz="1400" b="1" dirty="0">
+                <a:solidFill>
+                  <a:schemeClr val="tx2"/>
+                </a:solidFill>
+              </a:rPr>
+              <a:t>Helm</a:t>
+            </a:r>
+            <a:endParaRPr lang="en-US" sz="1400" dirty="0"/>
+          </a:p>
+        </p:txBody>
+      </p:sp>
+      <p:sp>
+        <p:nvSpPr>
+          <p:cNvPr id="47" name="Prometheus chip"/>
+          <p:cNvSpPr/>
+          <p:nvPr/>
+        </p:nvSpPr>
+        <p:spPr>
+          <a:xfrm>
+            <a:off x="4663440" y="3657600"/>
+            <a:ext cx="1920240" cy="502920"/>
+          </a:xfrm>
+          <a:prstGeom prst="roundRect">
+            <a:avLst>
+              <a:gd name="adj" fmla="val 18182"/>
+            </a:avLst>
+          </a:prstGeom>
+          <a:solidFill>
+            <a:schemeClr val="bg2"/>
+          </a:solidFill>
+          <a:ln w="12700">
+            <a:solidFill>
+              <a:schemeClr val="bg2"/>
+            </a:solidFill>
+            <a:prstDash val="solid"/>
+          </a:ln>
+        </p:spPr>
+      </p:sp>
+      <p:sp>
+        <p:nvSpPr>
+          <p:cNvPr id="48" name="Prometheus circle"/>
+          <p:cNvSpPr/>
+          <p:nvPr/>
+        </p:nvSpPr>
+        <p:spPr>
+          <a:xfrm>
+            <a:off x="4754880" y="3730752"/>
+            <a:ext cx="356616" cy="356616"/>
+          </a:xfrm>
+          <a:prstGeom prst="ellipse">
+            <a:avLst/>
+          </a:prstGeom>
+          <a:solidFill>
+            <a:schemeClr val="accent1"/>
+          </a:solidFill>
+          <a:ln w="12700">
+            <a:solidFill>
+              <a:schemeClr val="accent1"/>
+            </a:solidFill>
+            <a:prstDash val="solid"/>
+          </a:ln>
+        </p:spPr>
+      </p:sp>
+      <p:pic>
+        <p:nvPicPr>
+          <p:cNvPr id="49" name="Prometheus icon" descr="Prometheus">    </p:cNvPr>
+          <p:cNvPicPr>
+            <a:picLocks noChangeAspect="1"/>
+          </p:cNvPicPr>
+          <p:nvPr/>
+        </p:nvPicPr>
+        <p:blipFill>
+          <a:blip r:embed="rId11"/>
+          <a:stretch>
+            <a:fillRect/>
+          </a:stretch>
+        </p:blipFill>
+        <p:spPr>
+          <a:xfrm>
+            <a:off x="4851166" y="3827038"/>
+            <a:ext cx="164043" cy="164043"/>
+          </a:xfrm>
+          <a:prstGeom prst="rect">
+            <a:avLst/>
+          </a:prstGeom>
+        </p:spPr>
+      </p:pic>
+      <p:sp>
+        <p:nvSpPr>
+          <p:cNvPr id="50" name="Prometheus name"/>
+          <p:cNvSpPr txBox="1"/>
+          <p:nvPr/>
+        </p:nvSpPr>
+        <p:spPr>
+          <a:xfrm>
+            <a:off x="5193792" y="3657600"/>
+            <a:ext cx="1325880" cy="502920"/>
+          </a:xfrm>
+          <a:prstGeom prst="rect">
+            <a:avLst/>
+          </a:prstGeom>
+          <a:noFill/>
+          <a:ln/>
+        </p:spPr>
+        <p:txBody>
+          <a:bodyPr wrap="square" lIns="0" tIns="0" rIns="0" bIns="0" rtlCol="0" anchor="ctr"/>
+          <a:lstStyle/>
+          <a:p>
+            <a:pPr indent="0" marL="0">
+              <a:buNone/>
+            </a:pPr>
+            <a:r>
+              <a:rPr lang="en-US" sz="1400" b="1" dirty="0">
+                <a:solidFill>
+                  <a:schemeClr val="tx2"/>
+                </a:solidFill>
+              </a:rPr>
+              <a:t>Prometheus</a:t>
+            </a:r>
+            <a:endParaRPr lang="en-US" sz="1400" dirty="0"/>
+          </a:p>
+        </p:txBody>
+      </p:sp>
+      <p:sp>
+        <p:nvSpPr>
+          <p:cNvPr id="51" name="Grafana chip"/>
+          <p:cNvSpPr/>
+          <p:nvPr/>
+        </p:nvSpPr>
+        <p:spPr>
+          <a:xfrm>
+            <a:off x="6766560" y="3657600"/>
+            <a:ext cx="1920240" cy="502920"/>
+          </a:xfrm>
+          <a:prstGeom prst="roundRect">
+            <a:avLst>
+              <a:gd name="adj" fmla="val 18182"/>
+            </a:avLst>
+          </a:prstGeom>
+          <a:solidFill>
+            <a:schemeClr val="bg2"/>
+          </a:solidFill>
+          <a:ln w="12700">
+            <a:solidFill>
+              <a:schemeClr val="bg2"/>
+            </a:solidFill>
+            <a:prstDash val="solid"/>
+          </a:ln>
+        </p:spPr>
+      </p:sp>
+      <p:sp>
+        <p:nvSpPr>
+          <p:cNvPr id="52" name="Grafana circle"/>
+          <p:cNvSpPr/>
+          <p:nvPr/>
+        </p:nvSpPr>
+        <p:spPr>
+          <a:xfrm>
+            <a:off x="6858000" y="3730752"/>
+            <a:ext cx="356616" cy="356616"/>
+          </a:xfrm>
+          <a:prstGeom prst="ellipse">
+            <a:avLst/>
+          </a:prstGeom>
+          <a:solidFill>
+            <a:schemeClr val="accent1"/>
+          </a:solidFill>
+          <a:ln w="12700">
+            <a:solidFill>
+              <a:schemeClr val="accent1"/>
+            </a:solidFill>
+            <a:prstDash val="solid"/>
+          </a:ln>
+        </p:spPr>
+      </p:sp>
+      <p:pic>
+        <p:nvPicPr>
+          <p:cNvPr id="53" name="Grafana icon" descr="Grafana">    </p:cNvPr>
+          <p:cNvPicPr>
+            <a:picLocks noChangeAspect="1"/>
+          </p:cNvPicPr>
+          <p:nvPr/>
+        </p:nvPicPr>
+        <p:blipFill>
+          <a:blip r:embed="rId12"/>
+          <a:stretch>
+            <a:fillRect/>
+          </a:stretch>
+        </p:blipFill>
+        <p:spPr>
+          <a:xfrm>
+            <a:off x="6954286" y="3827038"/>
+            <a:ext cx="164043" cy="164043"/>
+          </a:xfrm>
+          <a:prstGeom prst="rect">
+            <a:avLst/>
+          </a:prstGeom>
+        </p:spPr>
+      </p:pic>
+      <p:sp>
+        <p:nvSpPr>
+          <p:cNvPr id="54" name="Grafana name"/>
+          <p:cNvSpPr txBox="1"/>
+          <p:nvPr/>
+        </p:nvSpPr>
+        <p:spPr>
+          <a:xfrm>
+            <a:off x="7296912" y="3657600"/>
+            <a:ext cx="1325880" cy="502920"/>
+          </a:xfrm>
+          <a:prstGeom prst="rect">
+            <a:avLst/>
+          </a:prstGeom>
+          <a:noFill/>
+          <a:ln/>
+        </p:spPr>
+        <p:txBody>
+          <a:bodyPr wrap="square" lIns="0" tIns="0" rIns="0" bIns="0" rtlCol="0" anchor="ctr"/>
+          <a:lstStyle/>
+          <a:p>
+            <a:pPr indent="0" marL="0">
+              <a:buNone/>
+            </a:pPr>
+            <a:r>
+              <a:rPr lang="en-US" sz="1400" b="1" dirty="0">
+                <a:solidFill>
+                  <a:schemeClr val="tx2"/>
+                </a:solidFill>
+              </a:rPr>
+              <a:t>Grafana</a:t>
+            </a:r>
+            <a:endParaRPr lang="en-US" sz="1400" dirty="0"/>
           </a:p>
         </p:txBody>
       </p:sp>
@@ -5442,7 +6886,7 @@
                   <a:schemeClr val="tx2"/>
                 </a:solidFill>
               </a:rPr>
-              <a:t>How we built it, step by step</a:t>
+              <a:t>How the pieces fit together</a:t>
             </a:r>
             <a:endParaRPr lang="en-US" sz="3400" dirty="0"/>
           </a:p>
@@ -5450,18 +6894,18 @@
       </p:sp>
       <p:sp>
         <p:nvSpPr>
-          <p:cNvPr id="3" name="step 1 card"/>
+          <p:cNvPr id="3" name="part 1 card"/>
           <p:cNvSpPr/>
           <p:nvPr/>
         </p:nvSpPr>
         <p:spPr>
           <a:xfrm>
-            <a:off x="457200" y="1280160"/>
-            <a:ext cx="2587752" cy="960120"/>
+            <a:off x="457200" y="1371600"/>
+            <a:ext cx="1783080" cy="2331720"/>
           </a:xfrm>
           <a:prstGeom prst="roundRect">
             <a:avLst>
-              <a:gd name="adj" fmla="val 9524"/>
+              <a:gd name="adj" fmla="val 6154"/>
             </a:avLst>
           </a:prstGeom>
           <a:solidFill>
@@ -5473,18 +6917,25 @@
             </a:solidFill>
             <a:prstDash val="solid"/>
           </a:ln>
-        </p:spPr>
-      </p:sp>
-      <p:sp>
-        <p:nvSpPr>
-          <p:cNvPr id="4" name="step 1 circle"/>
+          <a:effectLst>
+            <a:outerShdw sx="100000" sy="100000" kx="0" ky="0" algn="bl" rotWithShape="0" blurRad="76200" dist="25400" dir="5400000">
+              <a:srgbClr val="000000">
+                <a:alpha val="12000"/>
+              </a:srgbClr>
+            </a:outerShdw>
+          </a:effectLst>
+        </p:spPr>
+      </p:sp>
+      <p:sp>
+        <p:nvSpPr>
+          <p:cNvPr id="4" name="part 1 circle"/>
           <p:cNvSpPr/>
           <p:nvPr/>
         </p:nvSpPr>
         <p:spPr>
           <a:xfrm>
-            <a:off x="594360" y="1485900"/>
-            <a:ext cx="548640" cy="548640"/>
+            <a:off x="1028700" y="1554480"/>
+            <a:ext cx="640080" cy="640080"/>
           </a:xfrm>
           <a:prstGeom prst="ellipse">
             <a:avLst/>
@@ -5502,7 +6953,7 @@
       </p:sp>
       <p:pic>
         <p:nvPicPr>
-          <p:cNvPr id="5" name="step 1 icon" descr="step 1">    </p:cNvPr>
+          <p:cNvPr id="5" name="part 1 icon" descr="part 1">    </p:cNvPr>
           <p:cNvPicPr>
             <a:picLocks noChangeAspect="1"/>
           </p:cNvPicPr>
@@ -5516,8 +6967,8 @@
         </p:blipFill>
         <p:spPr>
           <a:xfrm>
-            <a:off x="742493" y="1634033"/>
-            <a:ext cx="252374" cy="252374"/>
+            <a:off x="1201522" y="1727302"/>
+            <a:ext cx="294437" cy="294437"/>
           </a:xfrm>
           <a:prstGeom prst="rect">
             <a:avLst/>
@@ -5526,14 +6977,14 @@
       </p:pic>
       <p:sp>
         <p:nvSpPr>
-          <p:cNvPr id="6" name="step 1 title"/>
+          <p:cNvPr id="6" name="part 1 name"/>
           <p:cNvSpPr txBox="1"/>
           <p:nvPr/>
         </p:nvSpPr>
         <p:spPr>
           <a:xfrm>
-            <a:off x="1280160" y="1435608"/>
-            <a:ext cx="1673352" cy="329184"/>
+            <a:off x="548640" y="2286000"/>
+            <a:ext cx="1600200" cy="365760"/>
           </a:xfrm>
           <a:prstGeom prst="rect">
             <a:avLst/>
@@ -5545,31 +6996,31 @@
           <a:bodyPr wrap="square" lIns="0" tIns="0" rIns="0" bIns="0" rtlCol="0" anchor="ctr"/>
           <a:lstStyle/>
           <a:p>
-            <a:pPr indent="0" marL="0">
+            <a:pPr algn="ctr" indent="0" marL="0">
               <a:buNone/>
             </a:pPr>
             <a:r>
-              <a:rPr lang="en-US" sz="1600" b="1" dirty="0">
+              <a:rPr lang="en-US" sz="1800" b="1" dirty="0">
                 <a:solidFill>
                   <a:schemeClr val="tx2"/>
                 </a:solidFill>
               </a:rPr>
-              <a:t>Build the app</a:t>
-            </a:r>
-            <a:endParaRPr lang="en-US" sz="1600" dirty="0"/>
-          </a:p>
-        </p:txBody>
-      </p:sp>
-      <p:sp>
-        <p:nvSpPr>
-          <p:cNvPr id="7" name="step 1 text"/>
+              <a:t>What you see</a:t>
+            </a:r>
+            <a:endParaRPr lang="en-US" sz="1800" dirty="0"/>
+          </a:p>
+        </p:txBody>
+      </p:sp>
+      <p:sp>
+        <p:nvSpPr>
+          <p:cNvPr id="7" name="part 1 role"/>
           <p:cNvSpPr txBox="1"/>
           <p:nvPr/>
         </p:nvSpPr>
         <p:spPr>
           <a:xfrm>
-            <a:off x="1280160" y="1764792"/>
-            <a:ext cx="1673352" cy="365760"/>
+            <a:off x="594360" y="2670048"/>
+            <a:ext cx="1508760" cy="594360"/>
           </a:xfrm>
           <a:prstGeom prst="rect">
             <a:avLst/>
@@ -5581,16 +7032,52 @@
           <a:bodyPr wrap="square" lIns="0" tIns="0" rIns="0" bIns="0" rtlCol="0" anchor="t"/>
           <a:lstStyle/>
           <a:p>
-            <a:pPr indent="0" marL="0">
+            <a:pPr algn="ctr" indent="0" marL="0">
               <a:buNone/>
             </a:pPr>
             <a:r>
-              <a:rPr lang="en-US" sz="1200" dirty="0">
+              <a:rPr lang="en-US" sz="1400" dirty="0">
                 <a:solidFill>
                   <a:schemeClr val="tx1"/>
                 </a:solidFill>
               </a:rPr>
-              <a:t>Screen, brain and memory</a:t>
+              <a:t>The web page</a:t>
+            </a:r>
+            <a:endParaRPr lang="en-US" sz="1400" dirty="0"/>
+          </a:p>
+        </p:txBody>
+      </p:sp>
+      <p:sp>
+        <p:nvSpPr>
+          <p:cNvPr id="8" name="part 1 tech"/>
+          <p:cNvSpPr txBox="1"/>
+          <p:nvPr/>
+        </p:nvSpPr>
+        <p:spPr>
+          <a:xfrm>
+            <a:off x="548640" y="3337560"/>
+            <a:ext cx="1600200" cy="274320"/>
+          </a:xfrm>
+          <a:prstGeom prst="rect">
+            <a:avLst/>
+          </a:prstGeom>
+          <a:noFill/>
+          <a:ln/>
+        </p:spPr>
+        <p:txBody>
+          <a:bodyPr wrap="square" lIns="0" tIns="0" rIns="0" bIns="0" rtlCol="0" anchor="ctr"/>
+          <a:lstStyle/>
+          <a:p>
+            <a:pPr algn="ctr" indent="0" marL="0">
+              <a:buNone/>
+            </a:pPr>
+            <a:r>
+              <a:rPr lang="en-US" sz="1200" b="1" dirty="0">
+                <a:solidFill>
+                  <a:schemeClr val="accent1"/>
+                </a:solidFill>
+              </a:rPr>
+              <a:t>React</a:t>
             </a:r>
             <a:endParaRPr lang="en-US" sz="1200" dirty="0"/>
           </a:p>
@@ -5598,18 +7085,43 @@
       </p:sp>
       <p:sp>
         <p:nvSpPr>
-          <p:cNvPr id="8" name="step 2 card"/>
+          <p:cNvPr id="9" name="arrow 1"/>
           <p:cNvSpPr/>
           <p:nvPr/>
         </p:nvSpPr>
         <p:spPr>
           <a:xfrm>
-            <a:off x="3278124" y="1280160"/>
-            <a:ext cx="2587752" cy="960120"/>
+            <a:off x="2304288" y="2395728"/>
+            <a:ext cx="237744" cy="274320"/>
+          </a:xfrm>
+          <a:prstGeom prst="rightArrow">
+            <a:avLst/>
+          </a:prstGeom>
+          <a:solidFill>
+            <a:schemeClr val="accent6"/>
+          </a:solidFill>
+          <a:ln w="12700">
+            <a:solidFill>
+              <a:schemeClr val="accent6"/>
+            </a:solidFill>
+            <a:prstDash val="solid"/>
+          </a:ln>
+        </p:spPr>
+      </p:sp>
+      <p:sp>
+        <p:nvSpPr>
+          <p:cNvPr id="10" name="part 2 card"/>
+          <p:cNvSpPr/>
+          <p:nvPr/>
+        </p:nvSpPr>
+        <p:spPr>
+          <a:xfrm>
+            <a:off x="2606040" y="1371600"/>
+            <a:ext cx="1783080" cy="2331720"/>
           </a:xfrm>
           <a:prstGeom prst="roundRect">
             <a:avLst>
-              <a:gd name="adj" fmla="val 9524"/>
+              <a:gd name="adj" fmla="val 6154"/>
             </a:avLst>
           </a:prstGeom>
           <a:solidFill>
@@ -5621,18 +7133,25 @@
             </a:solidFill>
             <a:prstDash val="solid"/>
           </a:ln>
-        </p:spPr>
-      </p:sp>
-      <p:sp>
-        <p:nvSpPr>
-          <p:cNvPr id="9" name="step 2 circle"/>
+          <a:effectLst>
+            <a:outerShdw sx="100000" sy="100000" kx="0" ky="0" algn="bl" rotWithShape="0" blurRad="76200" dist="25400" dir="5400000">
+              <a:srgbClr val="000000">
+                <a:alpha val="12000"/>
+              </a:srgbClr>
+            </a:outerShdw>
+          </a:effectLst>
+        </p:spPr>
+      </p:sp>
+      <p:sp>
+        <p:nvSpPr>
+          <p:cNvPr id="11" name="part 2 circle"/>
           <p:cNvSpPr/>
           <p:nvPr/>
         </p:nvSpPr>
         <p:spPr>
           <a:xfrm>
-            <a:off x="3415284" y="1485900"/>
-            <a:ext cx="548640" cy="548640"/>
+            <a:off x="3177540" y="1554480"/>
+            <a:ext cx="640080" cy="640080"/>
           </a:xfrm>
           <a:prstGeom prst="ellipse">
             <a:avLst/>
@@ -5650,7 +7169,7 @@
       </p:sp>
       <p:pic>
         <p:nvPicPr>
-          <p:cNvPr id="10" name="step 2 icon" descr="step 2">    </p:cNvPr>
+          <p:cNvPr id="12" name="part 2 icon" descr="part 2">    </p:cNvPr>
           <p:cNvPicPr>
             <a:picLocks noChangeAspect="1"/>
           </p:cNvPicPr>
@@ -5664,8 +7183,8 @@
         </p:blipFill>
         <p:spPr>
           <a:xfrm>
-            <a:off x="3563417" y="1634033"/>
-            <a:ext cx="252374" cy="252374"/>
+            <a:off x="3350362" y="1727302"/>
+            <a:ext cx="294437" cy="294437"/>
           </a:xfrm>
           <a:prstGeom prst="rect">
             <a:avLst/>
@@ -5674,14 +7193,14 @@
       </p:pic>
       <p:sp>
         <p:nvSpPr>
-          <p:cNvPr id="11" name="step 2 title"/>
+          <p:cNvPr id="13" name="part 2 name"/>
           <p:cNvSpPr txBox="1"/>
           <p:nvPr/>
         </p:nvSpPr>
         <p:spPr>
           <a:xfrm>
-            <a:off x="4101084" y="1435608"/>
-            <a:ext cx="1673352" cy="329184"/>
+            <a:off x="2697480" y="2286000"/>
+            <a:ext cx="1600200" cy="365760"/>
           </a:xfrm>
           <a:prstGeom prst="rect">
             <a:avLst/>
@@ -5693,31 +7212,31 @@
           <a:bodyPr wrap="square" lIns="0" tIns="0" rIns="0" bIns="0" rtlCol="0" anchor="ctr"/>
           <a:lstStyle/>
           <a:p>
-            <a:pPr indent="0" marL="0">
+            <a:pPr algn="ctr" indent="0" marL="0">
               <a:buNone/>
             </a:pPr>
             <a:r>
-              <a:rPr lang="en-US" sz="1600" b="1" dirty="0">
+              <a:rPr lang="en-US" sz="1800" b="1" dirty="0">
                 <a:solidFill>
                   <a:schemeClr val="tx2"/>
                 </a:solidFill>
               </a:rPr>
-              <a:t>Test it</a:t>
-            </a:r>
-            <a:endParaRPr lang="en-US" sz="1600" dirty="0"/>
-          </a:p>
-        </p:txBody>
-      </p:sp>
-      <p:sp>
-        <p:nvSpPr>
-          <p:cNvPr id="12" name="step 2 text"/>
+              <a:t>The doorman</a:t>
+            </a:r>
+            <a:endParaRPr lang="en-US" sz="1800" dirty="0"/>
+          </a:p>
+        </p:txBody>
+      </p:sp>
+      <p:sp>
+        <p:nvSpPr>
+          <p:cNvPr id="14" name="part 2 role"/>
           <p:cNvSpPr txBox="1"/>
           <p:nvPr/>
         </p:nvSpPr>
         <p:spPr>
           <a:xfrm>
-            <a:off x="4101084" y="1764792"/>
-            <a:ext cx="1673352" cy="365760"/>
+            <a:off x="2743200" y="2670048"/>
+            <a:ext cx="1508760" cy="594360"/>
           </a:xfrm>
           <a:prstGeom prst="rect">
             <a:avLst/>
@@ -5729,16 +7248,52 @@
           <a:bodyPr wrap="square" lIns="0" tIns="0" rIns="0" bIns="0" rtlCol="0" anchor="t"/>
           <a:lstStyle/>
           <a:p>
-            <a:pPr indent="0" marL="0">
+            <a:pPr algn="ctr" indent="0" marL="0">
               <a:buNone/>
             </a:pPr>
             <a:r>
-              <a:rPr lang="en-US" sz="1200" dirty="0">
+              <a:rPr lang="en-US" sz="1400" dirty="0">
                 <a:solidFill>
                   <a:schemeClr val="tx1"/>
                 </a:solidFill>
               </a:rPr>
-              <a:t>31 automatic checks</a:t>
+              <a:t>Passes requests on</a:t>
+            </a:r>
+            <a:endParaRPr lang="en-US" sz="1400" dirty="0"/>
+          </a:p>
+        </p:txBody>
+      </p:sp>
+      <p:sp>
+        <p:nvSpPr>
+          <p:cNvPr id="15" name="part 2 tech"/>
+          <p:cNvSpPr txBox="1"/>
+          <p:nvPr/>
+        </p:nvSpPr>
+        <p:spPr>
+          <a:xfrm>
+            <a:off x="2697480" y="3337560"/>
+            <a:ext cx="1600200" cy="274320"/>
+          </a:xfrm>
+          <a:prstGeom prst="rect">
+            <a:avLst/>
+          </a:prstGeom>
+          <a:noFill/>
+          <a:ln/>
+        </p:spPr>
+        <p:txBody>
+          <a:bodyPr wrap="square" lIns="0" tIns="0" rIns="0" bIns="0" rtlCol="0" anchor="ctr"/>
+          <a:lstStyle/>
+          <a:p>
+            <a:pPr algn="ctr" indent="0" marL="0">
+              <a:buNone/>
+            </a:pPr>
+            <a:r>
+              <a:rPr lang="en-US" sz="1200" b="1" dirty="0">
+                <a:solidFill>
+                  <a:schemeClr val="accent1"/>
+                </a:solidFill>
+              </a:rPr>
+              <a:t>Nginx</a:t>
             </a:r>
             <a:endParaRPr lang="en-US" sz="1200" dirty="0"/>
           </a:p>
@@ -5746,18 +7301,43 @@
       </p:sp>
       <p:sp>
         <p:nvSpPr>
-          <p:cNvPr id="13" name="step 3 card"/>
+          <p:cNvPr id="16" name="arrow 2"/>
           <p:cNvSpPr/>
           <p:nvPr/>
         </p:nvSpPr>
         <p:spPr>
           <a:xfrm>
-            <a:off x="6099048" y="1280160"/>
-            <a:ext cx="2587752" cy="960120"/>
+            <a:off x="4453128" y="2395728"/>
+            <a:ext cx="237744" cy="274320"/>
+          </a:xfrm>
+          <a:prstGeom prst="rightArrow">
+            <a:avLst/>
+          </a:prstGeom>
+          <a:solidFill>
+            <a:schemeClr val="accent6"/>
+          </a:solidFill>
+          <a:ln w="12700">
+            <a:solidFill>
+              <a:schemeClr val="accent6"/>
+            </a:solidFill>
+            <a:prstDash val="solid"/>
+          </a:ln>
+        </p:spPr>
+      </p:sp>
+      <p:sp>
+        <p:nvSpPr>
+          <p:cNvPr id="17" name="part 3 card"/>
+          <p:cNvSpPr/>
+          <p:nvPr/>
+        </p:nvSpPr>
+        <p:spPr>
+          <a:xfrm>
+            <a:off x="4754880" y="1371600"/>
+            <a:ext cx="1783080" cy="2331720"/>
           </a:xfrm>
           <a:prstGeom prst="roundRect">
             <a:avLst>
-              <a:gd name="adj" fmla="val 9524"/>
+              <a:gd name="adj" fmla="val 6154"/>
             </a:avLst>
           </a:prstGeom>
           <a:solidFill>
@@ -5769,18 +7349,25 @@
             </a:solidFill>
             <a:prstDash val="solid"/>
           </a:ln>
-        </p:spPr>
-      </p:sp>
-      <p:sp>
-        <p:nvSpPr>
-          <p:cNvPr id="14" name="step 3 circle"/>
+          <a:effectLst>
+            <a:outerShdw sx="100000" sy="100000" kx="0" ky="0" algn="bl" rotWithShape="0" blurRad="76200" dist="25400" dir="5400000">
+              <a:srgbClr val="000000">
+                <a:alpha val="12000"/>
+              </a:srgbClr>
+            </a:outerShdw>
+          </a:effectLst>
+        </p:spPr>
+      </p:sp>
+      <p:sp>
+        <p:nvSpPr>
+          <p:cNvPr id="18" name="part 3 circle"/>
           <p:cNvSpPr/>
           <p:nvPr/>
         </p:nvSpPr>
         <p:spPr>
           <a:xfrm>
-            <a:off x="6236208" y="1485900"/>
-            <a:ext cx="548640" cy="548640"/>
+            <a:off x="5326380" y="1554480"/>
+            <a:ext cx="640080" cy="640080"/>
           </a:xfrm>
           <a:prstGeom prst="ellipse">
             <a:avLst/>
@@ -5798,7 +7385,7 @@
       </p:sp>
       <p:pic>
         <p:nvPicPr>
-          <p:cNvPr id="15" name="step 3 icon" descr="step 3">    </p:cNvPr>
+          <p:cNvPr id="19" name="part 3 icon" descr="part 3">    </p:cNvPr>
           <p:cNvPicPr>
             <a:picLocks noChangeAspect="1"/>
           </p:cNvPicPr>
@@ -5812,8 +7399,8 @@
         </p:blipFill>
         <p:spPr>
           <a:xfrm>
-            <a:off x="6384341" y="1634033"/>
-            <a:ext cx="252374" cy="252374"/>
+            <a:off x="5499202" y="1727302"/>
+            <a:ext cx="294437" cy="294437"/>
           </a:xfrm>
           <a:prstGeom prst="rect">
             <a:avLst/>
@@ -5822,14 +7409,14 @@
       </p:pic>
       <p:sp>
         <p:nvSpPr>
-          <p:cNvPr id="16" name="step 3 title"/>
+          <p:cNvPr id="20" name="part 3 name"/>
           <p:cNvSpPr txBox="1"/>
           <p:nvPr/>
         </p:nvSpPr>
         <p:spPr>
           <a:xfrm>
-            <a:off x="6922008" y="1435608"/>
-            <a:ext cx="1673352" cy="329184"/>
+            <a:off x="4846320" y="2286000"/>
+            <a:ext cx="1600200" cy="365760"/>
           </a:xfrm>
           <a:prstGeom prst="rect">
             <a:avLst/>
@@ -5841,31 +7428,31 @@
           <a:bodyPr wrap="square" lIns="0" tIns="0" rIns="0" bIns="0" rtlCol="0" anchor="ctr"/>
           <a:lstStyle/>
           <a:p>
-            <a:pPr indent="0" marL="0">
+            <a:pPr algn="ctr" indent="0" marL="0">
               <a:buNone/>
             </a:pPr>
             <a:r>
-              <a:rPr lang="en-US" sz="1600" b="1" dirty="0">
+              <a:rPr lang="en-US" sz="1800" b="1" dirty="0">
                 <a:solidFill>
                   <a:schemeClr val="tx2"/>
                 </a:solidFill>
               </a:rPr>
-              <a:t>Save the history</a:t>
-            </a:r>
-            <a:endParaRPr lang="en-US" sz="1600" dirty="0"/>
-          </a:p>
-        </p:txBody>
-      </p:sp>
-      <p:sp>
-        <p:nvSpPr>
-          <p:cNvPr id="17" name="step 3 text"/>
+              <a:t>The brain</a:t>
+            </a:r>
+            <a:endParaRPr lang="en-US" sz="1800" dirty="0"/>
+          </a:p>
+        </p:txBody>
+      </p:sp>
+      <p:sp>
+        <p:nvSpPr>
+          <p:cNvPr id="21" name="part 3 role"/>
           <p:cNvSpPr txBox="1"/>
           <p:nvPr/>
         </p:nvSpPr>
         <p:spPr>
           <a:xfrm>
-            <a:off x="6922008" y="1764792"/>
-            <a:ext cx="1673352" cy="365760"/>
+            <a:off x="4892040" y="2670048"/>
+            <a:ext cx="1508760" cy="594360"/>
           </a:xfrm>
           <a:prstGeom prst="rect">
             <a:avLst/>
@@ -5877,16 +7464,52 @@
           <a:bodyPr wrap="square" lIns="0" tIns="0" rIns="0" bIns="0" rtlCol="0" anchor="t"/>
           <a:lstStyle/>
           <a:p>
-            <a:pPr indent="0" marL="0">
+            <a:pPr algn="ctr" indent="0" marL="0">
               <a:buNone/>
             </a:pPr>
             <a:r>
-              <a:rPr lang="en-US" sz="1200" dirty="0">
+              <a:rPr lang="en-US" sz="1400" dirty="0">
                 <a:solidFill>
                   <a:schemeClr val="tx1"/>
                 </a:solidFill>
               </a:rPr>
-              <a:t>Git and GitHub</a:t>
+              <a:t>Rules for stock and orders</a:t>
+            </a:r>
+            <a:endParaRPr lang="en-US" sz="1400" dirty="0"/>
+          </a:p>
+        </p:txBody>
+      </p:sp>
+      <p:sp>
+        <p:nvSpPr>
+          <p:cNvPr id="22" name="part 3 tech"/>
+          <p:cNvSpPr txBox="1"/>
+          <p:nvPr/>
+        </p:nvSpPr>
+        <p:spPr>
+          <a:xfrm>
+            <a:off x="4846320" y="3337560"/>
+            <a:ext cx="1600200" cy="274320"/>
+          </a:xfrm>
+          <a:prstGeom prst="rect">
+            <a:avLst/>
+          </a:prstGeom>
+          <a:noFill/>
+          <a:ln/>
+        </p:spPr>
+        <p:txBody>
+          <a:bodyPr wrap="square" lIns="0" tIns="0" rIns="0" bIns="0" rtlCol="0" anchor="ctr"/>
+          <a:lstStyle/>
+          <a:p>
+            <a:pPr algn="ctr" indent="0" marL="0">
+              <a:buNone/>
+            </a:pPr>
+            <a:r>
+              <a:rPr lang="en-US" sz="1200" b="1" dirty="0">
+                <a:solidFill>
+                  <a:schemeClr val="accent1"/>
+                </a:solidFill>
+              </a:rPr>
+              <a:t>FastAPI</a:t>
             </a:r>
             <a:endParaRPr lang="en-US" sz="1200" dirty="0"/>
           </a:p>
@@ -5894,18 +7517,43 @@
       </p:sp>
       <p:sp>
         <p:nvSpPr>
-          <p:cNvPr id="18" name="step 4 card"/>
+          <p:cNvPr id="23" name="arrow 3"/>
           <p:cNvSpPr/>
           <p:nvPr/>
         </p:nvSpPr>
         <p:spPr>
           <a:xfrm>
-            <a:off x="457200" y="2395728"/>
-            <a:ext cx="2587752" cy="960120"/>
+            <a:off x="6601968" y="2395728"/>
+            <a:ext cx="237744" cy="274320"/>
+          </a:xfrm>
+          <a:prstGeom prst="rightArrow">
+            <a:avLst/>
+          </a:prstGeom>
+          <a:solidFill>
+            <a:schemeClr val="accent6"/>
+          </a:solidFill>
+          <a:ln w="12700">
+            <a:solidFill>
+              <a:schemeClr val="accent6"/>
+            </a:solidFill>
+            <a:prstDash val="solid"/>
+          </a:ln>
+        </p:spPr>
+      </p:sp>
+      <p:sp>
+        <p:nvSpPr>
+          <p:cNvPr id="24" name="part 4 card"/>
+          <p:cNvSpPr/>
+          <p:nvPr/>
+        </p:nvSpPr>
+        <p:spPr>
+          <a:xfrm>
+            <a:off x="6903720" y="1371600"/>
+            <a:ext cx="1783080" cy="2331720"/>
           </a:xfrm>
           <a:prstGeom prst="roundRect">
             <a:avLst>
-              <a:gd name="adj" fmla="val 9524"/>
+              <a:gd name="adj" fmla="val 6154"/>
             </a:avLst>
           </a:prstGeom>
           <a:solidFill>
@@ -5917,18 +7565,25 @@
             </a:solidFill>
             <a:prstDash val="solid"/>
           </a:ln>
-        </p:spPr>
-      </p:sp>
-      <p:sp>
-        <p:nvSpPr>
-          <p:cNvPr id="19" name="step 4 circle"/>
+          <a:effectLst>
+            <a:outerShdw sx="100000" sy="100000" kx="0" ky="0" algn="bl" rotWithShape="0" blurRad="76200" dist="25400" dir="5400000">
+              <a:srgbClr val="000000">
+                <a:alpha val="12000"/>
+              </a:srgbClr>
+            </a:outerShdw>
+          </a:effectLst>
+        </p:spPr>
+      </p:sp>
+      <p:sp>
+        <p:nvSpPr>
+          <p:cNvPr id="25" name="part 4 circle"/>
           <p:cNvSpPr/>
           <p:nvPr/>
         </p:nvSpPr>
         <p:spPr>
           <a:xfrm>
-            <a:off x="594360" y="2601468"/>
-            <a:ext cx="548640" cy="548640"/>
+            <a:off x="7475220" y="1554480"/>
+            <a:ext cx="640080" cy="640080"/>
           </a:xfrm>
           <a:prstGeom prst="ellipse">
             <a:avLst/>
@@ -5946,7 +7601,7 @@
       </p:sp>
       <p:pic>
         <p:nvPicPr>
-          <p:cNvPr id="20" name="step 4 icon" descr="step 4">    </p:cNvPr>
+          <p:cNvPr id="26" name="part 4 icon" descr="part 4">    </p:cNvPr>
           <p:cNvPicPr>
             <a:picLocks noChangeAspect="1"/>
           </p:cNvPicPr>
@@ -5960,8 +7615,8 @@
         </p:blipFill>
         <p:spPr>
           <a:xfrm>
-            <a:off x="742493" y="2749601"/>
-            <a:ext cx="252374" cy="252374"/>
+            <a:off x="7648042" y="1727302"/>
+            <a:ext cx="294437" cy="294437"/>
           </a:xfrm>
           <a:prstGeom prst="rect">
             <a:avLst/>
@@ -5970,14 +7625,14 @@
       </p:pic>
       <p:sp>
         <p:nvSpPr>
-          <p:cNvPr id="21" name="step 4 title"/>
+          <p:cNvPr id="27" name="part 4 name"/>
           <p:cNvSpPr txBox="1"/>
           <p:nvPr/>
         </p:nvSpPr>
         <p:spPr>
           <a:xfrm>
-            <a:off x="1280160" y="2551176"/>
-            <a:ext cx="1673352" cy="329184"/>
+            <a:off x="6995160" y="2286000"/>
+            <a:ext cx="1600200" cy="365760"/>
           </a:xfrm>
           <a:prstGeom prst="rect">
             <a:avLst/>
@@ -5989,794 +7644,126 @@
           <a:bodyPr wrap="square" lIns="0" tIns="0" rIns="0" bIns="0" rtlCol="0" anchor="ctr"/>
           <a:lstStyle/>
           <a:p>
+            <a:pPr algn="ctr" indent="0" marL="0">
+              <a:buNone/>
+            </a:pPr>
+            <a:r>
+              <a:rPr lang="en-US" sz="1800" b="1" dirty="0">
+                <a:solidFill>
+                  <a:schemeClr val="tx2"/>
+                </a:solidFill>
+              </a:rPr>
+              <a:t>The memory</a:t>
+            </a:r>
+            <a:endParaRPr lang="en-US" sz="1800" dirty="0"/>
+          </a:p>
+        </p:txBody>
+      </p:sp>
+      <p:sp>
+        <p:nvSpPr>
+          <p:cNvPr id="28" name="part 4 role"/>
+          <p:cNvSpPr txBox="1"/>
+          <p:nvPr/>
+        </p:nvSpPr>
+        <p:spPr>
+          <a:xfrm>
+            <a:off x="7040880" y="2670048"/>
+            <a:ext cx="1508760" cy="594360"/>
+          </a:xfrm>
+          <a:prstGeom prst="rect">
+            <a:avLst/>
+          </a:prstGeom>
+          <a:noFill/>
+          <a:ln/>
+        </p:spPr>
+        <p:txBody>
+          <a:bodyPr wrap="square" lIns="0" tIns="0" rIns="0" bIns="0" rtlCol="0" anchor="t"/>
+          <a:lstStyle/>
+          <a:p>
+            <a:pPr algn="ctr" indent="0" marL="0">
+              <a:buNone/>
+            </a:pPr>
+            <a:r>
+              <a:rPr lang="en-US" sz="1400" dirty="0">
+                <a:solidFill>
+                  <a:schemeClr val="tx1"/>
+                </a:solidFill>
+              </a:rPr>
+              <a:t>Stores everything</a:t>
+            </a:r>
+            <a:endParaRPr lang="en-US" sz="1400" dirty="0"/>
+          </a:p>
+        </p:txBody>
+      </p:sp>
+      <p:sp>
+        <p:nvSpPr>
+          <p:cNvPr id="29" name="part 4 tech"/>
+          <p:cNvSpPr txBox="1"/>
+          <p:nvPr/>
+        </p:nvSpPr>
+        <p:spPr>
+          <a:xfrm>
+            <a:off x="6995160" y="3337560"/>
+            <a:ext cx="1600200" cy="274320"/>
+          </a:xfrm>
+          <a:prstGeom prst="rect">
+            <a:avLst/>
+          </a:prstGeom>
+          <a:noFill/>
+          <a:ln/>
+        </p:spPr>
+        <p:txBody>
+          <a:bodyPr wrap="square" lIns="0" tIns="0" rIns="0" bIns="0" rtlCol="0" anchor="ctr"/>
+          <a:lstStyle/>
+          <a:p>
+            <a:pPr algn="ctr" indent="0" marL="0">
+              <a:buNone/>
+            </a:pPr>
+            <a:r>
+              <a:rPr lang="en-US" sz="1200" b="1" dirty="0">
+                <a:solidFill>
+                  <a:schemeClr val="accent1"/>
+                </a:solidFill>
+              </a:rPr>
+              <a:t>PostgreSQL</a:t>
+            </a:r>
+            <a:endParaRPr lang="en-US" sz="1200" dirty="0"/>
+          </a:p>
+        </p:txBody>
+      </p:sp>
+      <p:sp>
+        <p:nvSpPr>
+          <p:cNvPr id="30" name="containers note"/>
+          <p:cNvSpPr txBox="1"/>
+          <p:nvPr/>
+        </p:nvSpPr>
+        <p:spPr>
+          <a:xfrm>
+            <a:off x="457200" y="4023360"/>
+            <a:ext cx="8229600" cy="411480"/>
+          </a:xfrm>
+          <a:prstGeom prst="rect">
+            <a:avLst/>
+          </a:prstGeom>
+          <a:noFill/>
+          <a:ln/>
+        </p:spPr>
+        <p:txBody>
+          <a:bodyPr wrap="square" lIns="0" tIns="0" rIns="0" bIns="0" rtlCol="0" anchor="ctr"/>
+          <a:lstStyle/>
+          <a:p>
             <a:pPr indent="0" marL="0">
               <a:buNone/>
             </a:pPr>
             <a:r>
-              <a:rPr lang="en-US" sz="1600" b="1" dirty="0">
-                <a:solidFill>
-                  <a:schemeClr val="tx2"/>
+              <a:rPr lang="en-US" sz="1800" dirty="0">
+                <a:solidFill>
+                  <a:schemeClr val="tx1"/>
                 </a:solidFill>
               </a:rPr>
-              <a:t>Package it</a:t>
-            </a:r>
-            <a:endParaRPr lang="en-US" sz="1600" dirty="0"/>
-          </a:p>
-        </p:txBody>
-      </p:sp>
-      <p:sp>
-        <p:nvSpPr>
-          <p:cNvPr id="22" name="step 4 text"/>
-          <p:cNvSpPr txBox="1"/>
-          <p:nvPr/>
-        </p:nvSpPr>
-        <p:spPr>
-          <a:xfrm>
-            <a:off x="1280160" y="2880360"/>
-            <a:ext cx="1673352" cy="365760"/>
-          </a:xfrm>
-          <a:prstGeom prst="rect">
-            <a:avLst/>
-          </a:prstGeom>
-          <a:noFill/>
-          <a:ln/>
-        </p:spPr>
-        <p:txBody>
-          <a:bodyPr wrap="square" lIns="0" tIns="0" rIns="0" bIns="0" rtlCol="0" anchor="t"/>
-          <a:lstStyle/>
-          <a:p>
-            <a:pPr indent="0" marL="0">
-              <a:buNone/>
-            </a:pPr>
-            <a:r>
-              <a:rPr lang="en-US" sz="1200" dirty="0">
-                <a:solidFill>
-                  <a:schemeClr val="tx1"/>
-                </a:solidFill>
-              </a:rPr>
-              <a:t>Containers run anywhere</a:t>
-            </a:r>
-            <a:endParaRPr lang="en-US" sz="1200" dirty="0"/>
-          </a:p>
-        </p:txBody>
-      </p:sp>
-      <p:sp>
-        <p:nvSpPr>
-          <p:cNvPr id="23" name="step 5 card"/>
-          <p:cNvSpPr/>
-          <p:nvPr/>
-        </p:nvSpPr>
-        <p:spPr>
-          <a:xfrm>
-            <a:off x="3278124" y="2395728"/>
-            <a:ext cx="2587752" cy="960120"/>
-          </a:xfrm>
-          <a:prstGeom prst="roundRect">
-            <a:avLst>
-              <a:gd name="adj" fmla="val 9524"/>
-            </a:avLst>
-          </a:prstGeom>
-          <a:solidFill>
-            <a:schemeClr val="bg2"/>
-          </a:solidFill>
-          <a:ln w="12700">
-            <a:solidFill>
-              <a:schemeClr val="bg2"/>
-            </a:solidFill>
-            <a:prstDash val="solid"/>
-          </a:ln>
-        </p:spPr>
-      </p:sp>
-      <p:sp>
-        <p:nvSpPr>
-          <p:cNvPr id="24" name="step 5 circle"/>
-          <p:cNvSpPr/>
-          <p:nvPr/>
-        </p:nvSpPr>
-        <p:spPr>
-          <a:xfrm>
-            <a:off x="3415284" y="2601468"/>
-            <a:ext cx="548640" cy="548640"/>
-          </a:xfrm>
-          <a:prstGeom prst="ellipse">
-            <a:avLst/>
-          </a:prstGeom>
-          <a:solidFill>
-            <a:schemeClr val="accent1"/>
-          </a:solidFill>
-          <a:ln w="12700">
-            <a:solidFill>
-              <a:schemeClr val="accent1"/>
-            </a:solidFill>
-            <a:prstDash val="solid"/>
-          </a:ln>
-        </p:spPr>
-      </p:sp>
-      <p:pic>
-        <p:nvPicPr>
-          <p:cNvPr id="25" name="step 5 icon" descr="step 5">    </p:cNvPr>
-          <p:cNvPicPr>
-            <a:picLocks noChangeAspect="1"/>
-          </p:cNvPicPr>
-          <p:nvPr/>
-        </p:nvPicPr>
-        <p:blipFill>
-          <a:blip r:embed="rId5"/>
-          <a:stretch>
-            <a:fillRect/>
-          </a:stretch>
-        </p:blipFill>
-        <p:spPr>
-          <a:xfrm>
-            <a:off x="3563417" y="2749601"/>
-            <a:ext cx="252374" cy="252374"/>
-          </a:xfrm>
-          <a:prstGeom prst="rect">
-            <a:avLst/>
-          </a:prstGeom>
-        </p:spPr>
-      </p:pic>
-      <p:sp>
-        <p:nvSpPr>
-          <p:cNvPr id="26" name="step 5 title"/>
-          <p:cNvSpPr txBox="1"/>
-          <p:nvPr/>
-        </p:nvSpPr>
-        <p:spPr>
-          <a:xfrm>
-            <a:off x="4101084" y="2551176"/>
-            <a:ext cx="1673352" cy="329184"/>
-          </a:xfrm>
-          <a:prstGeom prst="rect">
-            <a:avLst/>
-          </a:prstGeom>
-          <a:noFill/>
-          <a:ln/>
-        </p:spPr>
-        <p:txBody>
-          <a:bodyPr wrap="square" lIns="0" tIns="0" rIns="0" bIns="0" rtlCol="0" anchor="ctr"/>
-          <a:lstStyle/>
-          <a:p>
-            <a:pPr indent="0" marL="0">
-              <a:buNone/>
-            </a:pPr>
-            <a:r>
-              <a:rPr lang="en-US" sz="1600" b="1" dirty="0">
-                <a:solidFill>
-                  <a:schemeClr val="tx2"/>
-                </a:solidFill>
-              </a:rPr>
-              <a:t>Automate it</a:t>
-            </a:r>
-            <a:endParaRPr lang="en-US" sz="1600" dirty="0"/>
-          </a:p>
-        </p:txBody>
-      </p:sp>
-      <p:sp>
-        <p:nvSpPr>
-          <p:cNvPr id="27" name="step 5 text"/>
-          <p:cNvSpPr txBox="1"/>
-          <p:nvPr/>
-        </p:nvSpPr>
-        <p:spPr>
-          <a:xfrm>
-            <a:off x="4101084" y="2880360"/>
-            <a:ext cx="1673352" cy="365760"/>
-          </a:xfrm>
-          <a:prstGeom prst="rect">
-            <a:avLst/>
-          </a:prstGeom>
-          <a:noFill/>
-          <a:ln/>
-        </p:spPr>
-        <p:txBody>
-          <a:bodyPr wrap="square" lIns="0" tIns="0" rIns="0" bIns="0" rtlCol="0" anchor="t"/>
-          <a:lstStyle/>
-          <a:p>
-            <a:pPr indent="0" marL="0">
-              <a:buNone/>
-            </a:pPr>
-            <a:r>
-              <a:rPr lang="en-US" sz="1200" dirty="0">
-                <a:solidFill>
-                  <a:schemeClr val="tx1"/>
-                </a:solidFill>
-              </a:rPr>
-              <a:t>Every push is checked and built</a:t>
-            </a:r>
-            <a:endParaRPr lang="en-US" sz="1200" dirty="0"/>
-          </a:p>
-        </p:txBody>
-      </p:sp>
-      <p:sp>
-        <p:nvSpPr>
-          <p:cNvPr id="28" name="step 6 card"/>
-          <p:cNvSpPr/>
-          <p:nvPr/>
-        </p:nvSpPr>
-        <p:spPr>
-          <a:xfrm>
-            <a:off x="6099048" y="2395728"/>
-            <a:ext cx="2587752" cy="960120"/>
-          </a:xfrm>
-          <a:prstGeom prst="roundRect">
-            <a:avLst>
-              <a:gd name="adj" fmla="val 9524"/>
-            </a:avLst>
-          </a:prstGeom>
-          <a:solidFill>
-            <a:schemeClr val="bg2"/>
-          </a:solidFill>
-          <a:ln w="12700">
-            <a:solidFill>
-              <a:schemeClr val="bg2"/>
-            </a:solidFill>
-            <a:prstDash val="solid"/>
-          </a:ln>
-        </p:spPr>
-      </p:sp>
-      <p:sp>
-        <p:nvSpPr>
-          <p:cNvPr id="29" name="step 6 circle"/>
-          <p:cNvSpPr/>
-          <p:nvPr/>
-        </p:nvSpPr>
-        <p:spPr>
-          <a:xfrm>
-            <a:off x="6236208" y="2601468"/>
-            <a:ext cx="548640" cy="548640"/>
-          </a:xfrm>
-          <a:prstGeom prst="ellipse">
-            <a:avLst/>
-          </a:prstGeom>
-          <a:solidFill>
-            <a:schemeClr val="accent1"/>
-          </a:solidFill>
-          <a:ln w="12700">
-            <a:solidFill>
-              <a:schemeClr val="accent1"/>
-            </a:solidFill>
-            <a:prstDash val="solid"/>
-          </a:ln>
-        </p:spPr>
-      </p:sp>
-      <p:pic>
-        <p:nvPicPr>
-          <p:cNvPr id="30" name="step 6 icon" descr="step 6">    </p:cNvPr>
-          <p:cNvPicPr>
-            <a:picLocks noChangeAspect="1"/>
-          </p:cNvPicPr>
-          <p:nvPr/>
-        </p:nvPicPr>
-        <p:blipFill>
-          <a:blip r:embed="rId6"/>
-          <a:stretch>
-            <a:fillRect/>
-          </a:stretch>
-        </p:blipFill>
-        <p:spPr>
-          <a:xfrm>
-            <a:off x="6384341" y="2749601"/>
-            <a:ext cx="252374" cy="252374"/>
-          </a:xfrm>
-          <a:prstGeom prst="rect">
-            <a:avLst/>
-          </a:prstGeom>
-        </p:spPr>
-      </p:pic>
-      <p:sp>
-        <p:nvSpPr>
-          <p:cNvPr id="31" name="step 6 title"/>
-          <p:cNvSpPr txBox="1"/>
-          <p:nvPr/>
-        </p:nvSpPr>
-        <p:spPr>
-          <a:xfrm>
-            <a:off x="6922008" y="2551176"/>
-            <a:ext cx="1673352" cy="329184"/>
-          </a:xfrm>
-          <a:prstGeom prst="rect">
-            <a:avLst/>
-          </a:prstGeom>
-          <a:noFill/>
-          <a:ln/>
-        </p:spPr>
-        <p:txBody>
-          <a:bodyPr wrap="square" lIns="0" tIns="0" rIns="0" bIns="0" rtlCol="0" anchor="ctr"/>
-          <a:lstStyle/>
-          <a:p>
-            <a:pPr indent="0" marL="0">
-              <a:buNone/>
-            </a:pPr>
-            <a:r>
-              <a:rPr lang="en-US" sz="1600" b="1" dirty="0">
-                <a:solidFill>
-                  <a:schemeClr val="tx2"/>
-                </a:solidFill>
-              </a:rPr>
-              <a:t>Scan for risks</a:t>
-            </a:r>
-            <a:endParaRPr lang="en-US" sz="1600" dirty="0"/>
-          </a:p>
-        </p:txBody>
-      </p:sp>
-      <p:sp>
-        <p:nvSpPr>
-          <p:cNvPr id="32" name="step 6 text"/>
-          <p:cNvSpPr txBox="1"/>
-          <p:nvPr/>
-        </p:nvSpPr>
-        <p:spPr>
-          <a:xfrm>
-            <a:off x="6922008" y="2880360"/>
-            <a:ext cx="1673352" cy="365760"/>
-          </a:xfrm>
-          <a:prstGeom prst="rect">
-            <a:avLst/>
-          </a:prstGeom>
-          <a:noFill/>
-          <a:ln/>
-        </p:spPr>
-        <p:txBody>
-          <a:bodyPr wrap="square" lIns="0" tIns="0" rIns="0" bIns="0" rtlCol="0" anchor="t"/>
-          <a:lstStyle/>
-          <a:p>
-            <a:pPr indent="0" marL="0">
-              <a:buNone/>
-            </a:pPr>
-            <a:r>
-              <a:rPr lang="en-US" sz="1200" dirty="0">
-                <a:solidFill>
-                  <a:schemeClr val="tx1"/>
-                </a:solidFill>
-              </a:rPr>
-              <a:t>Trivy looks for security holes</a:t>
-            </a:r>
-            <a:endParaRPr lang="en-US" sz="1200" dirty="0"/>
-          </a:p>
-        </p:txBody>
-      </p:sp>
-      <p:sp>
-        <p:nvSpPr>
-          <p:cNvPr id="33" name="step 7 card"/>
-          <p:cNvSpPr/>
-          <p:nvPr/>
-        </p:nvSpPr>
-        <p:spPr>
-          <a:xfrm>
-            <a:off x="457200" y="3511296"/>
-            <a:ext cx="2587752" cy="960120"/>
-          </a:xfrm>
-          <a:prstGeom prst="roundRect">
-            <a:avLst>
-              <a:gd name="adj" fmla="val 9524"/>
-            </a:avLst>
-          </a:prstGeom>
-          <a:solidFill>
-            <a:schemeClr val="bg2"/>
-          </a:solidFill>
-          <a:ln w="12700">
-            <a:solidFill>
-              <a:schemeClr val="bg2"/>
-            </a:solidFill>
-            <a:prstDash val="solid"/>
-          </a:ln>
-        </p:spPr>
-      </p:sp>
-      <p:sp>
-        <p:nvSpPr>
-          <p:cNvPr id="34" name="step 7 circle"/>
-          <p:cNvSpPr/>
-          <p:nvPr/>
-        </p:nvSpPr>
-        <p:spPr>
-          <a:xfrm>
-            <a:off x="594360" y="3717036"/>
-            <a:ext cx="548640" cy="548640"/>
-          </a:xfrm>
-          <a:prstGeom prst="ellipse">
-            <a:avLst/>
-          </a:prstGeom>
-          <a:solidFill>
-            <a:schemeClr val="accent1"/>
-          </a:solidFill>
-          <a:ln w="12700">
-            <a:solidFill>
-              <a:schemeClr val="accent1"/>
-            </a:solidFill>
-            <a:prstDash val="solid"/>
-          </a:ln>
-        </p:spPr>
-      </p:sp>
-      <p:pic>
-        <p:nvPicPr>
-          <p:cNvPr id="35" name="step 7 icon" descr="step 7">    </p:cNvPr>
-          <p:cNvPicPr>
-            <a:picLocks noChangeAspect="1"/>
-          </p:cNvPicPr>
-          <p:nvPr/>
-        </p:nvPicPr>
-        <p:blipFill>
-          <a:blip r:embed="rId7"/>
-          <a:stretch>
-            <a:fillRect/>
-          </a:stretch>
-        </p:blipFill>
-        <p:spPr>
-          <a:xfrm>
-            <a:off x="742493" y="3865169"/>
-            <a:ext cx="252374" cy="252374"/>
-          </a:xfrm>
-          <a:prstGeom prst="rect">
-            <a:avLst/>
-          </a:prstGeom>
-        </p:spPr>
-      </p:pic>
-      <p:sp>
-        <p:nvSpPr>
-          <p:cNvPr id="36" name="step 7 title"/>
-          <p:cNvSpPr txBox="1"/>
-          <p:nvPr/>
-        </p:nvSpPr>
-        <p:spPr>
-          <a:xfrm>
-            <a:off x="1280160" y="3666744"/>
-            <a:ext cx="1673352" cy="329184"/>
-          </a:xfrm>
-          <a:prstGeom prst="rect">
-            <a:avLst/>
-          </a:prstGeom>
-          <a:noFill/>
-          <a:ln/>
-        </p:spPr>
-        <p:txBody>
-          <a:bodyPr wrap="square" lIns="0" tIns="0" rIns="0" bIns="0" rtlCol="0" anchor="ctr"/>
-          <a:lstStyle/>
-          <a:p>
-            <a:pPr indent="0" marL="0">
-              <a:buNone/>
-            </a:pPr>
-            <a:r>
-              <a:rPr lang="en-US" sz="1600" b="1" dirty="0">
-                <a:solidFill>
-                  <a:schemeClr val="tx2"/>
-                </a:solidFill>
-              </a:rPr>
-              <a:t>Plan the cloud</a:t>
-            </a:r>
-            <a:endParaRPr lang="en-US" sz="1600" dirty="0"/>
-          </a:p>
-        </p:txBody>
-      </p:sp>
-      <p:sp>
-        <p:nvSpPr>
-          <p:cNvPr id="37" name="step 7 text"/>
-          <p:cNvSpPr txBox="1"/>
-          <p:nvPr/>
-        </p:nvSpPr>
-        <p:spPr>
-          <a:xfrm>
-            <a:off x="1280160" y="3995928"/>
-            <a:ext cx="1673352" cy="365760"/>
-          </a:xfrm>
-          <a:prstGeom prst="rect">
-            <a:avLst/>
-          </a:prstGeom>
-          <a:noFill/>
-          <a:ln/>
-        </p:spPr>
-        <p:txBody>
-          <a:bodyPr wrap="square" lIns="0" tIns="0" rIns="0" bIns="0" rtlCol="0" anchor="t"/>
-          <a:lstStyle/>
-          <a:p>
-            <a:pPr indent="0" marL="0">
-              <a:buNone/>
-            </a:pPr>
-            <a:r>
-              <a:rPr lang="en-US" sz="1200" dirty="0">
-                <a:solidFill>
-                  <a:schemeClr val="tx1"/>
-                </a:solidFill>
-              </a:rPr>
-              <a:t>Terraform describes AWS as code</a:t>
-            </a:r>
-            <a:endParaRPr lang="en-US" sz="1200" dirty="0"/>
-          </a:p>
-        </p:txBody>
-      </p:sp>
-      <p:sp>
-        <p:nvSpPr>
-          <p:cNvPr id="38" name="step 8 card"/>
-          <p:cNvSpPr/>
-          <p:nvPr/>
-        </p:nvSpPr>
-        <p:spPr>
-          <a:xfrm>
-            <a:off x="3278124" y="3511296"/>
-            <a:ext cx="2587752" cy="960120"/>
-          </a:xfrm>
-          <a:prstGeom prst="roundRect">
-            <a:avLst>
-              <a:gd name="adj" fmla="val 9524"/>
-            </a:avLst>
-          </a:prstGeom>
-          <a:solidFill>
-            <a:schemeClr val="bg2"/>
-          </a:solidFill>
-          <a:ln w="12700">
-            <a:solidFill>
-              <a:schemeClr val="bg2"/>
-            </a:solidFill>
-            <a:prstDash val="solid"/>
-          </a:ln>
-        </p:spPr>
-      </p:sp>
-      <p:sp>
-        <p:nvSpPr>
-          <p:cNvPr id="39" name="step 8 circle"/>
-          <p:cNvSpPr/>
-          <p:nvPr/>
-        </p:nvSpPr>
-        <p:spPr>
-          <a:xfrm>
-            <a:off x="3415284" y="3717036"/>
-            <a:ext cx="548640" cy="548640"/>
-          </a:xfrm>
-          <a:prstGeom prst="ellipse">
-            <a:avLst/>
-          </a:prstGeom>
-          <a:solidFill>
-            <a:schemeClr val="accent1"/>
-          </a:solidFill>
-          <a:ln w="12700">
-            <a:solidFill>
-              <a:schemeClr val="accent1"/>
-            </a:solidFill>
-            <a:prstDash val="solid"/>
-          </a:ln>
-        </p:spPr>
-      </p:sp>
-      <p:pic>
-        <p:nvPicPr>
-          <p:cNvPr id="40" name="step 8 icon" descr="step 8">    </p:cNvPr>
-          <p:cNvPicPr>
-            <a:picLocks noChangeAspect="1"/>
-          </p:cNvPicPr>
-          <p:nvPr/>
-        </p:nvPicPr>
-        <p:blipFill>
-          <a:blip r:embed="rId8"/>
-          <a:stretch>
-            <a:fillRect/>
-          </a:stretch>
-        </p:blipFill>
-        <p:spPr>
-          <a:xfrm>
-            <a:off x="3563417" y="3865169"/>
-            <a:ext cx="252374" cy="252374"/>
-          </a:xfrm>
-          <a:prstGeom prst="rect">
-            <a:avLst/>
-          </a:prstGeom>
-        </p:spPr>
-      </p:pic>
-      <p:sp>
-        <p:nvSpPr>
-          <p:cNvPr id="41" name="step 8 title"/>
-          <p:cNvSpPr txBox="1"/>
-          <p:nvPr/>
-        </p:nvSpPr>
-        <p:spPr>
-          <a:xfrm>
-            <a:off x="4101084" y="3666744"/>
-            <a:ext cx="1673352" cy="329184"/>
-          </a:xfrm>
-          <a:prstGeom prst="rect">
-            <a:avLst/>
-          </a:prstGeom>
-          <a:noFill/>
-          <a:ln/>
-        </p:spPr>
-        <p:txBody>
-          <a:bodyPr wrap="square" lIns="0" tIns="0" rIns="0" bIns="0" rtlCol="0" anchor="ctr"/>
-          <a:lstStyle/>
-          <a:p>
-            <a:pPr indent="0" marL="0">
-              <a:buNone/>
-            </a:pPr>
-            <a:r>
-              <a:rPr lang="en-US" sz="1600" b="1" dirty="0">
-                <a:solidFill>
-                  <a:schemeClr val="tx2"/>
-                </a:solidFill>
-              </a:rPr>
-              <a:t>Run it at scale</a:t>
-            </a:r>
-            <a:endParaRPr lang="en-US" sz="1600" dirty="0"/>
-          </a:p>
-        </p:txBody>
-      </p:sp>
-      <p:sp>
-        <p:nvSpPr>
-          <p:cNvPr id="42" name="step 8 text"/>
-          <p:cNvSpPr txBox="1"/>
-          <p:nvPr/>
-        </p:nvSpPr>
-        <p:spPr>
-          <a:xfrm>
-            <a:off x="4101084" y="3995928"/>
-            <a:ext cx="1673352" cy="365760"/>
-          </a:xfrm>
-          <a:prstGeom prst="rect">
-            <a:avLst/>
-          </a:prstGeom>
-          <a:noFill/>
-          <a:ln/>
-        </p:spPr>
-        <p:txBody>
-          <a:bodyPr wrap="square" lIns="0" tIns="0" rIns="0" bIns="0" rtlCol="0" anchor="t"/>
-          <a:lstStyle/>
-          <a:p>
-            <a:pPr indent="0" marL="0">
-              <a:buNone/>
-            </a:pPr>
-            <a:r>
-              <a:rPr lang="en-US" sz="1200" dirty="0">
-                <a:solidFill>
-                  <a:schemeClr val="tx1"/>
-                </a:solidFill>
-              </a:rPr>
-              <a:t>Kubernetes keeps copies alive</a:t>
-            </a:r>
-            <a:endParaRPr lang="en-US" sz="1200" dirty="0"/>
-          </a:p>
-        </p:txBody>
-      </p:sp>
-      <p:sp>
-        <p:nvSpPr>
-          <p:cNvPr id="43" name="step 9 card"/>
-          <p:cNvSpPr/>
-          <p:nvPr/>
-        </p:nvSpPr>
-        <p:spPr>
-          <a:xfrm>
-            <a:off x="6099048" y="3511296"/>
-            <a:ext cx="2587752" cy="960120"/>
-          </a:xfrm>
-          <a:prstGeom prst="roundRect">
-            <a:avLst>
-              <a:gd name="adj" fmla="val 9524"/>
-            </a:avLst>
-          </a:prstGeom>
-          <a:solidFill>
-            <a:schemeClr val="bg2"/>
-          </a:solidFill>
-          <a:ln w="12700">
-            <a:solidFill>
-              <a:schemeClr val="bg2"/>
-            </a:solidFill>
-            <a:prstDash val="solid"/>
-          </a:ln>
-        </p:spPr>
-      </p:sp>
-      <p:sp>
-        <p:nvSpPr>
-          <p:cNvPr id="44" name="step 9 circle"/>
-          <p:cNvSpPr/>
-          <p:nvPr/>
-        </p:nvSpPr>
-        <p:spPr>
-          <a:xfrm>
-            <a:off x="6236208" y="3717036"/>
-            <a:ext cx="548640" cy="548640"/>
-          </a:xfrm>
-          <a:prstGeom prst="ellipse">
-            <a:avLst/>
-          </a:prstGeom>
-          <a:solidFill>
-            <a:schemeClr val="accent1"/>
-          </a:solidFill>
-          <a:ln w="12700">
-            <a:solidFill>
-              <a:schemeClr val="accent1"/>
-            </a:solidFill>
-            <a:prstDash val="solid"/>
-          </a:ln>
-        </p:spPr>
-      </p:sp>
-      <p:pic>
-        <p:nvPicPr>
-          <p:cNvPr id="45" name="step 9 icon" descr="step 9">    </p:cNvPr>
-          <p:cNvPicPr>
-            <a:picLocks noChangeAspect="1"/>
-          </p:cNvPicPr>
-          <p:nvPr/>
-        </p:nvPicPr>
-        <p:blipFill>
-          <a:blip r:embed="rId9"/>
-          <a:stretch>
-            <a:fillRect/>
-          </a:stretch>
-        </p:blipFill>
-        <p:spPr>
-          <a:xfrm>
-            <a:off x="6384341" y="3865169"/>
-            <a:ext cx="252374" cy="252374"/>
-          </a:xfrm>
-          <a:prstGeom prst="rect">
-            <a:avLst/>
-          </a:prstGeom>
-        </p:spPr>
-      </p:pic>
-      <p:sp>
-        <p:nvSpPr>
-          <p:cNvPr id="46" name="step 9 title"/>
-          <p:cNvSpPr txBox="1"/>
-          <p:nvPr/>
-        </p:nvSpPr>
-        <p:spPr>
-          <a:xfrm>
-            <a:off x="6922008" y="3666744"/>
-            <a:ext cx="1673352" cy="329184"/>
-          </a:xfrm>
-          <a:prstGeom prst="rect">
-            <a:avLst/>
-          </a:prstGeom>
-          <a:noFill/>
-          <a:ln/>
-        </p:spPr>
-        <p:txBody>
-          <a:bodyPr wrap="square" lIns="0" tIns="0" rIns="0" bIns="0" rtlCol="0" anchor="ctr"/>
-          <a:lstStyle/>
-          <a:p>
-            <a:pPr indent="0" marL="0">
-              <a:buNone/>
-            </a:pPr>
-            <a:r>
-              <a:rPr lang="en-US" sz="1600" b="1" dirty="0">
-                <a:solidFill>
-                  <a:schemeClr val="tx2"/>
-                </a:solidFill>
-              </a:rPr>
-              <a:t>Watch it</a:t>
-            </a:r>
-            <a:endParaRPr lang="en-US" sz="1600" dirty="0"/>
-          </a:p>
-        </p:txBody>
-      </p:sp>
-      <p:sp>
-        <p:nvSpPr>
-          <p:cNvPr id="47" name="step 9 text"/>
-          <p:cNvSpPr txBox="1"/>
-          <p:nvPr/>
-        </p:nvSpPr>
-        <p:spPr>
-          <a:xfrm>
-            <a:off x="6922008" y="3995928"/>
-            <a:ext cx="1673352" cy="365760"/>
-          </a:xfrm>
-          <a:prstGeom prst="rect">
-            <a:avLst/>
-          </a:prstGeom>
-          <a:noFill/>
-          <a:ln/>
-        </p:spPr>
-        <p:txBody>
-          <a:bodyPr wrap="square" lIns="0" tIns="0" rIns="0" bIns="0" rtlCol="0" anchor="t"/>
-          <a:lstStyle/>
-          <a:p>
-            <a:pPr indent="0" marL="0">
-              <a:buNone/>
-            </a:pPr>
-            <a:r>
-              <a:rPr lang="en-US" sz="1200" dirty="0">
-                <a:solidFill>
-                  <a:schemeClr val="tx1"/>
-                </a:solidFill>
-              </a:rPr>
-              <a:t>Prometheus and Grafana</a:t>
-            </a:r>
-            <a:endParaRPr lang="en-US" sz="1200" dirty="0"/>
+              <a:t>Each part runs in its own container.</a:t>
+            </a:r>
+            <a:endParaRPr lang="en-US" sz="1800" dirty="0"/>
           </a:p>
         </p:txBody>
       </p:sp>
@@ -6882,6 +7869,1446 @@
                   <a:schemeClr val="tx2"/>
                 </a:solidFill>
               </a:rPr>
+              <a:t>How we built it</a:t>
+            </a:r>
+            <a:endParaRPr lang="en-US" sz="3400" dirty="0"/>
+          </a:p>
+        </p:txBody>
+      </p:sp>
+      <p:sp>
+        <p:nvSpPr>
+          <p:cNvPr id="3" name="step 1 card"/>
+          <p:cNvSpPr/>
+          <p:nvPr/>
+        </p:nvSpPr>
+        <p:spPr>
+          <a:xfrm>
+            <a:off x="457200" y="1280160"/>
+            <a:ext cx="2587752" cy="914400"/>
+          </a:xfrm>
+          <a:prstGeom prst="roundRect">
+            <a:avLst>
+              <a:gd name="adj" fmla="val 10000"/>
+            </a:avLst>
+          </a:prstGeom>
+          <a:solidFill>
+            <a:schemeClr val="bg2"/>
+          </a:solidFill>
+          <a:ln w="12700">
+            <a:solidFill>
+              <a:schemeClr val="bg2"/>
+            </a:solidFill>
+            <a:prstDash val="solid"/>
+          </a:ln>
+        </p:spPr>
+      </p:sp>
+      <p:sp>
+        <p:nvSpPr>
+          <p:cNvPr id="4" name="step 1 circle"/>
+          <p:cNvSpPr/>
+          <p:nvPr/>
+        </p:nvSpPr>
+        <p:spPr>
+          <a:xfrm>
+            <a:off x="594360" y="1463040"/>
+            <a:ext cx="548640" cy="548640"/>
+          </a:xfrm>
+          <a:prstGeom prst="ellipse">
+            <a:avLst/>
+          </a:prstGeom>
+          <a:solidFill>
+            <a:schemeClr val="accent1"/>
+          </a:solidFill>
+          <a:ln w="12700">
+            <a:solidFill>
+              <a:schemeClr val="accent1"/>
+            </a:solidFill>
+            <a:prstDash val="solid"/>
+          </a:ln>
+        </p:spPr>
+      </p:sp>
+      <p:pic>
+        <p:nvPicPr>
+          <p:cNvPr id="5" name="step 1 icon" descr="step 1">    </p:cNvPr>
+          <p:cNvPicPr>
+            <a:picLocks noChangeAspect="1"/>
+          </p:cNvPicPr>
+          <p:nvPr/>
+        </p:nvPicPr>
+        <p:blipFill>
+          <a:blip r:embed="rId1"/>
+          <a:stretch>
+            <a:fillRect/>
+          </a:stretch>
+        </p:blipFill>
+        <p:spPr>
+          <a:xfrm>
+            <a:off x="742493" y="1611173"/>
+            <a:ext cx="252374" cy="252374"/>
+          </a:xfrm>
+          <a:prstGeom prst="rect">
+            <a:avLst/>
+          </a:prstGeom>
+        </p:spPr>
+      </p:pic>
+      <p:sp>
+        <p:nvSpPr>
+          <p:cNvPr id="6" name="step 1 title"/>
+          <p:cNvSpPr txBox="1"/>
+          <p:nvPr/>
+        </p:nvSpPr>
+        <p:spPr>
+          <a:xfrm>
+            <a:off x="1280160" y="1417320"/>
+            <a:ext cx="1673352" cy="329184"/>
+          </a:xfrm>
+          <a:prstGeom prst="rect">
+            <a:avLst/>
+          </a:prstGeom>
+          <a:noFill/>
+          <a:ln/>
+        </p:spPr>
+        <p:txBody>
+          <a:bodyPr wrap="square" lIns="0" tIns="0" rIns="0" bIns="0" rtlCol="0" anchor="ctr"/>
+          <a:lstStyle/>
+          <a:p>
+            <a:pPr indent="0" marL="0">
+              <a:buNone/>
+            </a:pPr>
+            <a:r>
+              <a:rPr lang="en-US" sz="1600" b="1" dirty="0">
+                <a:solidFill>
+                  <a:schemeClr val="tx2"/>
+                </a:solidFill>
+              </a:rPr>
+              <a:t>Build the app</a:t>
+            </a:r>
+            <a:endParaRPr lang="en-US" sz="1600" dirty="0"/>
+          </a:p>
+        </p:txBody>
+      </p:sp>
+      <p:sp>
+        <p:nvSpPr>
+          <p:cNvPr id="7" name="step 1 text"/>
+          <p:cNvSpPr txBox="1"/>
+          <p:nvPr/>
+        </p:nvSpPr>
+        <p:spPr>
+          <a:xfrm>
+            <a:off x="1280160" y="1755648"/>
+            <a:ext cx="1673352" cy="320040"/>
+          </a:xfrm>
+          <a:prstGeom prst="rect">
+            <a:avLst/>
+          </a:prstGeom>
+          <a:noFill/>
+          <a:ln/>
+        </p:spPr>
+        <p:txBody>
+          <a:bodyPr wrap="square" lIns="0" tIns="0" rIns="0" bIns="0" rtlCol="0" anchor="t"/>
+          <a:lstStyle/>
+          <a:p>
+            <a:pPr indent="0" marL="0">
+              <a:buNone/>
+            </a:pPr>
+            <a:r>
+              <a:rPr lang="en-US" sz="1200" dirty="0">
+                <a:solidFill>
+                  <a:schemeClr val="tx1"/>
+                </a:solidFill>
+              </a:rPr>
+              <a:t>Screen, brain, memory</a:t>
+            </a:r>
+            <a:endParaRPr lang="en-US" sz="1200" dirty="0"/>
+          </a:p>
+        </p:txBody>
+      </p:sp>
+      <p:sp>
+        <p:nvSpPr>
+          <p:cNvPr id="8" name="step 2 card"/>
+          <p:cNvSpPr/>
+          <p:nvPr/>
+        </p:nvSpPr>
+        <p:spPr>
+          <a:xfrm>
+            <a:off x="3278124" y="1280160"/>
+            <a:ext cx="2587752" cy="914400"/>
+          </a:xfrm>
+          <a:prstGeom prst="roundRect">
+            <a:avLst>
+              <a:gd name="adj" fmla="val 10000"/>
+            </a:avLst>
+          </a:prstGeom>
+          <a:solidFill>
+            <a:schemeClr val="bg2"/>
+          </a:solidFill>
+          <a:ln w="12700">
+            <a:solidFill>
+              <a:schemeClr val="bg2"/>
+            </a:solidFill>
+            <a:prstDash val="solid"/>
+          </a:ln>
+        </p:spPr>
+      </p:sp>
+      <p:sp>
+        <p:nvSpPr>
+          <p:cNvPr id="9" name="step 2 circle"/>
+          <p:cNvSpPr/>
+          <p:nvPr/>
+        </p:nvSpPr>
+        <p:spPr>
+          <a:xfrm>
+            <a:off x="3415284" y="1463040"/>
+            <a:ext cx="548640" cy="548640"/>
+          </a:xfrm>
+          <a:prstGeom prst="ellipse">
+            <a:avLst/>
+          </a:prstGeom>
+          <a:solidFill>
+            <a:schemeClr val="accent1"/>
+          </a:solidFill>
+          <a:ln w="12700">
+            <a:solidFill>
+              <a:schemeClr val="accent1"/>
+            </a:solidFill>
+            <a:prstDash val="solid"/>
+          </a:ln>
+        </p:spPr>
+      </p:sp>
+      <p:pic>
+        <p:nvPicPr>
+          <p:cNvPr id="10" name="step 2 icon" descr="step 2">    </p:cNvPr>
+          <p:cNvPicPr>
+            <a:picLocks noChangeAspect="1"/>
+          </p:cNvPicPr>
+          <p:nvPr/>
+        </p:nvPicPr>
+        <p:blipFill>
+          <a:blip r:embed="rId2"/>
+          <a:stretch>
+            <a:fillRect/>
+          </a:stretch>
+        </p:blipFill>
+        <p:spPr>
+          <a:xfrm>
+            <a:off x="3563417" y="1611173"/>
+            <a:ext cx="252374" cy="252374"/>
+          </a:xfrm>
+          <a:prstGeom prst="rect">
+            <a:avLst/>
+          </a:prstGeom>
+        </p:spPr>
+      </p:pic>
+      <p:sp>
+        <p:nvSpPr>
+          <p:cNvPr id="11" name="step 2 title"/>
+          <p:cNvSpPr txBox="1"/>
+          <p:nvPr/>
+        </p:nvSpPr>
+        <p:spPr>
+          <a:xfrm>
+            <a:off x="4101084" y="1417320"/>
+            <a:ext cx="1673352" cy="329184"/>
+          </a:xfrm>
+          <a:prstGeom prst="rect">
+            <a:avLst/>
+          </a:prstGeom>
+          <a:noFill/>
+          <a:ln/>
+        </p:spPr>
+        <p:txBody>
+          <a:bodyPr wrap="square" lIns="0" tIns="0" rIns="0" bIns="0" rtlCol="0" anchor="ctr"/>
+          <a:lstStyle/>
+          <a:p>
+            <a:pPr indent="0" marL="0">
+              <a:buNone/>
+            </a:pPr>
+            <a:r>
+              <a:rPr lang="en-US" sz="1600" b="1" dirty="0">
+                <a:solidFill>
+                  <a:schemeClr val="tx2"/>
+                </a:solidFill>
+              </a:rPr>
+              <a:t>Test it</a:t>
+            </a:r>
+            <a:endParaRPr lang="en-US" sz="1600" dirty="0"/>
+          </a:p>
+        </p:txBody>
+      </p:sp>
+      <p:sp>
+        <p:nvSpPr>
+          <p:cNvPr id="12" name="step 2 text"/>
+          <p:cNvSpPr txBox="1"/>
+          <p:nvPr/>
+        </p:nvSpPr>
+        <p:spPr>
+          <a:xfrm>
+            <a:off x="4101084" y="1755648"/>
+            <a:ext cx="1673352" cy="320040"/>
+          </a:xfrm>
+          <a:prstGeom prst="rect">
+            <a:avLst/>
+          </a:prstGeom>
+          <a:noFill/>
+          <a:ln/>
+        </p:spPr>
+        <p:txBody>
+          <a:bodyPr wrap="square" lIns="0" tIns="0" rIns="0" bIns="0" rtlCol="0" anchor="t"/>
+          <a:lstStyle/>
+          <a:p>
+            <a:pPr indent="0" marL="0">
+              <a:buNone/>
+            </a:pPr>
+            <a:r>
+              <a:rPr lang="en-US" sz="1200" dirty="0">
+                <a:solidFill>
+                  <a:schemeClr val="tx1"/>
+                </a:solidFill>
+              </a:rPr>
+              <a:t>31 automatic checks</a:t>
+            </a:r>
+            <a:endParaRPr lang="en-US" sz="1200" dirty="0"/>
+          </a:p>
+        </p:txBody>
+      </p:sp>
+      <p:sp>
+        <p:nvSpPr>
+          <p:cNvPr id="13" name="step 3 card"/>
+          <p:cNvSpPr/>
+          <p:nvPr/>
+        </p:nvSpPr>
+        <p:spPr>
+          <a:xfrm>
+            <a:off x="6099048" y="1280160"/>
+            <a:ext cx="2587752" cy="914400"/>
+          </a:xfrm>
+          <a:prstGeom prst="roundRect">
+            <a:avLst>
+              <a:gd name="adj" fmla="val 10000"/>
+            </a:avLst>
+          </a:prstGeom>
+          <a:solidFill>
+            <a:schemeClr val="bg2"/>
+          </a:solidFill>
+          <a:ln w="12700">
+            <a:solidFill>
+              <a:schemeClr val="bg2"/>
+            </a:solidFill>
+            <a:prstDash val="solid"/>
+          </a:ln>
+        </p:spPr>
+      </p:sp>
+      <p:sp>
+        <p:nvSpPr>
+          <p:cNvPr id="14" name="step 3 circle"/>
+          <p:cNvSpPr/>
+          <p:nvPr/>
+        </p:nvSpPr>
+        <p:spPr>
+          <a:xfrm>
+            <a:off x="6236208" y="1463040"/>
+            <a:ext cx="548640" cy="548640"/>
+          </a:xfrm>
+          <a:prstGeom prst="ellipse">
+            <a:avLst/>
+          </a:prstGeom>
+          <a:solidFill>
+            <a:schemeClr val="accent1"/>
+          </a:solidFill>
+          <a:ln w="12700">
+            <a:solidFill>
+              <a:schemeClr val="accent1"/>
+            </a:solidFill>
+            <a:prstDash val="solid"/>
+          </a:ln>
+        </p:spPr>
+      </p:sp>
+      <p:pic>
+        <p:nvPicPr>
+          <p:cNvPr id="15" name="step 3 icon" descr="step 3">    </p:cNvPr>
+          <p:cNvPicPr>
+            <a:picLocks noChangeAspect="1"/>
+          </p:cNvPicPr>
+          <p:nvPr/>
+        </p:nvPicPr>
+        <p:blipFill>
+          <a:blip r:embed="rId3"/>
+          <a:stretch>
+            <a:fillRect/>
+          </a:stretch>
+        </p:blipFill>
+        <p:spPr>
+          <a:xfrm>
+            <a:off x="6384341" y="1611173"/>
+            <a:ext cx="252374" cy="252374"/>
+          </a:xfrm>
+          <a:prstGeom prst="rect">
+            <a:avLst/>
+          </a:prstGeom>
+        </p:spPr>
+      </p:pic>
+      <p:sp>
+        <p:nvSpPr>
+          <p:cNvPr id="16" name="step 3 title"/>
+          <p:cNvSpPr txBox="1"/>
+          <p:nvPr/>
+        </p:nvSpPr>
+        <p:spPr>
+          <a:xfrm>
+            <a:off x="6922008" y="1417320"/>
+            <a:ext cx="1673352" cy="329184"/>
+          </a:xfrm>
+          <a:prstGeom prst="rect">
+            <a:avLst/>
+          </a:prstGeom>
+          <a:noFill/>
+          <a:ln/>
+        </p:spPr>
+        <p:txBody>
+          <a:bodyPr wrap="square" lIns="0" tIns="0" rIns="0" bIns="0" rtlCol="0" anchor="ctr"/>
+          <a:lstStyle/>
+          <a:p>
+            <a:pPr indent="0" marL="0">
+              <a:buNone/>
+            </a:pPr>
+            <a:r>
+              <a:rPr lang="en-US" sz="1600" b="1" dirty="0">
+                <a:solidFill>
+                  <a:schemeClr val="tx2"/>
+                </a:solidFill>
+              </a:rPr>
+              <a:t>Save the history</a:t>
+            </a:r>
+            <a:endParaRPr lang="en-US" sz="1600" dirty="0"/>
+          </a:p>
+        </p:txBody>
+      </p:sp>
+      <p:sp>
+        <p:nvSpPr>
+          <p:cNvPr id="17" name="step 3 text"/>
+          <p:cNvSpPr txBox="1"/>
+          <p:nvPr/>
+        </p:nvSpPr>
+        <p:spPr>
+          <a:xfrm>
+            <a:off x="6922008" y="1755648"/>
+            <a:ext cx="1673352" cy="320040"/>
+          </a:xfrm>
+          <a:prstGeom prst="rect">
+            <a:avLst/>
+          </a:prstGeom>
+          <a:noFill/>
+          <a:ln/>
+        </p:spPr>
+        <p:txBody>
+          <a:bodyPr wrap="square" lIns="0" tIns="0" rIns="0" bIns="0" rtlCol="0" anchor="t"/>
+          <a:lstStyle/>
+          <a:p>
+            <a:pPr indent="0" marL="0">
+              <a:buNone/>
+            </a:pPr>
+            <a:r>
+              <a:rPr lang="en-US" sz="1200" dirty="0">
+                <a:solidFill>
+                  <a:schemeClr val="tx1"/>
+                </a:solidFill>
+              </a:rPr>
+              <a:t>Git and GitHub</a:t>
+            </a:r>
+            <a:endParaRPr lang="en-US" sz="1200" dirty="0"/>
+          </a:p>
+        </p:txBody>
+      </p:sp>
+      <p:sp>
+        <p:nvSpPr>
+          <p:cNvPr id="18" name="step 4 card"/>
+          <p:cNvSpPr/>
+          <p:nvPr/>
+        </p:nvSpPr>
+        <p:spPr>
+          <a:xfrm>
+            <a:off x="457200" y="2377440"/>
+            <a:ext cx="2587752" cy="914400"/>
+          </a:xfrm>
+          <a:prstGeom prst="roundRect">
+            <a:avLst>
+              <a:gd name="adj" fmla="val 10000"/>
+            </a:avLst>
+          </a:prstGeom>
+          <a:solidFill>
+            <a:schemeClr val="bg2"/>
+          </a:solidFill>
+          <a:ln w="12700">
+            <a:solidFill>
+              <a:schemeClr val="bg2"/>
+            </a:solidFill>
+            <a:prstDash val="solid"/>
+          </a:ln>
+        </p:spPr>
+      </p:sp>
+      <p:sp>
+        <p:nvSpPr>
+          <p:cNvPr id="19" name="step 4 circle"/>
+          <p:cNvSpPr/>
+          <p:nvPr/>
+        </p:nvSpPr>
+        <p:spPr>
+          <a:xfrm>
+            <a:off x="594360" y="2560320"/>
+            <a:ext cx="548640" cy="548640"/>
+          </a:xfrm>
+          <a:prstGeom prst="ellipse">
+            <a:avLst/>
+          </a:prstGeom>
+          <a:solidFill>
+            <a:schemeClr val="accent1"/>
+          </a:solidFill>
+          <a:ln w="12700">
+            <a:solidFill>
+              <a:schemeClr val="accent1"/>
+            </a:solidFill>
+            <a:prstDash val="solid"/>
+          </a:ln>
+        </p:spPr>
+      </p:sp>
+      <p:pic>
+        <p:nvPicPr>
+          <p:cNvPr id="20" name="step 4 icon" descr="step 4">    </p:cNvPr>
+          <p:cNvPicPr>
+            <a:picLocks noChangeAspect="1"/>
+          </p:cNvPicPr>
+          <p:nvPr/>
+        </p:nvPicPr>
+        <p:blipFill>
+          <a:blip r:embed="rId4"/>
+          <a:stretch>
+            <a:fillRect/>
+          </a:stretch>
+        </p:blipFill>
+        <p:spPr>
+          <a:xfrm>
+            <a:off x="742493" y="2708453"/>
+            <a:ext cx="252374" cy="252374"/>
+          </a:xfrm>
+          <a:prstGeom prst="rect">
+            <a:avLst/>
+          </a:prstGeom>
+        </p:spPr>
+      </p:pic>
+      <p:sp>
+        <p:nvSpPr>
+          <p:cNvPr id="21" name="step 4 title"/>
+          <p:cNvSpPr txBox="1"/>
+          <p:nvPr/>
+        </p:nvSpPr>
+        <p:spPr>
+          <a:xfrm>
+            <a:off x="1280160" y="2514600"/>
+            <a:ext cx="1673352" cy="329184"/>
+          </a:xfrm>
+          <a:prstGeom prst="rect">
+            <a:avLst/>
+          </a:prstGeom>
+          <a:noFill/>
+          <a:ln/>
+        </p:spPr>
+        <p:txBody>
+          <a:bodyPr wrap="square" lIns="0" tIns="0" rIns="0" bIns="0" rtlCol="0" anchor="ctr"/>
+          <a:lstStyle/>
+          <a:p>
+            <a:pPr indent="0" marL="0">
+              <a:buNone/>
+            </a:pPr>
+            <a:r>
+              <a:rPr lang="en-US" sz="1600" b="1" dirty="0">
+                <a:solidFill>
+                  <a:schemeClr val="tx2"/>
+                </a:solidFill>
+              </a:rPr>
+              <a:t>Package it</a:t>
+            </a:r>
+            <a:endParaRPr lang="en-US" sz="1600" dirty="0"/>
+          </a:p>
+        </p:txBody>
+      </p:sp>
+      <p:sp>
+        <p:nvSpPr>
+          <p:cNvPr id="22" name="step 4 text"/>
+          <p:cNvSpPr txBox="1"/>
+          <p:nvPr/>
+        </p:nvSpPr>
+        <p:spPr>
+          <a:xfrm>
+            <a:off x="1280160" y="2852928"/>
+            <a:ext cx="1673352" cy="320040"/>
+          </a:xfrm>
+          <a:prstGeom prst="rect">
+            <a:avLst/>
+          </a:prstGeom>
+          <a:noFill/>
+          <a:ln/>
+        </p:spPr>
+        <p:txBody>
+          <a:bodyPr wrap="square" lIns="0" tIns="0" rIns="0" bIns="0" rtlCol="0" anchor="t"/>
+          <a:lstStyle/>
+          <a:p>
+            <a:pPr indent="0" marL="0">
+              <a:buNone/>
+            </a:pPr>
+            <a:r>
+              <a:rPr lang="en-US" sz="1200" dirty="0">
+                <a:solidFill>
+                  <a:schemeClr val="tx1"/>
+                </a:solidFill>
+              </a:rPr>
+              <a:t>Docker containers</a:t>
+            </a:r>
+            <a:endParaRPr lang="en-US" sz="1200" dirty="0"/>
+          </a:p>
+        </p:txBody>
+      </p:sp>
+      <p:sp>
+        <p:nvSpPr>
+          <p:cNvPr id="23" name="step 5 card"/>
+          <p:cNvSpPr/>
+          <p:nvPr/>
+        </p:nvSpPr>
+        <p:spPr>
+          <a:xfrm>
+            <a:off x="3278124" y="2377440"/>
+            <a:ext cx="2587752" cy="914400"/>
+          </a:xfrm>
+          <a:prstGeom prst="roundRect">
+            <a:avLst>
+              <a:gd name="adj" fmla="val 10000"/>
+            </a:avLst>
+          </a:prstGeom>
+          <a:solidFill>
+            <a:schemeClr val="bg2"/>
+          </a:solidFill>
+          <a:ln w="12700">
+            <a:solidFill>
+              <a:schemeClr val="bg2"/>
+            </a:solidFill>
+            <a:prstDash val="solid"/>
+          </a:ln>
+        </p:spPr>
+      </p:sp>
+      <p:sp>
+        <p:nvSpPr>
+          <p:cNvPr id="24" name="step 5 circle"/>
+          <p:cNvSpPr/>
+          <p:nvPr/>
+        </p:nvSpPr>
+        <p:spPr>
+          <a:xfrm>
+            <a:off x="3415284" y="2560320"/>
+            <a:ext cx="548640" cy="548640"/>
+          </a:xfrm>
+          <a:prstGeom prst="ellipse">
+            <a:avLst/>
+          </a:prstGeom>
+          <a:solidFill>
+            <a:schemeClr val="accent1"/>
+          </a:solidFill>
+          <a:ln w="12700">
+            <a:solidFill>
+              <a:schemeClr val="accent1"/>
+            </a:solidFill>
+            <a:prstDash val="solid"/>
+          </a:ln>
+        </p:spPr>
+      </p:sp>
+      <p:pic>
+        <p:nvPicPr>
+          <p:cNvPr id="25" name="step 5 icon" descr="step 5">    </p:cNvPr>
+          <p:cNvPicPr>
+            <a:picLocks noChangeAspect="1"/>
+          </p:cNvPicPr>
+          <p:nvPr/>
+        </p:nvPicPr>
+        <p:blipFill>
+          <a:blip r:embed="rId5"/>
+          <a:stretch>
+            <a:fillRect/>
+          </a:stretch>
+        </p:blipFill>
+        <p:spPr>
+          <a:xfrm>
+            <a:off x="3563417" y="2708453"/>
+            <a:ext cx="252374" cy="252374"/>
+          </a:xfrm>
+          <a:prstGeom prst="rect">
+            <a:avLst/>
+          </a:prstGeom>
+        </p:spPr>
+      </p:pic>
+      <p:sp>
+        <p:nvSpPr>
+          <p:cNvPr id="26" name="step 5 title"/>
+          <p:cNvSpPr txBox="1"/>
+          <p:nvPr/>
+        </p:nvSpPr>
+        <p:spPr>
+          <a:xfrm>
+            <a:off x="4101084" y="2514600"/>
+            <a:ext cx="1673352" cy="329184"/>
+          </a:xfrm>
+          <a:prstGeom prst="rect">
+            <a:avLst/>
+          </a:prstGeom>
+          <a:noFill/>
+          <a:ln/>
+        </p:spPr>
+        <p:txBody>
+          <a:bodyPr wrap="square" lIns="0" tIns="0" rIns="0" bIns="0" rtlCol="0" anchor="ctr"/>
+          <a:lstStyle/>
+          <a:p>
+            <a:pPr indent="0" marL="0">
+              <a:buNone/>
+            </a:pPr>
+            <a:r>
+              <a:rPr lang="en-US" sz="1600" b="1" dirty="0">
+                <a:solidFill>
+                  <a:schemeClr val="tx2"/>
+                </a:solidFill>
+              </a:rPr>
+              <a:t>Automate it</a:t>
+            </a:r>
+            <a:endParaRPr lang="en-US" sz="1600" dirty="0"/>
+          </a:p>
+        </p:txBody>
+      </p:sp>
+      <p:sp>
+        <p:nvSpPr>
+          <p:cNvPr id="27" name="step 5 text"/>
+          <p:cNvSpPr txBox="1"/>
+          <p:nvPr/>
+        </p:nvSpPr>
+        <p:spPr>
+          <a:xfrm>
+            <a:off x="4101084" y="2852928"/>
+            <a:ext cx="1673352" cy="320040"/>
+          </a:xfrm>
+          <a:prstGeom prst="rect">
+            <a:avLst/>
+          </a:prstGeom>
+          <a:noFill/>
+          <a:ln/>
+        </p:spPr>
+        <p:txBody>
+          <a:bodyPr wrap="square" lIns="0" tIns="0" rIns="0" bIns="0" rtlCol="0" anchor="t"/>
+          <a:lstStyle/>
+          <a:p>
+            <a:pPr indent="0" marL="0">
+              <a:buNone/>
+            </a:pPr>
+            <a:r>
+              <a:rPr lang="en-US" sz="1200" dirty="0">
+                <a:solidFill>
+                  <a:schemeClr val="tx1"/>
+                </a:solidFill>
+              </a:rPr>
+              <a:t>Runs on every push</a:t>
+            </a:r>
+            <a:endParaRPr lang="en-US" sz="1200" dirty="0"/>
+          </a:p>
+        </p:txBody>
+      </p:sp>
+      <p:sp>
+        <p:nvSpPr>
+          <p:cNvPr id="28" name="step 6 card"/>
+          <p:cNvSpPr/>
+          <p:nvPr/>
+        </p:nvSpPr>
+        <p:spPr>
+          <a:xfrm>
+            <a:off x="6099048" y="2377440"/>
+            <a:ext cx="2587752" cy="914400"/>
+          </a:xfrm>
+          <a:prstGeom prst="roundRect">
+            <a:avLst>
+              <a:gd name="adj" fmla="val 10000"/>
+            </a:avLst>
+          </a:prstGeom>
+          <a:solidFill>
+            <a:schemeClr val="bg2"/>
+          </a:solidFill>
+          <a:ln w="12700">
+            <a:solidFill>
+              <a:schemeClr val="bg2"/>
+            </a:solidFill>
+            <a:prstDash val="solid"/>
+          </a:ln>
+        </p:spPr>
+      </p:sp>
+      <p:sp>
+        <p:nvSpPr>
+          <p:cNvPr id="29" name="step 6 circle"/>
+          <p:cNvSpPr/>
+          <p:nvPr/>
+        </p:nvSpPr>
+        <p:spPr>
+          <a:xfrm>
+            <a:off x="6236208" y="2560320"/>
+            <a:ext cx="548640" cy="548640"/>
+          </a:xfrm>
+          <a:prstGeom prst="ellipse">
+            <a:avLst/>
+          </a:prstGeom>
+          <a:solidFill>
+            <a:schemeClr val="accent1"/>
+          </a:solidFill>
+          <a:ln w="12700">
+            <a:solidFill>
+              <a:schemeClr val="accent1"/>
+            </a:solidFill>
+            <a:prstDash val="solid"/>
+          </a:ln>
+        </p:spPr>
+      </p:sp>
+      <p:pic>
+        <p:nvPicPr>
+          <p:cNvPr id="30" name="step 6 icon" descr="step 6">    </p:cNvPr>
+          <p:cNvPicPr>
+            <a:picLocks noChangeAspect="1"/>
+          </p:cNvPicPr>
+          <p:nvPr/>
+        </p:nvPicPr>
+        <p:blipFill>
+          <a:blip r:embed="rId6"/>
+          <a:stretch>
+            <a:fillRect/>
+          </a:stretch>
+        </p:blipFill>
+        <p:spPr>
+          <a:xfrm>
+            <a:off x="6384341" y="2708453"/>
+            <a:ext cx="252374" cy="252374"/>
+          </a:xfrm>
+          <a:prstGeom prst="rect">
+            <a:avLst/>
+          </a:prstGeom>
+        </p:spPr>
+      </p:pic>
+      <p:sp>
+        <p:nvSpPr>
+          <p:cNvPr id="31" name="step 6 title"/>
+          <p:cNvSpPr txBox="1"/>
+          <p:nvPr/>
+        </p:nvSpPr>
+        <p:spPr>
+          <a:xfrm>
+            <a:off x="6922008" y="2514600"/>
+            <a:ext cx="1673352" cy="329184"/>
+          </a:xfrm>
+          <a:prstGeom prst="rect">
+            <a:avLst/>
+          </a:prstGeom>
+          <a:noFill/>
+          <a:ln/>
+        </p:spPr>
+        <p:txBody>
+          <a:bodyPr wrap="square" lIns="0" tIns="0" rIns="0" bIns="0" rtlCol="0" anchor="ctr"/>
+          <a:lstStyle/>
+          <a:p>
+            <a:pPr indent="0" marL="0">
+              <a:buNone/>
+            </a:pPr>
+            <a:r>
+              <a:rPr lang="en-US" sz="1600" b="1" dirty="0">
+                <a:solidFill>
+                  <a:schemeClr val="tx2"/>
+                </a:solidFill>
+              </a:rPr>
+              <a:t>Scan for risks</a:t>
+            </a:r>
+            <a:endParaRPr lang="en-US" sz="1600" dirty="0"/>
+          </a:p>
+        </p:txBody>
+      </p:sp>
+      <p:sp>
+        <p:nvSpPr>
+          <p:cNvPr id="32" name="step 6 text"/>
+          <p:cNvSpPr txBox="1"/>
+          <p:nvPr/>
+        </p:nvSpPr>
+        <p:spPr>
+          <a:xfrm>
+            <a:off x="6922008" y="2852928"/>
+            <a:ext cx="1673352" cy="320040"/>
+          </a:xfrm>
+          <a:prstGeom prst="rect">
+            <a:avLst/>
+          </a:prstGeom>
+          <a:noFill/>
+          <a:ln/>
+        </p:spPr>
+        <p:txBody>
+          <a:bodyPr wrap="square" lIns="0" tIns="0" rIns="0" bIns="0" rtlCol="0" anchor="t"/>
+          <a:lstStyle/>
+          <a:p>
+            <a:pPr indent="0" marL="0">
+              <a:buNone/>
+            </a:pPr>
+            <a:r>
+              <a:rPr lang="en-US" sz="1200" dirty="0">
+                <a:solidFill>
+                  <a:schemeClr val="tx1"/>
+                </a:solidFill>
+              </a:rPr>
+              <a:t>Trivy</a:t>
+            </a:r>
+            <a:endParaRPr lang="en-US" sz="1200" dirty="0"/>
+          </a:p>
+        </p:txBody>
+      </p:sp>
+      <p:sp>
+        <p:nvSpPr>
+          <p:cNvPr id="33" name="step 7 card"/>
+          <p:cNvSpPr/>
+          <p:nvPr/>
+        </p:nvSpPr>
+        <p:spPr>
+          <a:xfrm>
+            <a:off x="457200" y="3474720"/>
+            <a:ext cx="2587752" cy="914400"/>
+          </a:xfrm>
+          <a:prstGeom prst="roundRect">
+            <a:avLst>
+              <a:gd name="adj" fmla="val 10000"/>
+            </a:avLst>
+          </a:prstGeom>
+          <a:solidFill>
+            <a:schemeClr val="bg2"/>
+          </a:solidFill>
+          <a:ln w="12700">
+            <a:solidFill>
+              <a:schemeClr val="bg2"/>
+            </a:solidFill>
+            <a:prstDash val="solid"/>
+          </a:ln>
+        </p:spPr>
+      </p:sp>
+      <p:sp>
+        <p:nvSpPr>
+          <p:cNvPr id="34" name="step 7 circle"/>
+          <p:cNvSpPr/>
+          <p:nvPr/>
+        </p:nvSpPr>
+        <p:spPr>
+          <a:xfrm>
+            <a:off x="594360" y="3657600"/>
+            <a:ext cx="548640" cy="548640"/>
+          </a:xfrm>
+          <a:prstGeom prst="ellipse">
+            <a:avLst/>
+          </a:prstGeom>
+          <a:solidFill>
+            <a:schemeClr val="accent1"/>
+          </a:solidFill>
+          <a:ln w="12700">
+            <a:solidFill>
+              <a:schemeClr val="accent1"/>
+            </a:solidFill>
+            <a:prstDash val="solid"/>
+          </a:ln>
+        </p:spPr>
+      </p:sp>
+      <p:pic>
+        <p:nvPicPr>
+          <p:cNvPr id="35" name="step 7 icon" descr="step 7">    </p:cNvPr>
+          <p:cNvPicPr>
+            <a:picLocks noChangeAspect="1"/>
+          </p:cNvPicPr>
+          <p:nvPr/>
+        </p:nvPicPr>
+        <p:blipFill>
+          <a:blip r:embed="rId7"/>
+          <a:stretch>
+            <a:fillRect/>
+          </a:stretch>
+        </p:blipFill>
+        <p:spPr>
+          <a:xfrm>
+            <a:off x="742493" y="3805733"/>
+            <a:ext cx="252374" cy="252374"/>
+          </a:xfrm>
+          <a:prstGeom prst="rect">
+            <a:avLst/>
+          </a:prstGeom>
+        </p:spPr>
+      </p:pic>
+      <p:sp>
+        <p:nvSpPr>
+          <p:cNvPr id="36" name="step 7 title"/>
+          <p:cNvSpPr txBox="1"/>
+          <p:nvPr/>
+        </p:nvSpPr>
+        <p:spPr>
+          <a:xfrm>
+            <a:off x="1280160" y="3611880"/>
+            <a:ext cx="1673352" cy="329184"/>
+          </a:xfrm>
+          <a:prstGeom prst="rect">
+            <a:avLst/>
+          </a:prstGeom>
+          <a:noFill/>
+          <a:ln/>
+        </p:spPr>
+        <p:txBody>
+          <a:bodyPr wrap="square" lIns="0" tIns="0" rIns="0" bIns="0" rtlCol="0" anchor="ctr"/>
+          <a:lstStyle/>
+          <a:p>
+            <a:pPr indent="0" marL="0">
+              <a:buNone/>
+            </a:pPr>
+            <a:r>
+              <a:rPr lang="en-US" sz="1600" b="1" dirty="0">
+                <a:solidFill>
+                  <a:schemeClr val="tx2"/>
+                </a:solidFill>
+              </a:rPr>
+              <a:t>Plan the cloud</a:t>
+            </a:r>
+            <a:endParaRPr lang="en-US" sz="1600" dirty="0"/>
+          </a:p>
+        </p:txBody>
+      </p:sp>
+      <p:sp>
+        <p:nvSpPr>
+          <p:cNvPr id="37" name="step 7 text"/>
+          <p:cNvSpPr txBox="1"/>
+          <p:nvPr/>
+        </p:nvSpPr>
+        <p:spPr>
+          <a:xfrm>
+            <a:off x="1280160" y="3950208"/>
+            <a:ext cx="1673352" cy="320040"/>
+          </a:xfrm>
+          <a:prstGeom prst="rect">
+            <a:avLst/>
+          </a:prstGeom>
+          <a:noFill/>
+          <a:ln/>
+        </p:spPr>
+        <p:txBody>
+          <a:bodyPr wrap="square" lIns="0" tIns="0" rIns="0" bIns="0" rtlCol="0" anchor="t"/>
+          <a:lstStyle/>
+          <a:p>
+            <a:pPr indent="0" marL="0">
+              <a:buNone/>
+            </a:pPr>
+            <a:r>
+              <a:rPr lang="en-US" sz="1200" dirty="0">
+                <a:solidFill>
+                  <a:schemeClr val="tx1"/>
+                </a:solidFill>
+              </a:rPr>
+              <a:t>Terraform</a:t>
+            </a:r>
+            <a:endParaRPr lang="en-US" sz="1200" dirty="0"/>
+          </a:p>
+        </p:txBody>
+      </p:sp>
+      <p:sp>
+        <p:nvSpPr>
+          <p:cNvPr id="38" name="step 8 card"/>
+          <p:cNvSpPr/>
+          <p:nvPr/>
+        </p:nvSpPr>
+        <p:spPr>
+          <a:xfrm>
+            <a:off x="3278124" y="3474720"/>
+            <a:ext cx="2587752" cy="914400"/>
+          </a:xfrm>
+          <a:prstGeom prst="roundRect">
+            <a:avLst>
+              <a:gd name="adj" fmla="val 10000"/>
+            </a:avLst>
+          </a:prstGeom>
+          <a:solidFill>
+            <a:schemeClr val="bg2"/>
+          </a:solidFill>
+          <a:ln w="12700">
+            <a:solidFill>
+              <a:schemeClr val="bg2"/>
+            </a:solidFill>
+            <a:prstDash val="solid"/>
+          </a:ln>
+        </p:spPr>
+      </p:sp>
+      <p:sp>
+        <p:nvSpPr>
+          <p:cNvPr id="39" name="step 8 circle"/>
+          <p:cNvSpPr/>
+          <p:nvPr/>
+        </p:nvSpPr>
+        <p:spPr>
+          <a:xfrm>
+            <a:off x="3415284" y="3657600"/>
+            <a:ext cx="548640" cy="548640"/>
+          </a:xfrm>
+          <a:prstGeom prst="ellipse">
+            <a:avLst/>
+          </a:prstGeom>
+          <a:solidFill>
+            <a:schemeClr val="accent1"/>
+          </a:solidFill>
+          <a:ln w="12700">
+            <a:solidFill>
+              <a:schemeClr val="accent1"/>
+            </a:solidFill>
+            <a:prstDash val="solid"/>
+          </a:ln>
+        </p:spPr>
+      </p:sp>
+      <p:pic>
+        <p:nvPicPr>
+          <p:cNvPr id="40" name="step 8 icon" descr="step 8">    </p:cNvPr>
+          <p:cNvPicPr>
+            <a:picLocks noChangeAspect="1"/>
+          </p:cNvPicPr>
+          <p:nvPr/>
+        </p:nvPicPr>
+        <p:blipFill>
+          <a:blip r:embed="rId8"/>
+          <a:stretch>
+            <a:fillRect/>
+          </a:stretch>
+        </p:blipFill>
+        <p:spPr>
+          <a:xfrm>
+            <a:off x="3563417" y="3805733"/>
+            <a:ext cx="252374" cy="252374"/>
+          </a:xfrm>
+          <a:prstGeom prst="rect">
+            <a:avLst/>
+          </a:prstGeom>
+        </p:spPr>
+      </p:pic>
+      <p:sp>
+        <p:nvSpPr>
+          <p:cNvPr id="41" name="step 8 title"/>
+          <p:cNvSpPr txBox="1"/>
+          <p:nvPr/>
+        </p:nvSpPr>
+        <p:spPr>
+          <a:xfrm>
+            <a:off x="4101084" y="3611880"/>
+            <a:ext cx="1673352" cy="329184"/>
+          </a:xfrm>
+          <a:prstGeom prst="rect">
+            <a:avLst/>
+          </a:prstGeom>
+          <a:noFill/>
+          <a:ln/>
+        </p:spPr>
+        <p:txBody>
+          <a:bodyPr wrap="square" lIns="0" tIns="0" rIns="0" bIns="0" rtlCol="0" anchor="ctr"/>
+          <a:lstStyle/>
+          <a:p>
+            <a:pPr indent="0" marL="0">
+              <a:buNone/>
+            </a:pPr>
+            <a:r>
+              <a:rPr lang="en-US" sz="1600" b="1" dirty="0">
+                <a:solidFill>
+                  <a:schemeClr val="tx2"/>
+                </a:solidFill>
+              </a:rPr>
+              <a:t>Run it</a:t>
+            </a:r>
+            <a:endParaRPr lang="en-US" sz="1600" dirty="0"/>
+          </a:p>
+        </p:txBody>
+      </p:sp>
+      <p:sp>
+        <p:nvSpPr>
+          <p:cNvPr id="42" name="step 8 text"/>
+          <p:cNvSpPr txBox="1"/>
+          <p:nvPr/>
+        </p:nvSpPr>
+        <p:spPr>
+          <a:xfrm>
+            <a:off x="4101084" y="3950208"/>
+            <a:ext cx="1673352" cy="320040"/>
+          </a:xfrm>
+          <a:prstGeom prst="rect">
+            <a:avLst/>
+          </a:prstGeom>
+          <a:noFill/>
+          <a:ln/>
+        </p:spPr>
+        <p:txBody>
+          <a:bodyPr wrap="square" lIns="0" tIns="0" rIns="0" bIns="0" rtlCol="0" anchor="t"/>
+          <a:lstStyle/>
+          <a:p>
+            <a:pPr indent="0" marL="0">
+              <a:buNone/>
+            </a:pPr>
+            <a:r>
+              <a:rPr lang="en-US" sz="1200" dirty="0">
+                <a:solidFill>
+                  <a:schemeClr val="tx1"/>
+                </a:solidFill>
+              </a:rPr>
+              <a:t>Kubernetes and Helm</a:t>
+            </a:r>
+            <a:endParaRPr lang="en-US" sz="1200" dirty="0"/>
+          </a:p>
+        </p:txBody>
+      </p:sp>
+      <p:sp>
+        <p:nvSpPr>
+          <p:cNvPr id="43" name="step 9 card"/>
+          <p:cNvSpPr/>
+          <p:nvPr/>
+        </p:nvSpPr>
+        <p:spPr>
+          <a:xfrm>
+            <a:off x="6099048" y="3474720"/>
+            <a:ext cx="2587752" cy="914400"/>
+          </a:xfrm>
+          <a:prstGeom prst="roundRect">
+            <a:avLst>
+              <a:gd name="adj" fmla="val 10000"/>
+            </a:avLst>
+          </a:prstGeom>
+          <a:solidFill>
+            <a:schemeClr val="bg2"/>
+          </a:solidFill>
+          <a:ln w="12700">
+            <a:solidFill>
+              <a:schemeClr val="bg2"/>
+            </a:solidFill>
+            <a:prstDash val="solid"/>
+          </a:ln>
+        </p:spPr>
+      </p:sp>
+      <p:sp>
+        <p:nvSpPr>
+          <p:cNvPr id="44" name="step 9 circle"/>
+          <p:cNvSpPr/>
+          <p:nvPr/>
+        </p:nvSpPr>
+        <p:spPr>
+          <a:xfrm>
+            <a:off x="6236208" y="3657600"/>
+            <a:ext cx="548640" cy="548640"/>
+          </a:xfrm>
+          <a:prstGeom prst="ellipse">
+            <a:avLst/>
+          </a:prstGeom>
+          <a:solidFill>
+            <a:schemeClr val="accent1"/>
+          </a:solidFill>
+          <a:ln w="12700">
+            <a:solidFill>
+              <a:schemeClr val="accent1"/>
+            </a:solidFill>
+            <a:prstDash val="solid"/>
+          </a:ln>
+        </p:spPr>
+      </p:sp>
+      <p:pic>
+        <p:nvPicPr>
+          <p:cNvPr id="45" name="step 9 icon" descr="step 9">    </p:cNvPr>
+          <p:cNvPicPr>
+            <a:picLocks noChangeAspect="1"/>
+          </p:cNvPicPr>
+          <p:nvPr/>
+        </p:nvPicPr>
+        <p:blipFill>
+          <a:blip r:embed="rId9"/>
+          <a:stretch>
+            <a:fillRect/>
+          </a:stretch>
+        </p:blipFill>
+        <p:spPr>
+          <a:xfrm>
+            <a:off x="6384341" y="3805733"/>
+            <a:ext cx="252374" cy="252374"/>
+          </a:xfrm>
+          <a:prstGeom prst="rect">
+            <a:avLst/>
+          </a:prstGeom>
+        </p:spPr>
+      </p:pic>
+      <p:sp>
+        <p:nvSpPr>
+          <p:cNvPr id="46" name="step 9 title"/>
+          <p:cNvSpPr txBox="1"/>
+          <p:nvPr/>
+        </p:nvSpPr>
+        <p:spPr>
+          <a:xfrm>
+            <a:off x="6922008" y="3611880"/>
+            <a:ext cx="1673352" cy="329184"/>
+          </a:xfrm>
+          <a:prstGeom prst="rect">
+            <a:avLst/>
+          </a:prstGeom>
+          <a:noFill/>
+          <a:ln/>
+        </p:spPr>
+        <p:txBody>
+          <a:bodyPr wrap="square" lIns="0" tIns="0" rIns="0" bIns="0" rtlCol="0" anchor="ctr"/>
+          <a:lstStyle/>
+          <a:p>
+            <a:pPr indent="0" marL="0">
+              <a:buNone/>
+            </a:pPr>
+            <a:r>
+              <a:rPr lang="en-US" sz="1600" b="1" dirty="0">
+                <a:solidFill>
+                  <a:schemeClr val="tx2"/>
+                </a:solidFill>
+              </a:rPr>
+              <a:t>Watch it</a:t>
+            </a:r>
+            <a:endParaRPr lang="en-US" sz="1600" dirty="0"/>
+          </a:p>
+        </p:txBody>
+      </p:sp>
+      <p:sp>
+        <p:nvSpPr>
+          <p:cNvPr id="47" name="step 9 text"/>
+          <p:cNvSpPr txBox="1"/>
+          <p:nvPr/>
+        </p:nvSpPr>
+        <p:spPr>
+          <a:xfrm>
+            <a:off x="6922008" y="3950208"/>
+            <a:ext cx="1673352" cy="320040"/>
+          </a:xfrm>
+          <a:prstGeom prst="rect">
+            <a:avLst/>
+          </a:prstGeom>
+          <a:noFill/>
+          <a:ln/>
+        </p:spPr>
+        <p:txBody>
+          <a:bodyPr wrap="square" lIns="0" tIns="0" rIns="0" bIns="0" rtlCol="0" anchor="t"/>
+          <a:lstStyle/>
+          <a:p>
+            <a:pPr indent="0" marL="0">
+              <a:buNone/>
+            </a:pPr>
+            <a:r>
+              <a:rPr lang="en-US" sz="1200" dirty="0">
+                <a:solidFill>
+                  <a:schemeClr val="tx1"/>
+                </a:solidFill>
+              </a:rPr>
+              <a:t>Prometheus and Grafana</a:t>
+            </a:r>
+            <a:endParaRPr lang="en-US" sz="1200" dirty="0"/>
+          </a:p>
+        </p:txBody>
+      </p:sp>
+      <p:sp>
+        <p:nvSpPr>
+          <p:cNvPr id="25" name="Slide Number Placeholder 0"/>
+          <p:cNvSpPr>
+            <a:spLocks noGrp="1"/>
+          </p:cNvSpPr>
+          <p:nvPr>
+            <p:ph type="sldNum" sz="quarter" idx="4294967295"/>
+          </p:nvPr>
+        </p:nvSpPr>
+        <p:spPr>
+          <a:xfrm>
+            <a:off x="8229600" y="4773168"/>
+            <a:ext cx="457200" cy="274320"/>
+          </a:xfrm>
+          <a:prstGeom prst="rect">
+            <a:avLst/>
+          </a:prstGeom>
+          <a:extLst>
+            <a:ext uri="{C572A759-6A51-4108-AA02-DFA0A04FC94B}">
+              <ma14:wrappingTextBoxFlag xmlns:ma14="http://schemas.microsoft.com/office/mac/drawingml/2011/main" val="0"/>
+            </a:ext>
+          </a:extLst>
+        </p:spPr>
+        <p:txBody>
+          <a:bodyPr/>
+          <a:lstStyle>
+            <a:lvl1pPr>
+              <a:defRPr sz="1000">
+                <a:solidFill>
+                  <a:schemeClr val="accent6"/>
+                </a:solidFill>
+              </a:defRPr>
+            </a:lvl1pPr>
+          </a:lstStyle>
+          <a:p>
+            <a:pPr algn="l"/>
+            <a:fld id="{F7021451-1387-4CA6-816F-3879F97B5CBC}" type="slidenum">
+              <a:rPr b="0" lang="en-US"/>
+              <a:t>5</a:t>
+            </a:fld>
+            <a:endParaRPr lang="en-US"/>
+          </a:p>
+        </p:txBody>
+      </p:sp>
+    </p:spTree>
+  </p:cSld>
+  <p:clrMapOvr>
+    <a:masterClrMapping/>
+  </p:clrMapOvr>
+</p:sld>
+</file>
+
+<file path=ppt/slides/slide6.xml><?xml version="1.0" encoding="utf-8"?>
+<p:sld xmlns:a="http://schemas.openxmlformats.org/drawingml/2006/main" xmlns:r="http://schemas.openxmlformats.org/officeDocument/2006/relationships" xmlns:p="http://schemas.openxmlformats.org/presentationml/2006/main">
+  <p:cSld name="Slide 6">
+    <p:spTree>
+      <p:nvGrpSpPr>
+        <p:cNvPr id="1" name=""/>
+        <p:cNvGrpSpPr/>
+        <p:nvPr/>
+      </p:nvGrpSpPr>
+      <p:grpSpPr>
+        <a:xfrm>
+          <a:off x="0" y="0"/>
+          <a:ext cx="0" cy="0"/>
+          <a:chOff x="0" y="0"/>
+          <a:chExt cx="0" cy="0"/>
+        </a:xfrm>
+      </p:grpSpPr>
+      <p:sp>
+        <p:nvSpPr>
+          <p:cNvPr id="2" name="Text 1"/>
+          <p:cNvSpPr/>
+          <p:nvPr>
+            <p:ph idx="101" type="title" hasCustomPrompt="1"/>
+          </p:nvPr>
+        </p:nvSpPr>
+        <p:spPr>
+          <a:xfrm>
+            <a:off x="457200" y="320040"/>
+            <a:ext cx="8229600" cy="731520"/>
+          </a:xfrm>
+          <a:prstGeom prst="rect">
+            <a:avLst/>
+          </a:prstGeom>
+          <a:noFill/>
+          <a:ln/>
+        </p:spPr>
+        <p:txBody>
+          <a:bodyPr wrap="square" lIns="0" tIns="0" rIns="0" bIns="0" rtlCol="0" anchor="ctr"/>
+          <a:lstStyle/>
+          <a:p>
+            <a:pPr algn="l" indent="0" marL="0">
+              <a:buNone/>
+            </a:pPr>
+            <a:r>
+              <a:rPr lang="en-US" sz="3400" b="1" dirty="0">
+                <a:solidFill>
+                  <a:schemeClr val="tx2"/>
+                </a:solidFill>
+              </a:rPr>
               <a:t>Why these choices?</a:t>
             </a:r>
             <a:endParaRPr lang="en-US" sz="3400" dirty="0"/>
@@ -6890,7 +9317,7 @@
       </p:sp>
       <p:graphicFrame>
         <p:nvGraphicFramePr>
-          <p:cNvPr id="6" name="choices table"/>
+          <p:cNvPr id="7" name="choices table"/>
           <p:cNvGraphicFramePr>
             <a:graphicFrameLocks noGrp="1"/>
           </p:cNvGraphicFramePr>
@@ -6911,9 +9338,9 @@
             <a:tbl>
               <a:tblPr/>
               <a:tblGrid>
-                <a:gridCol w="2194560"/>
-                <a:gridCol w="2103120"/>
-                <a:gridCol w="3931920"/>
+                <a:gridCol w="2743200"/>
+                <a:gridCol w="2468880"/>
+                <a:gridCol w="3017520"/>
               </a:tblGrid>
               <a:tr h="411480">
                 <a:tc>
@@ -7110,14 +9537,14 @@
                         <a:buNone/>
                       </a:pPr>
                       <a:r>
-                        <a:rPr lang="en-US" sz="1400" b="1" dirty="0">
+                        <a:rPr lang="en-US" sz="1600" b="1" dirty="0">
                           <a:solidFill>
                             <a:schemeClr val="tx1"/>
                           </a:solidFill>
                         </a:rPr>
                         <a:t>Separate screen and brain</a:t>
                       </a:r>
-                      <a:endParaRPr lang="en-US" sz="1400" dirty="0"/>
+                      <a:endParaRPr lang="en-US" sz="1600" dirty="0"/>
                     </a:p>
                   </a:txBody>
                   <a:tcPr marL="109728" marR="109728" marT="45720" marB="45720" anchor="ctr">
@@ -7171,14 +9598,14 @@
                         <a:buNone/>
                       </a:pPr>
                       <a:r>
-                        <a:rPr lang="en-US" sz="1400" dirty="0">
+                        <a:rPr lang="en-US" sz="1600" dirty="0">
                           <a:solidFill>
                             <a:schemeClr val="tx1"/>
                           </a:solidFill>
                         </a:rPr>
-                        <a:t>One big all-in-one app</a:t>
+                        <a:t>One big app</a:t>
                       </a:r>
-                      <a:endParaRPr lang="en-US" sz="1400" dirty="0"/>
+                      <a:endParaRPr lang="en-US" sz="1600" dirty="0"/>
                     </a:p>
                   </a:txBody>
                   <a:tcPr marL="109728" marR="109728" marT="45720" marB="45720" anchor="ctr">
@@ -7232,199 +9659,14 @@
                         <a:buNone/>
                       </a:pPr>
                       <a:r>
-                        <a:rPr lang="en-US" sz="1400" dirty="0">
+                        <a:rPr lang="en-US" sz="1600" dirty="0">
                           <a:solidFill>
                             <a:schemeClr val="tx1"/>
                           </a:solidFill>
                         </a:rPr>
-                        <a:t>Each part can change or grow on its own</a:t>
+                        <a:t>Each part changes on its own</a:t>
                       </a:r>
-                      <a:endParaRPr lang="en-US" sz="1400" dirty="0"/>
-                    </a:p>
-                  </a:txBody>
-                  <a:tcPr marL="109728" marR="109728" marT="45720" marB="45720" anchor="ctr">
-                    <a:lnL w="9525" cap="flat" cmpd="sng" algn="ctr">
-                      <a:solidFill>
-                        <a:srgbClr val="D1D5DB"/>
-                      </a:solidFill>
-                      <a:prstDash val="solid"/>
-                      <a:round/>
-                      <a:headEnd type="none" w="med" len="med"/>
-                      <a:tailEnd type="none" w="med" len="med"/>
-                    </a:lnL>
-                    <a:lnR w="9525" cap="flat" cmpd="sng" algn="ctr">
-                      <a:solidFill>
-                        <a:srgbClr val="D1D5DB"/>
-                      </a:solidFill>
-                      <a:prstDash val="solid"/>
-                      <a:round/>
-                      <a:headEnd type="none" w="med" len="med"/>
-                      <a:tailEnd type="none" w="med" len="med"/>
-                    </a:lnR>
-                    <a:lnT w="9525" cap="flat" cmpd="sng" algn="ctr">
-                      <a:solidFill>
-                        <a:srgbClr val="D1D5DB"/>
-                      </a:solidFill>
-                      <a:prstDash val="solid"/>
-                      <a:round/>
-                      <a:headEnd type="none" w="med" len="med"/>
-                      <a:tailEnd type="none" w="med" len="med"/>
-                    </a:lnT>
-                    <a:lnB w="9525" cap="flat" cmpd="sng" algn="ctr">
-                      <a:solidFill>
-                        <a:srgbClr val="D1D5DB"/>
-                      </a:solidFill>
-                      <a:prstDash val="solid"/>
-                      <a:round/>
-                      <a:headEnd type="none" w="med" len="med"/>
-                      <a:tailEnd type="none" w="med" len="med"/>
-                    </a:lnB>
-                    <a:solidFill>
-                      <a:schemeClr val="bg1"/>
-                    </a:solidFill>
-                  </a:tcPr>
-                </a:tc>
-              </a:tr>
-              <a:tr h="777240">
-                <a:tc>
-                  <a:txBody>
-                    <a:bodyPr/>
-                    <a:lstStyle/>
-                    <a:p>
-                      <a:pPr indent="0" marL="0">
-                        <a:buNone/>
-                      </a:pPr>
-                      <a:r>
-                        <a:rPr lang="en-US" sz="1400" b="1" dirty="0">
-                          <a:solidFill>
-                            <a:schemeClr val="tx1"/>
-                          </a:solidFill>
-                        </a:rPr>
-                        <a:t>Kubernetes</a:t>
-                      </a:r>
-                      <a:endParaRPr lang="en-US" sz="1400" dirty="0"/>
-                    </a:p>
-                  </a:txBody>
-                  <a:tcPr marL="109728" marR="109728" marT="45720" marB="45720" anchor="ctr">
-                    <a:lnL w="9525" cap="flat" cmpd="sng" algn="ctr">
-                      <a:solidFill>
-                        <a:srgbClr val="D1D5DB"/>
-                      </a:solidFill>
-                      <a:prstDash val="solid"/>
-                      <a:round/>
-                      <a:headEnd type="none" w="med" len="med"/>
-                      <a:tailEnd type="none" w="med" len="med"/>
-                    </a:lnL>
-                    <a:lnR w="9525" cap="flat" cmpd="sng" algn="ctr">
-                      <a:solidFill>
-                        <a:srgbClr val="D1D5DB"/>
-                      </a:solidFill>
-                      <a:prstDash val="solid"/>
-                      <a:round/>
-                      <a:headEnd type="none" w="med" len="med"/>
-                      <a:tailEnd type="none" w="med" len="med"/>
-                    </a:lnR>
-                    <a:lnT w="9525" cap="flat" cmpd="sng" algn="ctr">
-                      <a:solidFill>
-                        <a:srgbClr val="D1D5DB"/>
-                      </a:solidFill>
-                      <a:prstDash val="solid"/>
-                      <a:round/>
-                      <a:headEnd type="none" w="med" len="med"/>
-                      <a:tailEnd type="none" w="med" len="med"/>
-                    </a:lnT>
-                    <a:lnB w="9525" cap="flat" cmpd="sng" algn="ctr">
-                      <a:solidFill>
-                        <a:srgbClr val="D1D5DB"/>
-                      </a:solidFill>
-                      <a:prstDash val="solid"/>
-                      <a:round/>
-                      <a:headEnd type="none" w="med" len="med"/>
-                      <a:tailEnd type="none" w="med" len="med"/>
-                    </a:lnB>
-                    <a:solidFill>
-                      <a:schemeClr val="bg1"/>
-                    </a:solidFill>
-                  </a:tcPr>
-                </a:tc>
-                <a:tc>
-                  <a:txBody>
-                    <a:bodyPr/>
-                    <a:lstStyle/>
-                    <a:p>
-                      <a:pPr indent="0" marL="0">
-                        <a:buNone/>
-                      </a:pPr>
-                      <a:r>
-                        <a:rPr lang="en-US" sz="1400" dirty="0">
-                          <a:solidFill>
-                            <a:schemeClr val="tx1"/>
-                          </a:solidFill>
-                        </a:rPr>
-                        <a:t>Docker Compose only</a:t>
-                      </a:r>
-                      <a:endParaRPr lang="en-US" sz="1400" dirty="0"/>
-                    </a:p>
-                  </a:txBody>
-                  <a:tcPr marL="109728" marR="109728" marT="45720" marB="45720" anchor="ctr">
-                    <a:lnL w="9525" cap="flat" cmpd="sng" algn="ctr">
-                      <a:solidFill>
-                        <a:srgbClr val="D1D5DB"/>
-                      </a:solidFill>
-                      <a:prstDash val="solid"/>
-                      <a:round/>
-                      <a:headEnd type="none" w="med" len="med"/>
-                      <a:tailEnd type="none" w="med" len="med"/>
-                    </a:lnL>
-                    <a:lnR w="9525" cap="flat" cmpd="sng" algn="ctr">
-                      <a:solidFill>
-                        <a:srgbClr val="D1D5DB"/>
-                      </a:solidFill>
-                      <a:prstDash val="solid"/>
-                      <a:round/>
-                      <a:headEnd type="none" w="med" len="med"/>
-                      <a:tailEnd type="none" w="med" len="med"/>
-                    </a:lnR>
-                    <a:lnT w="9525" cap="flat" cmpd="sng" algn="ctr">
-                      <a:solidFill>
-                        <a:srgbClr val="D1D5DB"/>
-                      </a:solidFill>
-                      <a:prstDash val="solid"/>
-                      <a:round/>
-                      <a:headEnd type="none" w="med" len="med"/>
-                      <a:tailEnd type="none" w="med" len="med"/>
-                    </a:lnT>
-                    <a:lnB w="9525" cap="flat" cmpd="sng" algn="ctr">
-                      <a:solidFill>
-                        <a:srgbClr val="D1D5DB"/>
-                      </a:solidFill>
-                      <a:prstDash val="solid"/>
-                      <a:round/>
-                      <a:headEnd type="none" w="med" len="med"/>
-                      <a:tailEnd type="none" w="med" len="med"/>
-                    </a:lnB>
-                    <a:solidFill>
-                      <a:schemeClr val="bg1"/>
-                    </a:solidFill>
-                  </a:tcPr>
-                </a:tc>
-                <a:tc>
-                  <a:txBody>
-                    <a:bodyPr/>
-                    <a:lstStyle/>
-                    <a:p>
-                      <a:pPr indent="0" marL="0">
-                        <a:buNone/>
-                      </a:pPr>
-                      <a:r>
-                        <a:rPr lang="en-US" sz="1400" dirty="0">
-                          <a:solidFill>
-                            <a:schemeClr val="tx1"/>
-                          </a:solidFill>
-                        </a:rPr>
-                        <a:t>Compose suits one laptop. Kubernetes keeps copies running and heals itself.</a:t>
-                      </a:r>
-                      <a:endParaRPr lang="en-US" sz="1400" dirty="0"/>
+                      <a:endParaRPr lang="en-US" sz="1600" dirty="0"/>
                     </a:p>
                   </a:txBody>
                   <a:tcPr marL="109728" marR="109728" marT="45720" marB="45720" anchor="ctr">
@@ -7480,14 +9722,14 @@
                         <a:buNone/>
                       </a:pPr>
                       <a:r>
-                        <a:rPr lang="en-US" sz="1400" b="1" dirty="0">
+                        <a:rPr lang="en-US" sz="1600" b="1" dirty="0">
                           <a:solidFill>
                             <a:schemeClr val="tx1"/>
                           </a:solidFill>
                         </a:rPr>
-                        <a:t>GitHub Actions</a:t>
+                        <a:t>Kubernetes</a:t>
                       </a:r>
-                      <a:endParaRPr lang="en-US" sz="1400" dirty="0"/>
+                      <a:endParaRPr lang="en-US" sz="1600" dirty="0"/>
                     </a:p>
                   </a:txBody>
                   <a:tcPr marL="109728" marR="109728" marT="45720" marB="45720" anchor="ctr">
@@ -7541,14 +9783,14 @@
                         <a:buNone/>
                       </a:pPr>
                       <a:r>
-                        <a:rPr lang="en-US" sz="1400" dirty="0">
+                        <a:rPr lang="en-US" sz="1600" dirty="0">
                           <a:solidFill>
                             <a:schemeClr val="tx1"/>
                           </a:solidFill>
                         </a:rPr>
-                        <a:t>A Jenkins server</a:t>
+                        <a:t>Docker Compose alone</a:t>
                       </a:r>
-                      <a:endParaRPr lang="en-US" sz="1400" dirty="0"/>
+                      <a:endParaRPr lang="en-US" sz="1600" dirty="0"/>
                     </a:p>
                   </a:txBody>
                   <a:tcPr marL="109728" marR="109728" marT="45720" marB="45720" anchor="ctr">
@@ -7602,14 +9844,14 @@
                         <a:buNone/>
                       </a:pPr>
                       <a:r>
-                        <a:rPr lang="en-US" sz="1400" dirty="0">
+                        <a:rPr lang="en-US" sz="1600" dirty="0">
                           <a:solidFill>
                             <a:schemeClr val="tx1"/>
                           </a:solidFill>
                         </a:rPr>
-                        <a:t>Built into GitHub, with nothing extra to run</a:t>
+                        <a:t>It heals itself and scales</a:t>
                       </a:r>
-                      <a:endParaRPr lang="en-US" sz="1400" dirty="0"/>
+                      <a:endParaRPr lang="en-US" sz="1600" dirty="0"/>
                     </a:p>
                   </a:txBody>
                   <a:tcPr marL="109728" marR="109728" marT="45720" marB="45720" anchor="ctr">
@@ -7655,7 +9897,7 @@
                   </a:tcPr>
                 </a:tc>
               </a:tr>
-              <a:tr h="777240">
+              <a:tr h="640080">
                 <a:tc>
                   <a:txBody>
                     <a:bodyPr/>
@@ -7665,14 +9907,14 @@
                         <a:buNone/>
                       </a:pPr>
                       <a:r>
-                        <a:rPr lang="en-US" sz="1400" b="1" dirty="0">
+                        <a:rPr lang="en-US" sz="1600" b="1" dirty="0">
                           <a:solidFill>
                             <a:schemeClr val="tx1"/>
                           </a:solidFill>
                         </a:rPr>
-                        <a:t>Slim Alpine images</a:t>
+                        <a:t>GitHub Actions</a:t>
                       </a:r>
-                      <a:endParaRPr lang="en-US" sz="1400" dirty="0"/>
+                      <a:endParaRPr lang="en-US" sz="1600" dirty="0"/>
                     </a:p>
                   </a:txBody>
                   <a:tcPr marL="109728" marR="109728" marT="45720" marB="45720" anchor="ctr">
@@ -7726,14 +9968,14 @@
                         <a:buNone/>
                       </a:pPr>
                       <a:r>
-                        <a:rPr lang="en-US" sz="1400" dirty="0">
+                        <a:rPr lang="en-US" sz="1600" dirty="0">
                           <a:solidFill>
                             <a:schemeClr val="tx1"/>
                           </a:solidFill>
                         </a:rPr>
-                        <a:t>Full Debian images</a:t>
+                        <a:t>A Jenkins server</a:t>
                       </a:r>
-                      <a:endParaRPr lang="en-US" sz="1400" dirty="0"/>
+                      <a:endParaRPr lang="en-US" sz="1600" dirty="0"/>
                     </a:p>
                   </a:txBody>
                   <a:tcPr marL="109728" marR="109728" marT="45720" marB="45720" anchor="ctr">
@@ -7787,14 +10029,199 @@
                         <a:buNone/>
                       </a:pPr>
                       <a:r>
-                        <a:rPr lang="en-US" sz="1400" dirty="0">
+                        <a:rPr lang="en-US" sz="1600" dirty="0">
                           <a:solidFill>
                             <a:schemeClr val="tx1"/>
                           </a:solidFill>
                         </a:rPr>
-                        <a:t>Fewer packages means fewer security holes: 44 fewer in the backend</a:t>
+                        <a:t>Nothing extra to run</a:t>
                       </a:r>
-                      <a:endParaRPr lang="en-US" sz="1400" dirty="0"/>
+                      <a:endParaRPr lang="en-US" sz="1600" dirty="0"/>
+                    </a:p>
+                  </a:txBody>
+                  <a:tcPr marL="109728" marR="109728" marT="45720" marB="45720" anchor="ctr">
+                    <a:lnL w="9525" cap="flat" cmpd="sng" algn="ctr">
+                      <a:solidFill>
+                        <a:srgbClr val="D1D5DB"/>
+                      </a:solidFill>
+                      <a:prstDash val="solid"/>
+                      <a:round/>
+                      <a:headEnd type="none" w="med" len="med"/>
+                      <a:tailEnd type="none" w="med" len="med"/>
+                    </a:lnL>
+                    <a:lnR w="9525" cap="flat" cmpd="sng" algn="ctr">
+                      <a:solidFill>
+                        <a:srgbClr val="D1D5DB"/>
+                      </a:solidFill>
+                      <a:prstDash val="solid"/>
+                      <a:round/>
+                      <a:headEnd type="none" w="med" len="med"/>
+                      <a:tailEnd type="none" w="med" len="med"/>
+                    </a:lnR>
+                    <a:lnT w="9525" cap="flat" cmpd="sng" algn="ctr">
+                      <a:solidFill>
+                        <a:srgbClr val="D1D5DB"/>
+                      </a:solidFill>
+                      <a:prstDash val="solid"/>
+                      <a:round/>
+                      <a:headEnd type="none" w="med" len="med"/>
+                      <a:tailEnd type="none" w="med" len="med"/>
+                    </a:lnT>
+                    <a:lnB w="9525" cap="flat" cmpd="sng" algn="ctr">
+                      <a:solidFill>
+                        <a:srgbClr val="D1D5DB"/>
+                      </a:solidFill>
+                      <a:prstDash val="solid"/>
+                      <a:round/>
+                      <a:headEnd type="none" w="med" len="med"/>
+                      <a:tailEnd type="none" w="med" len="med"/>
+                    </a:lnB>
+                    <a:solidFill>
+                      <a:schemeClr val="bg1"/>
+                    </a:solidFill>
+                  </a:tcPr>
+                </a:tc>
+              </a:tr>
+              <a:tr h="640080">
+                <a:tc>
+                  <a:txBody>
+                    <a:bodyPr/>
+                    <a:lstStyle/>
+                    <a:p>
+                      <a:pPr indent="0" marL="0">
+                        <a:buNone/>
+                      </a:pPr>
+                      <a:r>
+                        <a:rPr lang="en-US" sz="1600" b="1" dirty="0">
+                          <a:solidFill>
+                            <a:schemeClr val="tx1"/>
+                          </a:solidFill>
+                        </a:rPr>
+                        <a:t>Alpine images</a:t>
+                      </a:r>
+                      <a:endParaRPr lang="en-US" sz="1600" dirty="0"/>
+                    </a:p>
+                  </a:txBody>
+                  <a:tcPr marL="109728" marR="109728" marT="45720" marB="45720" anchor="ctr">
+                    <a:lnL w="9525" cap="flat" cmpd="sng" algn="ctr">
+                      <a:solidFill>
+                        <a:srgbClr val="D1D5DB"/>
+                      </a:solidFill>
+                      <a:prstDash val="solid"/>
+                      <a:round/>
+                      <a:headEnd type="none" w="med" len="med"/>
+                      <a:tailEnd type="none" w="med" len="med"/>
+                    </a:lnL>
+                    <a:lnR w="9525" cap="flat" cmpd="sng" algn="ctr">
+                      <a:solidFill>
+                        <a:srgbClr val="D1D5DB"/>
+                      </a:solidFill>
+                      <a:prstDash val="solid"/>
+                      <a:round/>
+                      <a:headEnd type="none" w="med" len="med"/>
+                      <a:tailEnd type="none" w="med" len="med"/>
+                    </a:lnR>
+                    <a:lnT w="9525" cap="flat" cmpd="sng" algn="ctr">
+                      <a:solidFill>
+                        <a:srgbClr val="D1D5DB"/>
+                      </a:solidFill>
+                      <a:prstDash val="solid"/>
+                      <a:round/>
+                      <a:headEnd type="none" w="med" len="med"/>
+                      <a:tailEnd type="none" w="med" len="med"/>
+                    </a:lnT>
+                    <a:lnB w="9525" cap="flat" cmpd="sng" algn="ctr">
+                      <a:solidFill>
+                        <a:srgbClr val="D1D5DB"/>
+                      </a:solidFill>
+                      <a:prstDash val="solid"/>
+                      <a:round/>
+                      <a:headEnd type="none" w="med" len="med"/>
+                      <a:tailEnd type="none" w="med" len="med"/>
+                    </a:lnB>
+                    <a:solidFill>
+                      <a:schemeClr val="bg1"/>
+                    </a:solidFill>
+                  </a:tcPr>
+                </a:tc>
+                <a:tc>
+                  <a:txBody>
+                    <a:bodyPr/>
+                    <a:lstStyle/>
+                    <a:p>
+                      <a:pPr indent="0" marL="0">
+                        <a:buNone/>
+                      </a:pPr>
+                      <a:r>
+                        <a:rPr lang="en-US" sz="1600" dirty="0">
+                          <a:solidFill>
+                            <a:schemeClr val="tx1"/>
+                          </a:solidFill>
+                        </a:rPr>
+                        <a:t>Full Debian images</a:t>
+                      </a:r>
+                      <a:endParaRPr lang="en-US" sz="1600" dirty="0"/>
+                    </a:p>
+                  </a:txBody>
+                  <a:tcPr marL="109728" marR="109728" marT="45720" marB="45720" anchor="ctr">
+                    <a:lnL w="9525" cap="flat" cmpd="sng" algn="ctr">
+                      <a:solidFill>
+                        <a:srgbClr val="D1D5DB"/>
+                      </a:solidFill>
+                      <a:prstDash val="solid"/>
+                      <a:round/>
+                      <a:headEnd type="none" w="med" len="med"/>
+                      <a:tailEnd type="none" w="med" len="med"/>
+                    </a:lnL>
+                    <a:lnR w="9525" cap="flat" cmpd="sng" algn="ctr">
+                      <a:solidFill>
+                        <a:srgbClr val="D1D5DB"/>
+                      </a:solidFill>
+                      <a:prstDash val="solid"/>
+                      <a:round/>
+                      <a:headEnd type="none" w="med" len="med"/>
+                      <a:tailEnd type="none" w="med" len="med"/>
+                    </a:lnR>
+                    <a:lnT w="9525" cap="flat" cmpd="sng" algn="ctr">
+                      <a:solidFill>
+                        <a:srgbClr val="D1D5DB"/>
+                      </a:solidFill>
+                      <a:prstDash val="solid"/>
+                      <a:round/>
+                      <a:headEnd type="none" w="med" len="med"/>
+                      <a:tailEnd type="none" w="med" len="med"/>
+                    </a:lnT>
+                    <a:lnB w="9525" cap="flat" cmpd="sng" algn="ctr">
+                      <a:solidFill>
+                        <a:srgbClr val="D1D5DB"/>
+                      </a:solidFill>
+                      <a:prstDash val="solid"/>
+                      <a:round/>
+                      <a:headEnd type="none" w="med" len="med"/>
+                      <a:tailEnd type="none" w="med" len="med"/>
+                    </a:lnB>
+                    <a:solidFill>
+                      <a:schemeClr val="bg1"/>
+                    </a:solidFill>
+                  </a:tcPr>
+                </a:tc>
+                <a:tc>
+                  <a:txBody>
+                    <a:bodyPr/>
+                    <a:lstStyle/>
+                    <a:p>
+                      <a:pPr indent="0" marL="0">
+                        <a:buNone/>
+                      </a:pPr>
+                      <a:r>
+                        <a:rPr lang="en-US" sz="1600" dirty="0">
+                          <a:solidFill>
+                            <a:schemeClr val="tx1"/>
+                          </a:solidFill>
+                        </a:rPr>
+                        <a:t>Far fewer security holes</a:t>
+                      </a:r>
+                      <a:endParaRPr lang="en-US" sz="1600" dirty="0"/>
                     </a:p>
                   </a:txBody>
                   <a:tcPr marL="109728" marR="109728" marT="45720" marB="45720" anchor="ctr">
@@ -7883,217 +10310,6 @@
             <a:pPr algn="l"/>
             <a:fld id="{F7021451-1387-4CA6-816F-3879F97B5CBC}" type="slidenum">
               <a:rPr b="0" lang="en-US"/>
-              <a:t>5</a:t>
-            </a:fld>
-            <a:endParaRPr lang="en-US"/>
-          </a:p>
-        </p:txBody>
-      </p:sp>
-    </p:spTree>
-  </p:cSld>
-  <p:clrMapOvr>
-    <a:masterClrMapping/>
-  </p:clrMapOvr>
-</p:sld>
-</file>
-
-<file path=ppt/slides/slide6.xml><?xml version="1.0" encoding="utf-8"?>
-<p:sld xmlns:a="http://schemas.openxmlformats.org/drawingml/2006/main" xmlns:r="http://schemas.openxmlformats.org/officeDocument/2006/relationships" xmlns:p="http://schemas.openxmlformats.org/presentationml/2006/main">
-  <p:cSld name="Slide 6">
-    <p:spTree>
-      <p:nvGrpSpPr>
-        <p:cNvPr id="1" name=""/>
-        <p:cNvGrpSpPr/>
-        <p:nvPr/>
-      </p:nvGrpSpPr>
-      <p:grpSpPr>
-        <a:xfrm>
-          <a:off x="0" y="0"/>
-          <a:ext cx="0" cy="0"/>
-          <a:chOff x="0" y="0"/>
-          <a:chExt cx="0" cy="0"/>
-        </a:xfrm>
-      </p:grpSpPr>
-      <p:sp>
-        <p:nvSpPr>
-          <p:cNvPr id="2" name="Text 1"/>
-          <p:cNvSpPr/>
-          <p:nvPr>
-            <p:ph idx="101" type="title" hasCustomPrompt="1"/>
-          </p:nvPr>
-        </p:nvSpPr>
-        <p:spPr>
-          <a:xfrm>
-            <a:off x="457200" y="320040"/>
-            <a:ext cx="8229600" cy="731520"/>
-          </a:xfrm>
-          <a:prstGeom prst="rect">
-            <a:avLst/>
-          </a:prstGeom>
-          <a:noFill/>
-          <a:ln/>
-        </p:spPr>
-        <p:txBody>
-          <a:bodyPr wrap="square" lIns="0" tIns="0" rIns="0" bIns="0" rtlCol="0" anchor="ctr"/>
-          <a:lstStyle/>
-          <a:p>
-            <a:pPr algn="l" indent="0" marL="0">
-              <a:buNone/>
-            </a:pPr>
-            <a:r>
-              <a:rPr lang="en-US" sz="3400" b="1" dirty="0">
-                <a:solidFill>
-                  <a:schemeClr val="tx2"/>
-                </a:solidFill>
-              </a:rPr>
-              <a:t>Proof 1: the automatic pipeline</a:t>
-            </a:r>
-            <a:endParaRPr lang="en-US" sz="3400" dirty="0"/>
-          </a:p>
-        </p:txBody>
-      </p:sp>
-      <p:sp>
-        <p:nvSpPr>
-          <p:cNvPr id="3" name="cicd screenshot frame"/>
-          <p:cNvSpPr/>
-          <p:nvPr/>
-        </p:nvSpPr>
-        <p:spPr>
-          <a:xfrm>
-            <a:off x="420624" y="1197864"/>
-            <a:ext cx="7933211" cy="2953512"/>
-          </a:xfrm>
-          <a:prstGeom prst="rect">
-            <a:avLst/>
-          </a:prstGeom>
-          <a:solidFill>
-            <a:schemeClr val="bg1"/>
-          </a:solidFill>
-          <a:ln w="9525">
-            <a:solidFill>
-              <a:srgbClr val="D1D5DB"/>
-            </a:solidFill>
-            <a:prstDash val="solid"/>
-          </a:ln>
-          <a:effectLst>
-            <a:outerShdw sx="100000" sy="100000" kx="0" ky="0" algn="bl" rotWithShape="0" blurRad="76200" dist="25400" dir="5400000">
-              <a:srgbClr val="000000">
-                <a:alpha val="12000"/>
-              </a:srgbClr>
-            </a:outerShdw>
-          </a:effectLst>
-        </p:spPr>
-      </p:sp>
-      <p:pic>
-        <p:nvPicPr>
-          <p:cNvPr id="4" name="cicd screenshot" descr="GitHub Actions run with backend-tests, frontend-build and docker all green">    </p:cNvPr>
-          <p:cNvPicPr>
-            <a:picLocks noChangeAspect="1"/>
-          </p:cNvPicPr>
-          <p:nvPr/>
-        </p:nvPicPr>
-        <p:blipFill>
-          <a:blip r:embed="rId1"/>
-          <a:stretch>
-            <a:fillRect/>
-          </a:stretch>
-        </p:blipFill>
-        <p:spPr>
-          <a:xfrm>
-            <a:off x="457200" y="1234440"/>
-            <a:ext cx="7860059" cy="2880360"/>
-          </a:xfrm>
-          <a:prstGeom prst="rect">
-            <a:avLst/>
-          </a:prstGeom>
-        </p:spPr>
-      </p:pic>
-      <p:sp>
-        <p:nvSpPr>
-          <p:cNvPr id="5" name="cicd caption"/>
-          <p:cNvSpPr txBox="1"/>
-          <p:nvPr/>
-        </p:nvSpPr>
-        <p:spPr>
-          <a:xfrm>
-            <a:off x="457200" y="4251960"/>
-            <a:ext cx="8229600" cy="411480"/>
-          </a:xfrm>
-          <a:prstGeom prst="rect">
-            <a:avLst/>
-          </a:prstGeom>
-          <a:noFill/>
-          <a:ln/>
-        </p:spPr>
-        <p:txBody>
-          <a:bodyPr wrap="square" lIns="0" tIns="0" rIns="0" bIns="0" rtlCol="0" anchor="t"/>
-          <a:lstStyle/>
-          <a:p>
-            <a:pPr indent="0" marL="0">
-              <a:buNone/>
-            </a:pPr>
-            <a:r>
-              <a:rPr lang="en-US" sz="1400" b="1" dirty="0">
-                <a:solidFill>
-                  <a:schemeClr val="accent2"/>
-                </a:solidFill>
-              </a:rPr>
-              <a:t>All green: </a:t>
-            </a:r>
-            <a:pPr indent="0" marL="0">
-              <a:buNone/>
-            </a:pPr>
-            <a:r>
-              <a:rPr lang="en-US" sz="1400" dirty="0">
-                <a:solidFill>
-                  <a:schemeClr val="tx1"/>
-                </a:solidFill>
-              </a:rPr>
-              <a:t>tests and the frontend build run first, then the images are built and published.</a:t>
-            </a:r>
-            <a:endParaRPr lang="en-US" sz="1400" dirty="0"/>
-          </a:p>
-        </p:txBody>
-      </p:sp>
-      <p:sp>
-        <p:nvSpPr>
-          <p:cNvPr id="25" name="Slide Number Placeholder 0"/>
-          <p:cNvSpPr>
-            <a:spLocks noGrp="1"/>
-          </p:cNvSpPr>
-          <p:nvPr>
-            <p:ph type="sldNum" sz="quarter" idx="4294967295"/>
-          </p:nvPr>
-        </p:nvSpPr>
-        <p:spPr>
-          <a:xfrm>
-            <a:off x="8229600" y="4773168"/>
-            <a:ext cx="457200" cy="274320"/>
-          </a:xfrm>
-          <a:prstGeom prst="rect">
-            <a:avLst/>
-          </a:prstGeom>
-          <a:extLst>
-            <a:ext uri="{C572A759-6A51-4108-AA02-DFA0A04FC94B}">
-              <ma14:wrappingTextBoxFlag xmlns:ma14="http://schemas.microsoft.com/office/mac/drawingml/2011/main" val="0"/>
-            </a:ext>
-          </a:extLst>
-        </p:spPr>
-        <p:txBody>
-          <a:bodyPr/>
-          <a:lstStyle>
-            <a:lvl1pPr>
-              <a:defRPr sz="1000">
-                <a:solidFill>
-                  <a:schemeClr val="accent6"/>
-                </a:solidFill>
-              </a:defRPr>
-            </a:lvl1pPr>
-          </a:lstStyle>
-          <a:p>
-            <a:pPr algn="l"/>
-            <a:fld id="{F7021451-1387-4CA6-816F-3879F97B5CBC}" type="slidenum">
-              <a:rPr b="0" lang="en-US"/>
               <a:t>6</a:t>
             </a:fld>
             <a:endParaRPr lang="en-US"/>
@@ -8157,7 +10373,7 @@
                   <a:schemeClr val="tx2"/>
                 </a:solidFill>
               </a:rPr>
-              <a:t>Proof 2: the code lives on GitHub</a:t>
+              <a:t>Proof 1: the automatic pipeline</a:t>
             </a:r>
             <a:endParaRPr lang="en-US" sz="3400" dirty="0"/>
           </a:p>
@@ -8165,14 +10381,14 @@
       </p:sp>
       <p:sp>
         <p:nvSpPr>
-          <p:cNvPr id="3" name="repo screenshot frame"/>
+          <p:cNvPr id="3" name="cicd screenshot frame"/>
           <p:cNvSpPr/>
           <p:nvPr/>
         </p:nvSpPr>
         <p:spPr>
           <a:xfrm>
-            <a:off x="420624" y="1243584"/>
-            <a:ext cx="5340096" cy="3364992"/>
+            <a:off x="420624" y="1197864"/>
+            <a:ext cx="7933211" cy="2953512"/>
           </a:xfrm>
           <a:prstGeom prst="rect">
             <a:avLst/>
@@ -8197,7 +10413,7 @@
       </p:sp>
       <p:pic>
         <p:nvPicPr>
-          <p:cNvPr id="4" name="repo screenshot" descr="The public GitHub repository page for Devops-capstone">    </p:cNvPr>
+          <p:cNvPr id="4" name="cicd screenshot" descr="GitHub Actions run with backend-tests, frontend-build and docker all green">    </p:cNvPr>
           <p:cNvPicPr>
             <a:picLocks noChangeAspect="1"/>
           </p:cNvPicPr>
@@ -8211,8 +10427,8 @@
         </p:blipFill>
         <p:spPr>
           <a:xfrm>
-            <a:off x="457200" y="1280160"/>
-            <a:ext cx="5266944" cy="3291840"/>
+            <a:off x="457200" y="1234440"/>
+            <a:ext cx="7860059" cy="2880360"/>
           </a:xfrm>
           <a:prstGeom prst="rect">
             <a:avLst/>
@@ -8221,90 +10437,14 @@
       </p:pic>
       <p:sp>
         <p:nvSpPr>
-          <p:cNvPr id="5" name="repo card"/>
-          <p:cNvSpPr/>
-          <p:nvPr/>
-        </p:nvSpPr>
-        <p:spPr>
-          <a:xfrm>
-            <a:off x="6263640" y="1280160"/>
-            <a:ext cx="2423160" cy="3291840"/>
-          </a:xfrm>
-          <a:prstGeom prst="roundRect">
-            <a:avLst>
-              <a:gd name="adj" fmla="val 4528"/>
-            </a:avLst>
-          </a:prstGeom>
-          <a:solidFill>
-            <a:schemeClr val="bg2"/>
-          </a:solidFill>
-          <a:ln w="12700">
-            <a:solidFill>
-              <a:schemeClr val="bg2"/>
-            </a:solidFill>
-            <a:prstDash val="solid"/>
-          </a:ln>
-        </p:spPr>
-      </p:sp>
-      <p:sp>
-        <p:nvSpPr>
-          <p:cNvPr id="6" name="repo circle"/>
-          <p:cNvSpPr/>
-          <p:nvPr/>
-        </p:nvSpPr>
-        <p:spPr>
-          <a:xfrm>
-            <a:off x="6446520" y="1463040"/>
-            <a:ext cx="457200" cy="457200"/>
-          </a:xfrm>
-          <a:prstGeom prst="ellipse">
-            <a:avLst/>
-          </a:prstGeom>
-          <a:solidFill>
-            <a:schemeClr val="accent1"/>
-          </a:solidFill>
-          <a:ln w="12700">
-            <a:solidFill>
-              <a:schemeClr val="accent1"/>
-            </a:solidFill>
-            <a:prstDash val="solid"/>
-          </a:ln>
-        </p:spPr>
-      </p:sp>
-      <p:pic>
-        <p:nvPicPr>
-          <p:cNvPr id="7" name="repo icon" descr="repo">    </p:cNvPr>
-          <p:cNvPicPr>
-            <a:picLocks noChangeAspect="1"/>
-          </p:cNvPicPr>
-          <p:nvPr/>
-        </p:nvPicPr>
-        <p:blipFill>
-          <a:blip r:embed="rId2"/>
-          <a:stretch>
-            <a:fillRect/>
-          </a:stretch>
-        </p:blipFill>
-        <p:spPr>
-          <a:xfrm>
-            <a:off x="6569964" y="1586484"/>
-            <a:ext cx="210312" cy="210312"/>
-          </a:xfrm>
-          <a:prstGeom prst="rect">
-            <a:avLst/>
-          </a:prstGeom>
-        </p:spPr>
-      </p:pic>
-      <p:sp>
-        <p:nvSpPr>
-          <p:cNvPr id="8" name="repo heading"/>
+          <p:cNvPr id="5" name="cicd caption"/>
           <p:cNvSpPr txBox="1"/>
           <p:nvPr/>
         </p:nvSpPr>
         <p:spPr>
           <a:xfrm>
-            <a:off x="7013448" y="1463040"/>
-            <a:ext cx="1508760" cy="457200"/>
+            <a:off x="457200" y="4251960"/>
+            <a:ext cx="8229600" cy="411480"/>
           </a:xfrm>
           <a:prstGeom prst="rect">
             <a:avLst/>
@@ -8313,7 +10453,7 @@
           <a:ln/>
         </p:spPr>
         <p:txBody>
-          <a:bodyPr wrap="square" lIns="0" tIns="0" rIns="0" bIns="0" rtlCol="0" anchor="ctr"/>
+          <a:bodyPr wrap="square" lIns="0" tIns="0" rIns="0" bIns="0" rtlCol="0" anchor="t"/>
           <a:lstStyle/>
           <a:p>
             <a:pPr indent="0" marL="0">
@@ -8322,88 +10462,23 @@
             <a:r>
               <a:rPr lang="en-US" sz="1600" b="1" dirty="0">
                 <a:solidFill>
-                  <a:schemeClr val="tx2"/>
+                  <a:schemeClr val="accent2"/>
                 </a:solidFill>
               </a:rPr>
-              <a:t>One public repo</a:t>
+              <a:t>All green: </a:t>
+            </a:r>
+            <a:pPr indent="0" marL="0">
+              <a:buNone/>
+            </a:pPr>
+            <a:r>
+              <a:rPr lang="en-US" sz="1600" dirty="0">
+                <a:solidFill>
+                  <a:schemeClr val="tx1"/>
+                </a:solidFill>
+              </a:rPr>
+              <a:t>tests and build first, then the images are published.</a:t>
             </a:r>
             <a:endParaRPr lang="en-US" sz="1600" dirty="0"/>
-          </a:p>
-        </p:txBody>
-      </p:sp>
-      <p:sp>
-        <p:nvSpPr>
-          <p:cNvPr id="9" name="repo points"/>
-          <p:cNvSpPr txBox="1"/>
-          <p:nvPr/>
-        </p:nvSpPr>
-        <p:spPr>
-          <a:xfrm>
-            <a:off x="6446520" y="2103120"/>
-            <a:ext cx="2057400" cy="2331720"/>
-          </a:xfrm>
-          <a:prstGeom prst="rect">
-            <a:avLst/>
-          </a:prstGeom>
-          <a:noFill/>
-          <a:ln/>
-        </p:spPr>
-        <p:txBody>
-          <a:bodyPr wrap="square" lIns="0" tIns="0" rIns="0" bIns="0" rtlCol="0" anchor="t"/>
-          <a:lstStyle/>
-          <a:p>
-            <a:pPr marL="342900" indent="-342900">
-              <a:spcAft>
-                <a:spcPts val="800"/>
-              </a:spcAft>
-              <a:buSzPct val="100000"/>
-              <a:buChar char="•"/>
-            </a:pPr>
-            <a:r>
-              <a:rPr lang="en-US" sz="1400" dirty="0">
-                <a:solidFill>
-                  <a:schemeClr val="tx1"/>
-                </a:solidFill>
-              </a:rPr>
-              <a:t>Frontend, backend and deploy files together</a:t>
-            </a:r>
-            <a:endParaRPr lang="en-US" sz="1400" dirty="0"/>
-          </a:p>
-          <a:p>
-            <a:pPr marL="342900" indent="-342900">
-              <a:spcAft>
-                <a:spcPts val="800"/>
-              </a:spcAft>
-              <a:buSzPct val="100000"/>
-              <a:buChar char="•"/>
-            </a:pPr>
-            <a:r>
-              <a:rPr lang="en-US" sz="1400" dirty="0">
-                <a:solidFill>
-                  <a:schemeClr val="tx1"/>
-                </a:solidFill>
-              </a:rPr>
-              <a:t>Every change recorded as a commit</a:t>
-            </a:r>
-            <a:endParaRPr lang="en-US" sz="1400" dirty="0"/>
-          </a:p>
-          <a:p>
-            <a:pPr marL="342900" indent="-342900">
-              <a:spcAft>
-                <a:spcPts val="800"/>
-              </a:spcAft>
-              <a:buSzPct val="100000"/>
-              <a:buChar char="•"/>
-            </a:pPr>
-            <a:r>
-              <a:rPr lang="en-US" sz="1400" dirty="0">
-                <a:solidFill>
-                  <a:schemeClr val="tx1"/>
-                </a:solidFill>
-              </a:rPr>
-              <a:t>Open for anyone to review</a:t>
-            </a:r>
-            <a:endParaRPr lang="en-US" sz="1400" dirty="0"/>
           </a:p>
         </p:txBody>
       </p:sp>
@@ -8509,7 +10584,7 @@
                   <a:schemeClr val="tx2"/>
                 </a:solidFill>
               </a:rPr>
-              <a:t>Proof 3: running on Kubernetes</a:t>
+              <a:t>Proof 2: the code on GitHub</a:t>
             </a:r>
             <a:endParaRPr lang="en-US" sz="3400" dirty="0"/>
           </a:p>
@@ -8517,14 +10592,14 @@
       </p:sp>
       <p:sp>
         <p:nvSpPr>
-          <p:cNvPr id="3" name="kubernetes terminal frame"/>
+          <p:cNvPr id="3" name="repo screenshot frame"/>
           <p:cNvSpPr/>
           <p:nvPr/>
         </p:nvSpPr>
         <p:spPr>
           <a:xfrm>
             <a:off x="420624" y="1243584"/>
-            <a:ext cx="8020530" cy="2084832"/>
+            <a:ext cx="5340096" cy="3364992"/>
           </a:xfrm>
           <a:prstGeom prst="rect">
             <a:avLst/>
@@ -8549,7 +10624,7 @@
       </p:sp>
       <p:pic>
         <p:nvPicPr>
-          <p:cNvPr id="4" name="kubernetes terminal" descr="Terminal showing kubectl get pods, kubectl get svc and helm list">    </p:cNvPr>
+          <p:cNvPr id="4" name="repo screenshot" descr="The public GitHub repository page for Devops-capstone">    </p:cNvPr>
           <p:cNvPicPr>
             <a:picLocks noChangeAspect="1"/>
           </p:cNvPicPr>
@@ -8564,7 +10639,7 @@
         <p:spPr>
           <a:xfrm>
             <a:off x="457200" y="1280160"/>
-            <a:ext cx="7947378" cy="2011680"/>
+            <a:ext cx="5266944" cy="3291840"/>
           </a:xfrm>
           <a:prstGeom prst="rect">
             <a:avLst/>
@@ -8573,14 +10648,90 @@
       </p:pic>
       <p:sp>
         <p:nvSpPr>
-          <p:cNvPr id="5" name="stat 1"/>
+          <p:cNvPr id="5" name="repo card"/>
+          <p:cNvSpPr/>
+          <p:nvPr/>
+        </p:nvSpPr>
+        <p:spPr>
+          <a:xfrm>
+            <a:off x="6263640" y="1280160"/>
+            <a:ext cx="2423160" cy="3291840"/>
+          </a:xfrm>
+          <a:prstGeom prst="roundRect">
+            <a:avLst>
+              <a:gd name="adj" fmla="val 4528"/>
+            </a:avLst>
+          </a:prstGeom>
+          <a:solidFill>
+            <a:schemeClr val="bg2"/>
+          </a:solidFill>
+          <a:ln w="12700">
+            <a:solidFill>
+              <a:schemeClr val="bg2"/>
+            </a:solidFill>
+            <a:prstDash val="solid"/>
+          </a:ln>
+        </p:spPr>
+      </p:sp>
+      <p:sp>
+        <p:nvSpPr>
+          <p:cNvPr id="6" name="repo circle"/>
+          <p:cNvSpPr/>
+          <p:nvPr/>
+        </p:nvSpPr>
+        <p:spPr>
+          <a:xfrm>
+            <a:off x="6446520" y="1463040"/>
+            <a:ext cx="457200" cy="457200"/>
+          </a:xfrm>
+          <a:prstGeom prst="ellipse">
+            <a:avLst/>
+          </a:prstGeom>
+          <a:solidFill>
+            <a:schemeClr val="accent1"/>
+          </a:solidFill>
+          <a:ln w="12700">
+            <a:solidFill>
+              <a:schemeClr val="accent1"/>
+            </a:solidFill>
+            <a:prstDash val="solid"/>
+          </a:ln>
+        </p:spPr>
+      </p:sp>
+      <p:pic>
+        <p:nvPicPr>
+          <p:cNvPr id="7" name="repo icon" descr="repo">    </p:cNvPr>
+          <p:cNvPicPr>
+            <a:picLocks noChangeAspect="1"/>
+          </p:cNvPicPr>
+          <p:nvPr/>
+        </p:nvPicPr>
+        <p:blipFill>
+          <a:blip r:embed="rId2"/>
+          <a:stretch>
+            <a:fillRect/>
+          </a:stretch>
+        </p:blipFill>
+        <p:spPr>
+          <a:xfrm>
+            <a:off x="6569964" y="1586484"/>
+            <a:ext cx="210312" cy="210312"/>
+          </a:xfrm>
+          <a:prstGeom prst="rect">
+            <a:avLst/>
+          </a:prstGeom>
+        </p:spPr>
+      </p:pic>
+      <p:sp>
+        <p:nvSpPr>
+          <p:cNvPr id="8" name="repo heading"/>
           <p:cNvSpPr txBox="1"/>
           <p:nvPr/>
         </p:nvSpPr>
         <p:spPr>
           <a:xfrm>
-            <a:off x="457200" y="3520440"/>
-            <a:ext cx="822960" cy="822960"/>
+            <a:off x="7013448" y="1463040"/>
+            <a:ext cx="1508760" cy="457200"/>
           </a:xfrm>
           <a:prstGeom prst="rect">
             <a:avLst/>
@@ -8596,27 +10747,27 @@
               <a:buNone/>
             </a:pPr>
             <a:r>
-              <a:rPr lang="en-US" sz="5400" b="1" dirty="0">
-                <a:solidFill>
-                  <a:schemeClr val="accent1"/>
+              <a:rPr lang="en-US" sz="1600" b="1" dirty="0">
+                <a:solidFill>
+                  <a:schemeClr val="tx2"/>
                 </a:solidFill>
               </a:rPr>
-              <a:t>5</a:t>
-            </a:r>
-            <a:endParaRPr lang="en-US" sz="5400" dirty="0"/>
-          </a:p>
-        </p:txBody>
-      </p:sp>
-      <p:sp>
-        <p:nvSpPr>
-          <p:cNvPr id="6" name="stat 1 label"/>
+              <a:t>One public repo</a:t>
+            </a:r>
+            <a:endParaRPr lang="en-US" sz="1600" dirty="0"/>
+          </a:p>
+        </p:txBody>
+      </p:sp>
+      <p:sp>
+        <p:nvSpPr>
+          <p:cNvPr id="9" name="repo points"/>
           <p:cNvSpPr txBox="1"/>
           <p:nvPr/>
         </p:nvSpPr>
         <p:spPr>
           <a:xfrm>
-            <a:off x="1325880" y="3520440"/>
-            <a:ext cx="1783080" cy="822960"/>
+            <a:off x="6446520" y="2103120"/>
+            <a:ext cx="2057400" cy="2331720"/>
           </a:xfrm>
           <a:prstGeom prst="rect">
             <a:avLst/>
@@ -8625,11 +10776,15 @@
           <a:ln/>
         </p:spPr>
         <p:txBody>
-          <a:bodyPr wrap="square" lIns="0" tIns="0" rIns="0" bIns="0" rtlCol="0" anchor="ctr"/>
-          <a:lstStyle/>
-          <a:p>
-            <a:pPr indent="0" marL="0">
-              <a:buNone/>
+          <a:bodyPr wrap="square" lIns="0" tIns="0" rIns="0" bIns="0" rtlCol="0" anchor="t"/>
+          <a:lstStyle/>
+          <a:p>
+            <a:pPr marL="342900" indent="-342900">
+              <a:spcAft>
+                <a:spcPts val="800"/>
+              </a:spcAft>
+              <a:buSzPct val="100000"/>
+              <a:buChar char="•"/>
             </a:pPr>
             <a:r>
               <a:rPr lang="en-US" sz="1400" dirty="0">
@@ -8637,151 +10792,25 @@
                   <a:schemeClr val="tx1"/>
                 </a:solidFill>
               </a:rPr>
-              <a:t>pods Running</a:t>
+              <a:t>Frontend, backend and deploy files</a:t>
             </a:r>
             <a:endParaRPr lang="en-US" sz="1400" dirty="0"/>
           </a:p>
-        </p:txBody>
-      </p:sp>
-      <p:sp>
-        <p:nvSpPr>
-          <p:cNvPr id="7" name="stat 2"/>
-          <p:cNvSpPr txBox="1"/>
-          <p:nvPr/>
-        </p:nvSpPr>
-        <p:spPr>
-          <a:xfrm>
-            <a:off x="3291840" y="3520440"/>
-            <a:ext cx="822960" cy="822960"/>
-          </a:xfrm>
-          <a:prstGeom prst="rect">
-            <a:avLst/>
-          </a:prstGeom>
-          <a:noFill/>
-          <a:ln/>
-        </p:spPr>
-        <p:txBody>
-          <a:bodyPr wrap="square" lIns="0" tIns="0" rIns="0" bIns="0" rtlCol="0" anchor="ctr"/>
-          <a:lstStyle/>
-          <a:p>
-            <a:pPr indent="0" marL="0">
-              <a:buNone/>
-            </a:pPr>
-            <a:r>
-              <a:rPr lang="en-US" sz="5400" b="1" dirty="0">
-                <a:solidFill>
-                  <a:schemeClr val="accent1"/>
+          <a:p>
+            <a:pPr marL="342900" indent="-342900">
+              <a:spcAft>
+                <a:spcPts val="800"/>
+              </a:spcAft>
+              <a:buSzPct val="100000"/>
+              <a:buChar char="•"/>
+            </a:pPr>
+            <a:r>
+              <a:rPr lang="en-US" sz="1400" dirty="0">
+                <a:solidFill>
+                  <a:schemeClr val="tx1"/>
                 </a:solidFill>
               </a:rPr>
-              <a:t>2</a:t>
-            </a:r>
-            <a:endParaRPr lang="en-US" sz="5400" dirty="0"/>
-          </a:p>
-        </p:txBody>
-      </p:sp>
-      <p:sp>
-        <p:nvSpPr>
-          <p:cNvPr id="8" name="stat 2 label"/>
-          <p:cNvSpPr txBox="1"/>
-          <p:nvPr/>
-        </p:nvSpPr>
-        <p:spPr>
-          <a:xfrm>
-            <a:off x="4160520" y="3520440"/>
-            <a:ext cx="1783080" cy="822960"/>
-          </a:xfrm>
-          <a:prstGeom prst="rect">
-            <a:avLst/>
-          </a:prstGeom>
-          <a:noFill/>
-          <a:ln/>
-        </p:spPr>
-        <p:txBody>
-          <a:bodyPr wrap="square" lIns="0" tIns="0" rIns="0" bIns="0" rtlCol="0" anchor="ctr"/>
-          <a:lstStyle/>
-          <a:p>
-            <a:pPr indent="0" marL="0">
-              <a:buNone/>
-            </a:pPr>
-            <a:r>
-              <a:rPr lang="en-US" sz="1400" dirty="0">
-                <a:solidFill>
-                  <a:schemeClr val="tx1"/>
-                </a:solidFill>
-              </a:rPr>
-              <a:t>copies each of the frontend and backend</a:t>
-            </a:r>
-            <a:endParaRPr lang="en-US" sz="1400" dirty="0"/>
-          </a:p>
-        </p:txBody>
-      </p:sp>
-      <p:sp>
-        <p:nvSpPr>
-          <p:cNvPr id="9" name="stat 3"/>
-          <p:cNvSpPr txBox="1"/>
-          <p:nvPr/>
-        </p:nvSpPr>
-        <p:spPr>
-          <a:xfrm>
-            <a:off x="6126480" y="3520440"/>
-            <a:ext cx="822960" cy="822960"/>
-          </a:xfrm>
-          <a:prstGeom prst="rect">
-            <a:avLst/>
-          </a:prstGeom>
-          <a:noFill/>
-          <a:ln/>
-        </p:spPr>
-        <p:txBody>
-          <a:bodyPr wrap="square" lIns="0" tIns="0" rIns="0" bIns="0" rtlCol="0" anchor="ctr"/>
-          <a:lstStyle/>
-          <a:p>
-            <a:pPr indent="0" marL="0">
-              <a:buNone/>
-            </a:pPr>
-            <a:r>
-              <a:rPr lang="en-US" sz="5400" b="1" dirty="0">
-                <a:solidFill>
-                  <a:schemeClr val="accent1"/>
-                </a:solidFill>
-              </a:rPr>
-              <a:t>0</a:t>
-            </a:r>
-            <a:endParaRPr lang="en-US" sz="5400" dirty="0"/>
-          </a:p>
-        </p:txBody>
-      </p:sp>
-      <p:sp>
-        <p:nvSpPr>
-          <p:cNvPr id="10" name="stat 3 label"/>
-          <p:cNvSpPr txBox="1"/>
-          <p:nvPr/>
-        </p:nvSpPr>
-        <p:spPr>
-          <a:xfrm>
-            <a:off x="6995160" y="3520440"/>
-            <a:ext cx="1783080" cy="822960"/>
-          </a:xfrm>
-          <a:prstGeom prst="rect">
-            <a:avLst/>
-          </a:prstGeom>
-          <a:noFill/>
-          <a:ln/>
-        </p:spPr>
-        <p:txBody>
-          <a:bodyPr wrap="square" lIns="0" tIns="0" rIns="0" bIns="0" rtlCol="0" anchor="ctr"/>
-          <a:lstStyle/>
-          <a:p>
-            <a:pPr indent="0" marL="0">
-              <a:buNone/>
-            </a:pPr>
-            <a:r>
-              <a:rPr lang="en-US" sz="1400" dirty="0">
-                <a:solidFill>
-                  <a:schemeClr val="tx1"/>
-                </a:solidFill>
-              </a:rPr>
-              <a:t>restarts</a:t>
+              <a:t>Every change is a commit</a:t>
             </a:r>
             <a:endParaRPr lang="en-US" sz="1400" dirty="0"/>
           </a:p>
@@ -8889,7 +10918,7 @@
                   <a:schemeClr val="tx2"/>
                 </a:solidFill>
               </a:rPr>
-              <a:t>The app, through Kubernetes</a:t>
+              <a:t>Proof 3: running on Kubernetes</a:t>
             </a:r>
             <a:endParaRPr lang="en-US" sz="3400" dirty="0"/>
           </a:p>
@@ -8897,14 +10926,14 @@
       </p:sp>
       <p:sp>
         <p:nvSpPr>
-          <p:cNvPr id="3" name="app via ingress screenshot frame"/>
+          <p:cNvPr id="3" name="kubernetes terminal frame"/>
           <p:cNvSpPr/>
           <p:nvPr/>
         </p:nvSpPr>
         <p:spPr>
           <a:xfrm>
             <a:off x="420624" y="1243584"/>
-            <a:ext cx="5559552" cy="3321627"/>
+            <a:ext cx="8020530" cy="2084832"/>
           </a:xfrm>
           <a:prstGeom prst="rect">
             <a:avLst/>
@@ -8929,7 +10958,7 @@
       </p:sp>
       <p:pic>
         <p:nvPicPr>
-          <p:cNvPr id="4" name="app via ingress screenshot" descr="The Products page of the app opened through the Kubernetes ingress">    </p:cNvPr>
+          <p:cNvPr id="4" name="kubernetes terminal" descr="Terminal showing kubectl get pods, kubectl get svc and helm list">    </p:cNvPr>
           <p:cNvPicPr>
             <a:picLocks noChangeAspect="1"/>
           </p:cNvPicPr>
@@ -8944,7 +10973,7 @@
         <p:spPr>
           <a:xfrm>
             <a:off x="457200" y="1280160"/>
-            <a:ext cx="5486400" cy="3248475"/>
+            <a:ext cx="7947378" cy="2011680"/>
           </a:xfrm>
           <a:prstGeom prst="rect">
             <a:avLst/>
@@ -8953,90 +10982,14 @@
       </p:pic>
       <p:sp>
         <p:nvSpPr>
-          <p:cNvPr id="5" name="ingress card"/>
-          <p:cNvSpPr/>
-          <p:nvPr/>
-        </p:nvSpPr>
-        <p:spPr>
-          <a:xfrm>
-            <a:off x="6263640" y="1280160"/>
-            <a:ext cx="2423160" cy="3291840"/>
-          </a:xfrm>
-          <a:prstGeom prst="roundRect">
-            <a:avLst>
-              <a:gd name="adj" fmla="val 4528"/>
-            </a:avLst>
-          </a:prstGeom>
-          <a:solidFill>
-            <a:schemeClr val="bg2"/>
-          </a:solidFill>
-          <a:ln w="12700">
-            <a:solidFill>
-              <a:schemeClr val="bg2"/>
-            </a:solidFill>
-            <a:prstDash val="solid"/>
-          </a:ln>
-        </p:spPr>
-      </p:sp>
-      <p:sp>
-        <p:nvSpPr>
-          <p:cNvPr id="6" name="ingress circle"/>
-          <p:cNvSpPr/>
-          <p:nvPr/>
-        </p:nvSpPr>
-        <p:spPr>
-          <a:xfrm>
-            <a:off x="6446520" y="1463040"/>
-            <a:ext cx="457200" cy="457200"/>
-          </a:xfrm>
-          <a:prstGeom prst="ellipse">
-            <a:avLst/>
-          </a:prstGeom>
-          <a:solidFill>
-            <a:schemeClr val="accent1"/>
-          </a:solidFill>
-          <a:ln w="12700">
-            <a:solidFill>
-              <a:schemeClr val="accent1"/>
-            </a:solidFill>
-            <a:prstDash val="solid"/>
-          </a:ln>
-        </p:spPr>
-      </p:sp>
-      <p:pic>
-        <p:nvPicPr>
-          <p:cNvPr id="7" name="ingress icon" descr="ingress">    </p:cNvPr>
-          <p:cNvPicPr>
-            <a:picLocks noChangeAspect="1"/>
-          </p:cNvPicPr>
-          <p:nvPr/>
-        </p:nvPicPr>
-        <p:blipFill>
-          <a:blip r:embed="rId2"/>
-          <a:stretch>
-            <a:fillRect/>
-          </a:stretch>
-        </p:blipFill>
-        <p:spPr>
-          <a:xfrm>
-            <a:off x="6569964" y="1586484"/>
-            <a:ext cx="210312" cy="210312"/>
-          </a:xfrm>
-          <a:prstGeom prst="rect">
-            <a:avLst/>
-          </a:prstGeom>
-        </p:spPr>
-      </p:pic>
-      <p:sp>
-        <p:nvSpPr>
-          <p:cNvPr id="8" name="ingress heading"/>
+          <p:cNvPr id="5" name="stat 1"/>
           <p:cNvSpPr txBox="1"/>
           <p:nvPr/>
         </p:nvSpPr>
         <p:spPr>
           <a:xfrm>
-            <a:off x="7013448" y="1463040"/>
-            <a:ext cx="1508760" cy="457200"/>
+            <a:off x="457200" y="3520440"/>
+            <a:ext cx="822960" cy="822960"/>
           </a:xfrm>
           <a:prstGeom prst="rect">
             <a:avLst/>
@@ -9052,27 +11005,27 @@
               <a:buNone/>
             </a:pPr>
             <a:r>
-              <a:rPr lang="en-US" sz="1600" b="1" dirty="0">
-                <a:solidFill>
-                  <a:schemeClr val="tx2"/>
+              <a:rPr lang="en-US" sz="5400" b="1" dirty="0">
+                <a:solidFill>
+                  <a:schemeClr val="accent1"/>
                 </a:solidFill>
               </a:rPr>
-              <a:t>The front door</a:t>
-            </a:r>
-            <a:endParaRPr lang="en-US" sz="1600" dirty="0"/>
-          </a:p>
-        </p:txBody>
-      </p:sp>
-      <p:sp>
-        <p:nvSpPr>
-          <p:cNvPr id="9" name="ingress points"/>
+              <a:t>5</a:t>
+            </a:r>
+            <a:endParaRPr lang="en-US" sz="5400" dirty="0"/>
+          </a:p>
+        </p:txBody>
+      </p:sp>
+      <p:sp>
+        <p:nvSpPr>
+          <p:cNvPr id="6" name="stat 1 label"/>
           <p:cNvSpPr txBox="1"/>
           <p:nvPr/>
         </p:nvSpPr>
         <p:spPr>
           <a:xfrm>
-            <a:off x="6446520" y="2103120"/>
-            <a:ext cx="2057400" cy="2331720"/>
+            <a:off x="1325880" y="3520440"/>
+            <a:ext cx="1783080" cy="822960"/>
           </a:xfrm>
           <a:prstGeom prst="rect">
             <a:avLst/>
@@ -9081,15 +11034,11 @@
           <a:ln/>
         </p:spPr>
         <p:txBody>
-          <a:bodyPr wrap="square" lIns="0" tIns="0" rIns="0" bIns="0" rtlCol="0" anchor="t"/>
-          <a:lstStyle/>
-          <a:p>
-            <a:pPr marL="342900" indent="-342900">
-              <a:spcAft>
-                <a:spcPts val="800"/>
-              </a:spcAft>
-              <a:buSzPct val="100000"/>
-              <a:buChar char="•"/>
+          <a:bodyPr wrap="square" lIns="0" tIns="0" rIns="0" bIns="0" rtlCol="0" anchor="ctr"/>
+          <a:lstStyle/>
+          <a:p>
+            <a:pPr indent="0" marL="0">
+              <a:buNone/>
             </a:pPr>
             <a:r>
               <a:rPr lang="en-US" sz="1400" dirty="0">
@@ -9097,17 +11046,71 @@
                   <a:schemeClr val="tx1"/>
                 </a:solidFill>
               </a:rPr>
-              <a:t>An Ingress sends / to the page and /api to the backend</a:t>
+              <a:t>pods Running</a:t>
             </a:r>
             <a:endParaRPr lang="en-US" sz="1400" dirty="0"/>
           </a:p>
-          <a:p>
-            <a:pPr marL="342900" indent="-342900">
-              <a:spcAft>
-                <a:spcPts val="800"/>
-              </a:spcAft>
-              <a:buSzPct val="100000"/>
-              <a:buChar char="•"/>
+        </p:txBody>
+      </p:sp>
+      <p:sp>
+        <p:nvSpPr>
+          <p:cNvPr id="7" name="stat 2"/>
+          <p:cNvSpPr txBox="1"/>
+          <p:nvPr/>
+        </p:nvSpPr>
+        <p:spPr>
+          <a:xfrm>
+            <a:off x="3291840" y="3520440"/>
+            <a:ext cx="822960" cy="822960"/>
+          </a:xfrm>
+          <a:prstGeom prst="rect">
+            <a:avLst/>
+          </a:prstGeom>
+          <a:noFill/>
+          <a:ln/>
+        </p:spPr>
+        <p:txBody>
+          <a:bodyPr wrap="square" lIns="0" tIns="0" rIns="0" bIns="0" rtlCol="0" anchor="ctr"/>
+          <a:lstStyle/>
+          <a:p>
+            <a:pPr indent="0" marL="0">
+              <a:buNone/>
+            </a:pPr>
+            <a:r>
+              <a:rPr lang="en-US" sz="5400" b="1" dirty="0">
+                <a:solidFill>
+                  <a:schemeClr val="accent1"/>
+                </a:solidFill>
+              </a:rPr>
+              <a:t>2</a:t>
+            </a:r>
+            <a:endParaRPr lang="en-US" sz="5400" dirty="0"/>
+          </a:p>
+        </p:txBody>
+      </p:sp>
+      <p:sp>
+        <p:nvSpPr>
+          <p:cNvPr id="8" name="stat 2 label"/>
+          <p:cNvSpPr txBox="1"/>
+          <p:nvPr/>
+        </p:nvSpPr>
+        <p:spPr>
+          <a:xfrm>
+            <a:off x="4160520" y="3520440"/>
+            <a:ext cx="1783080" cy="822960"/>
+          </a:xfrm>
+          <a:prstGeom prst="rect">
+            <a:avLst/>
+          </a:prstGeom>
+          <a:noFill/>
+          <a:ln/>
+        </p:spPr>
+        <p:txBody>
+          <a:bodyPr wrap="square" lIns="0" tIns="0" rIns="0" bIns="0" rtlCol="0" anchor="ctr"/>
+          <a:lstStyle/>
+          <a:p>
+            <a:pPr indent="0" marL="0">
+              <a:buNone/>
             </a:pPr>
             <a:r>
               <a:rPr lang="en-US" sz="1400" dirty="0">
@@ -9115,17 +11118,71 @@
                   <a:schemeClr val="tx1"/>
                 </a:solidFill>
               </a:rPr>
-              <a:t>Same app, now served by the cluster</a:t>
+              <a:t>copies each of frontend and backend</a:t>
             </a:r>
             <a:endParaRPr lang="en-US" sz="1400" dirty="0"/>
           </a:p>
-          <a:p>
-            <a:pPr marL="342900" indent="-342900">
-              <a:spcAft>
-                <a:spcPts val="800"/>
-              </a:spcAft>
-              <a:buSzPct val="100000"/>
-              <a:buChar char="•"/>
+        </p:txBody>
+      </p:sp>
+      <p:sp>
+        <p:nvSpPr>
+          <p:cNvPr id="9" name="stat 3"/>
+          <p:cNvSpPr txBox="1"/>
+          <p:nvPr/>
+        </p:nvSpPr>
+        <p:spPr>
+          <a:xfrm>
+            <a:off x="6126480" y="3520440"/>
+            <a:ext cx="822960" cy="822960"/>
+          </a:xfrm>
+          <a:prstGeom prst="rect">
+            <a:avLst/>
+          </a:prstGeom>
+          <a:noFill/>
+          <a:ln/>
+        </p:spPr>
+        <p:txBody>
+          <a:bodyPr wrap="square" lIns="0" tIns="0" rIns="0" bIns="0" rtlCol="0" anchor="ctr"/>
+          <a:lstStyle/>
+          <a:p>
+            <a:pPr indent="0" marL="0">
+              <a:buNone/>
+            </a:pPr>
+            <a:r>
+              <a:rPr lang="en-US" sz="5400" b="1" dirty="0">
+                <a:solidFill>
+                  <a:schemeClr val="accent1"/>
+                </a:solidFill>
+              </a:rPr>
+              <a:t>0</a:t>
+            </a:r>
+            <a:endParaRPr lang="en-US" sz="5400" dirty="0"/>
+          </a:p>
+        </p:txBody>
+      </p:sp>
+      <p:sp>
+        <p:nvSpPr>
+          <p:cNvPr id="10" name="stat 3 label"/>
+          <p:cNvSpPr txBox="1"/>
+          <p:nvPr/>
+        </p:nvSpPr>
+        <p:spPr>
+          <a:xfrm>
+            <a:off x="6995160" y="3520440"/>
+            <a:ext cx="1783080" cy="822960"/>
+          </a:xfrm>
+          <a:prstGeom prst="rect">
+            <a:avLst/>
+          </a:prstGeom>
+          <a:noFill/>
+          <a:ln/>
+        </p:spPr>
+        <p:txBody>
+          <a:bodyPr wrap="square" lIns="0" tIns="0" rIns="0" bIns="0" rtlCol="0" anchor="ctr"/>
+          <a:lstStyle/>
+          <a:p>
+            <a:pPr indent="0" marL="0">
+              <a:buNone/>
             </a:pPr>
             <a:r>
               <a:rPr lang="en-US" sz="1400" dirty="0">
@@ -9133,7 +11190,7 @@
                   <a:schemeClr val="tx1"/>
                 </a:solidFill>
               </a:rPr>
-              <a:t>Data comes from the database pod</a:t>
+              <a:t>restarts</a:t>
             </a:r>
             <a:endParaRPr lang="en-US" sz="1400" dirty="0"/>
           </a:p>
